--- a/Status-Page-Presentation.pptx
+++ b/Status-Page-Presentation.pptx
@@ -2123,7 +2123,67 @@
       </p:grpSpPr>
       <p:sp>
         <p:nvSpPr>
-          <p:cNvPr id="2" name="Text 0"/>
+          <p:cNvPr id="2" name="Shape 0"/>
+          <p:cNvSpPr/>
+          <p:nvPr/>
+        </p:nvSpPr>
+        <p:spPr>
+          <a:xfrm>
+            <a:off x="9966960" y="822960"/>
+            <a:ext cx="256032" cy="256032"/>
+          </a:xfrm>
+          <a:prstGeom prst="ellipse">
+            <a:avLst/>
+          </a:prstGeom>
+          <a:solidFill>
+            <a:srgbClr val="2F9E6E"/>
+          </a:solidFill>
+          <a:ln/>
+        </p:spPr>
+      </p:sp>
+      <p:sp>
+        <p:nvSpPr>
+          <p:cNvPr id="3" name="Shape 1"/>
+          <p:cNvSpPr/>
+          <p:nvPr/>
+        </p:nvSpPr>
+        <p:spPr>
+          <a:xfrm>
+            <a:off x="10469880" y="822960"/>
+            <a:ext cx="256032" cy="256032"/>
+          </a:xfrm>
+          <a:prstGeom prst="ellipse">
+            <a:avLst/>
+          </a:prstGeom>
+          <a:solidFill>
+            <a:srgbClr val="F5A623"/>
+          </a:solidFill>
+          <a:ln/>
+        </p:spPr>
+      </p:sp>
+      <p:sp>
+        <p:nvSpPr>
+          <p:cNvPr id="4" name="Shape 2"/>
+          <p:cNvSpPr/>
+          <p:nvPr/>
+        </p:nvSpPr>
+        <p:spPr>
+          <a:xfrm>
+            <a:off x="10972800" y="822960"/>
+            <a:ext cx="256032" cy="256032"/>
+          </a:xfrm>
+          <a:prstGeom prst="ellipse">
+            <a:avLst/>
+          </a:prstGeom>
+          <a:solidFill>
+            <a:srgbClr val="CADCFC"/>
+          </a:solidFill>
+          <a:ln/>
+        </p:spPr>
+      </p:sp>
+      <p:sp>
+        <p:nvSpPr>
+          <p:cNvPr id="5" name="Text 3"/>
           <p:cNvSpPr txBox="1"/>
           <p:nvPr/>
         </p:nvSpPr>
@@ -2162,7 +2222,7 @@
       </p:sp>
       <p:sp>
         <p:nvSpPr>
-          <p:cNvPr id="3" name="Text 1"/>
+          <p:cNvPr id="6" name="Text 4"/>
           <p:cNvSpPr txBox="1"/>
           <p:nvPr/>
         </p:nvSpPr>
@@ -2201,7 +2261,7 @@
       </p:sp>
       <p:sp>
         <p:nvSpPr>
-          <p:cNvPr id="4" name="Text 2"/>
+          <p:cNvPr id="7" name="Text 5"/>
           <p:cNvSpPr txBox="1"/>
           <p:nvPr/>
         </p:nvSpPr>
@@ -2237,66 +2297,6 @@
             <a:endParaRPr lang="en-US" sz="1300" dirty="0"/>
           </a:p>
         </p:txBody>
-      </p:sp>
-      <p:sp>
-        <p:nvSpPr>
-          <p:cNvPr id="5" name="Shape 3"/>
-          <p:cNvSpPr/>
-          <p:nvPr/>
-        </p:nvSpPr>
-        <p:spPr>
-          <a:xfrm>
-            <a:off x="9966960" y="822960"/>
-            <a:ext cx="256032" cy="256032"/>
-          </a:xfrm>
-          <a:prstGeom prst="ellipse">
-            <a:avLst/>
-          </a:prstGeom>
-          <a:solidFill>
-            <a:srgbClr val="2F9E6E"/>
-          </a:solidFill>
-          <a:ln/>
-        </p:spPr>
-      </p:sp>
-      <p:sp>
-        <p:nvSpPr>
-          <p:cNvPr id="6" name="Shape 4"/>
-          <p:cNvSpPr/>
-          <p:nvPr/>
-        </p:nvSpPr>
-        <p:spPr>
-          <a:xfrm>
-            <a:off x="10469880" y="822960"/>
-            <a:ext cx="256032" cy="256032"/>
-          </a:xfrm>
-          <a:prstGeom prst="ellipse">
-            <a:avLst/>
-          </a:prstGeom>
-          <a:solidFill>
-            <a:srgbClr val="F5A623"/>
-          </a:solidFill>
-          <a:ln/>
-        </p:spPr>
-      </p:sp>
-      <p:sp>
-        <p:nvSpPr>
-          <p:cNvPr id="7" name="Shape 5"/>
-          <p:cNvSpPr/>
-          <p:nvPr/>
-        </p:nvSpPr>
-        <p:spPr>
-          <a:xfrm>
-            <a:off x="10972800" y="822960"/>
-            <a:ext cx="256032" cy="256032"/>
-          </a:xfrm>
-          <a:prstGeom prst="ellipse">
-            <a:avLst/>
-          </a:prstGeom>
-          <a:solidFill>
-            <a:srgbClr val="CADCFC"/>
-          </a:solidFill>
-          <a:ln/>
-        </p:spPr>
       </p:sp>
     </p:spTree>
   </p:cSld>
@@ -2309,13 +2309,6 @@
 <file path=ppt/slides/slide10.xml><?xml version="1.0" encoding="utf-8"?>
 <p:sld xmlns:a="http://schemas.openxmlformats.org/drawingml/2006/main" xmlns:r="http://schemas.openxmlformats.org/officeDocument/2006/relationships" xmlns:p="http://schemas.openxmlformats.org/presentationml/2006/main">
   <p:cSld name="Slide 10">
-    <p:bg>
-      <p:bgPr>
-        <a:solidFill>
-          <a:srgbClr val="FFFFFF"/>
-        </a:solidFill>
-      </p:bgPr>
-    </p:bg>
     <p:spTree>
       <p:nvGrpSpPr>
         <p:cNvPr id="1" name=""/>
@@ -2417,11 +2410,11 @@
         <p:spPr>
           <a:xfrm>
             <a:off x="548640" y="1920240"/>
-            <a:ext cx="5029200" cy="3291840"/>
+            <a:ext cx="5029200" cy="3108960"/>
           </a:xfrm>
           <a:prstGeom prst="roundRect">
             <a:avLst>
-              <a:gd name="adj" fmla="val 2222"/>
+              <a:gd name="adj" fmla="val 2353"/>
             </a:avLst>
           </a:prstGeom>
           <a:solidFill>
@@ -2433,13 +2426,6 @@
             </a:solidFill>
             <a:prstDash val="solid"/>
           </a:ln>
-          <a:effectLst>
-            <a:outerShdw sx="100000" sy="100000" kx="0" ky="0" algn="bl" rotWithShape="0" blurRad="101600" dist="38100" dir="5400000">
-              <a:srgbClr val="1E2761">
-                <a:alpha val="15000"/>
-              </a:srgbClr>
-            </a:outerShdw>
-          </a:effectLst>
         </p:spPr>
       </p:sp>
       <p:sp>
@@ -2450,8 +2436,8 @@
         </p:nvSpPr>
         <p:spPr>
           <a:xfrm>
-            <a:off x="822960" y="2148840"/>
-            <a:ext cx="4572000" cy="457200"/>
+            <a:off x="822960" y="2194560"/>
+            <a:ext cx="4480560" cy="457200"/>
           </a:xfrm>
           <a:prstGeom prst="rect">
             <a:avLst/>
@@ -2489,8 +2475,8 @@
         </p:nvSpPr>
         <p:spPr>
           <a:xfrm>
-            <a:off x="822960" y="2743200"/>
-            <a:ext cx="4480560" cy="3840480"/>
+            <a:off x="822960" y="2834640"/>
+            <a:ext cx="4480560" cy="2011680"/>
           </a:xfrm>
           <a:prstGeom prst="rect">
             <a:avLst/>
@@ -2502,15 +2488,15 @@
           <a:bodyPr wrap="square" lIns="0" tIns="0" rIns="0" bIns="0" rtlCol="0" anchor="t"/>
           <a:lstStyle/>
           <a:p>
-            <a:pPr marL="228600" indent="-228600">
+            <a:pPr marL="342900" indent="-342900">
               <a:spcAft>
-                <a:spcPts val="800"/>
+                <a:spcPts val="1000"/>
               </a:spcAft>
               <a:buSzPct val="100000"/>
-              <a:buChar char="●"/>
-            </a:pPr>
-            <a:r>
-              <a:rPr lang="en-US" sz="1300" dirty="0">
+              <a:buChar char="•"/>
+            </a:pPr>
+            <a:r>
+              <a:rPr lang="en-US" sz="1350" dirty="0">
                 <a:solidFill>
                   <a:srgbClr val="24304A"/>
                 </a:solidFill>
@@ -2520,18 +2506,18 @@
               </a:rPr>
               <a:t>Rolling updates briefly run 2 copies</a:t>
             </a:r>
-            <a:endParaRPr lang="en-US" sz="1300" dirty="0"/>
-          </a:p>
-          <a:p>
-            <a:pPr marL="228600" indent="-228600">
+            <a:endParaRPr lang="en-US" sz="1350" dirty="0"/>
+          </a:p>
+          <a:p>
+            <a:pPr marL="342900" indent="-342900">
               <a:spcAft>
-                <a:spcPts val="800"/>
+                <a:spcPts val="1000"/>
               </a:spcAft>
               <a:buSzPct val="100000"/>
-              <a:buChar char="●"/>
-            </a:pPr>
-            <a:r>
-              <a:rPr lang="en-US" sz="1300" dirty="0">
+              <a:buChar char="•"/>
+            </a:pPr>
+            <a:r>
+              <a:rPr lang="en-US" sz="1350" dirty="0">
                 <a:solidFill>
                   <a:srgbClr val="24304A"/>
                 </a:solidFill>
@@ -2541,18 +2527,18 @@
               </a:rPr>
               <a:t>2 schedulers = every job fires twice</a:t>
             </a:r>
-            <a:endParaRPr lang="en-US" sz="1300" dirty="0"/>
-          </a:p>
-          <a:p>
-            <a:pPr marL="228600" indent="-228600">
+            <a:endParaRPr lang="en-US" sz="1350" dirty="0"/>
+          </a:p>
+          <a:p>
+            <a:pPr marL="342900" indent="-342900">
               <a:spcAft>
-                <a:spcPts val="800"/>
+                <a:spcPts val="1000"/>
               </a:spcAft>
               <a:buSzPct val="100000"/>
-              <a:buChar char="●"/>
-            </a:pPr>
-            <a:r>
-              <a:rPr lang="en-US" sz="1300" dirty="0">
+              <a:buChar char="•"/>
+            </a:pPr>
+            <a:r>
+              <a:rPr lang="en-US" sz="1350" dirty="0">
                 <a:solidFill>
                   <a:srgbClr val="24304A"/>
                 </a:solidFill>
@@ -2562,7 +2548,7 @@
               </a:rPr>
               <a:t>Fixed: strategy: Recreate — old pod dies before new one starts</a:t>
             </a:r>
-            <a:endParaRPr lang="en-US" sz="1300" dirty="0"/>
+            <a:endParaRPr lang="en-US" sz="1350" dirty="0"/>
           </a:p>
         </p:txBody>
       </p:sp>
@@ -2575,11 +2561,11 @@
         <p:spPr>
           <a:xfrm>
             <a:off x="5760720" y="1920240"/>
-            <a:ext cx="4937760" cy="3291840"/>
+            <a:ext cx="4937760" cy="3108960"/>
           </a:xfrm>
           <a:prstGeom prst="roundRect">
             <a:avLst>
-              <a:gd name="adj" fmla="val 2222"/>
+              <a:gd name="adj" fmla="val 2353"/>
             </a:avLst>
           </a:prstGeom>
           <a:solidFill>
@@ -2591,13 +2577,6 @@
             </a:solidFill>
             <a:prstDash val="solid"/>
           </a:ln>
-          <a:effectLst>
-            <a:outerShdw sx="100000" sy="100000" kx="0" ky="0" algn="bl" rotWithShape="0" blurRad="101600" dist="38100" dir="5400000">
-              <a:srgbClr val="1E2761">
-                <a:alpha val="15000"/>
-              </a:srgbClr>
-            </a:outerShdw>
-          </a:effectLst>
         </p:spPr>
       </p:sp>
       <p:sp>
@@ -2608,8 +2587,8 @@
         </p:nvSpPr>
         <p:spPr>
           <a:xfrm>
-            <a:off x="6035040" y="2148840"/>
-            <a:ext cx="4572000" cy="457200"/>
+            <a:off x="6035040" y="2194560"/>
+            <a:ext cx="4389120" cy="457200"/>
           </a:xfrm>
           <a:prstGeom prst="rect">
             <a:avLst/>
@@ -2647,8 +2626,8 @@
         </p:nvSpPr>
         <p:spPr>
           <a:xfrm>
-            <a:off x="6035040" y="2743200"/>
-            <a:ext cx="4480560" cy="3840480"/>
+            <a:off x="6035040" y="2834640"/>
+            <a:ext cx="4389120" cy="2011680"/>
           </a:xfrm>
           <a:prstGeom prst="rect">
             <a:avLst/>
@@ -2660,15 +2639,15 @@
           <a:bodyPr wrap="square" lIns="0" tIns="0" rIns="0" bIns="0" rtlCol="0" anchor="t"/>
           <a:lstStyle/>
           <a:p>
-            <a:pPr marL="228600" indent="-228600">
+            <a:pPr marL="342900" indent="-342900">
               <a:spcAft>
-                <a:spcPts val="800"/>
+                <a:spcPts val="1000"/>
               </a:spcAft>
               <a:buSzPct val="100000"/>
-              <a:buChar char="●"/>
-            </a:pPr>
-            <a:r>
-              <a:rPr lang="en-US" sz="1300" dirty="0">
+              <a:buChar char="•"/>
+            </a:pPr>
+            <a:r>
+              <a:rPr lang="en-US" sz="1350" dirty="0">
                 <a:solidFill>
                   <a:srgbClr val="24304A"/>
                 </a:solidFill>
@@ -2678,18 +2657,18 @@
               </a:rPr>
               <a:t>Nothing stopped all replicas landing on one node</a:t>
             </a:r>
-            <a:endParaRPr lang="en-US" sz="1300" dirty="0"/>
-          </a:p>
-          <a:p>
-            <a:pPr marL="228600" indent="-228600">
+            <a:endParaRPr lang="en-US" sz="1350" dirty="0"/>
+          </a:p>
+          <a:p>
+            <a:pPr marL="342900" indent="-342900">
               <a:spcAft>
-                <a:spcPts val="800"/>
+                <a:spcPts val="1000"/>
               </a:spcAft>
               <a:buSzPct val="100000"/>
-              <a:buChar char="●"/>
-            </a:pPr>
-            <a:r>
-              <a:rPr lang="en-US" sz="1300" dirty="0">
+              <a:buChar char="•"/>
+            </a:pPr>
+            <a:r>
+              <a:rPr lang="en-US" sz="1350" dirty="0">
                 <a:solidFill>
                   <a:srgbClr val="24304A"/>
                 </a:solidFill>
@@ -2699,18 +2678,18 @@
               </a:rPr>
               <a:t>Fixed: topologySpreadConstraints across nodes + AZs</a:t>
             </a:r>
-            <a:endParaRPr lang="en-US" sz="1300" dirty="0"/>
-          </a:p>
-          <a:p>
-            <a:pPr marL="228600" indent="-228600">
+            <a:endParaRPr lang="en-US" sz="1350" dirty="0"/>
+          </a:p>
+          <a:p>
+            <a:pPr marL="342900" indent="-342900">
               <a:spcAft>
-                <a:spcPts val="800"/>
+                <a:spcPts val="1000"/>
               </a:spcAft>
               <a:buSzPct val="100000"/>
-              <a:buChar char="●"/>
-            </a:pPr>
-            <a:r>
-              <a:rPr lang="en-US" sz="1300" dirty="0">
+              <a:buChar char="•"/>
+            </a:pPr>
+            <a:r>
+              <a:rPr lang="en-US" sz="1350" dirty="0">
                 <a:solidFill>
                   <a:srgbClr val="24304A"/>
                 </a:solidFill>
@@ -2720,7 +2699,7 @@
               </a:rPr>
               <a:t>One AZ failure no longer takes out every replica</a:t>
             </a:r>
-            <a:endParaRPr lang="en-US" sz="1300" dirty="0"/>
+            <a:endParaRPr lang="en-US" sz="1350" dirty="0"/>
           </a:p>
         </p:txBody>
       </p:sp>
@@ -2732,8 +2711,47 @@
         </p:nvSpPr>
         <p:spPr>
           <a:xfrm>
-            <a:off x="548640" y="5486400"/>
-            <a:ext cx="10058400" cy="457200"/>
+            <a:off x="548640" y="5349240"/>
+            <a:ext cx="10149840" cy="411480"/>
+          </a:xfrm>
+          <a:prstGeom prst="rect">
+            <a:avLst/>
+          </a:prstGeom>
+          <a:noFill/>
+          <a:ln/>
+        </p:spPr>
+        <p:txBody>
+          <a:bodyPr wrap="square" lIns="0" tIns="0" rIns="0" bIns="0" rtlCol="0" anchor="ctr"/>
+          <a:lstStyle/>
+          <a:p>
+            <a:pPr algn="ctr" indent="0" marL="0">
+              <a:buNone/>
+            </a:pPr>
+            <a:r>
+              <a:rPr lang="en-US" sz="1350" i="1" dirty="0">
+                <a:solidFill>
+                  <a:srgbClr val="5B6B8C"/>
+                </a:solidFill>
+                <a:latin typeface="Calibri" pitchFamily="34" charset="0"/>
+                <a:ea typeface="Calibri" pitchFamily="34" charset="-122"/>
+                <a:cs typeface="Calibri" pitchFamily="34" charset="-120"/>
+              </a:rPr>
+              <a:t>Found during mentor review — fixed before build, not in production.</a:t>
+            </a:r>
+            <a:endParaRPr lang="en-US" sz="1350" dirty="0"/>
+          </a:p>
+        </p:txBody>
+      </p:sp>
+      <p:sp>
+        <p:nvSpPr>
+          <p:cNvPr id="11" name="Text 9"/>
+          <p:cNvSpPr txBox="1"/>
+          <p:nvPr/>
+        </p:nvSpPr>
+        <p:spPr>
+          <a:xfrm>
+            <a:off x="11365992" y="6510528"/>
+            <a:ext cx="457200" cy="274320"/>
           </a:xfrm>
           <a:prstGeom prst="rect">
             <a:avLst/>
@@ -2746,45 +2764,6 @@
           <a:lstStyle/>
           <a:p>
             <a:pPr indent="0" marL="0">
-              <a:buNone/>
-            </a:pPr>
-            <a:r>
-              <a:rPr lang="en-US" sz="1300" i="1" dirty="0">
-                <a:solidFill>
-                  <a:srgbClr val="5B6B8C"/>
-                </a:solidFill>
-                <a:latin typeface="Calibri" pitchFamily="34" charset="0"/>
-                <a:ea typeface="Calibri" pitchFamily="34" charset="-122"/>
-                <a:cs typeface="Calibri" pitchFamily="34" charset="-120"/>
-              </a:rPr>
-              <a:t>Found during mentor review — fixed before build, not in production.</a:t>
-            </a:r>
-            <a:endParaRPr lang="en-US" sz="1300" dirty="0"/>
-          </a:p>
-        </p:txBody>
-      </p:sp>
-      <p:sp>
-        <p:nvSpPr>
-          <p:cNvPr id="11" name="Text 9"/>
-          <p:cNvSpPr txBox="1"/>
-          <p:nvPr/>
-        </p:nvSpPr>
-        <p:spPr>
-          <a:xfrm>
-            <a:off x="11365992" y="6400800"/>
-            <a:ext cx="457200" cy="274320"/>
-          </a:xfrm>
-          <a:prstGeom prst="rect">
-            <a:avLst/>
-          </a:prstGeom>
-          <a:noFill/>
-          <a:ln/>
-        </p:spPr>
-        <p:txBody>
-          <a:bodyPr wrap="square" lIns="0" tIns="0" rIns="0" bIns="0" rtlCol="0" anchor="ctr"/>
-          <a:lstStyle/>
-          <a:p>
-            <a:pPr algn="r" indent="0" marL="0">
               <a:buNone/>
             </a:pPr>
             <a:r>
@@ -2813,13 +2792,6 @@
 <file path=ppt/slides/slide11.xml><?xml version="1.0" encoding="utf-8"?>
 <p:sld xmlns:a="http://schemas.openxmlformats.org/drawingml/2006/main" xmlns:r="http://schemas.openxmlformats.org/officeDocument/2006/relationships" xmlns:p="http://schemas.openxmlformats.org/presentationml/2006/main">
   <p:cSld name="Slide 11">
-    <p:bg>
-      <p:bgPr>
-        <a:solidFill>
-          <a:srgbClr val="FFFFFF"/>
-        </a:solidFill>
-      </p:bgPr>
-    </p:bg>
     <p:spTree>
       <p:nvGrpSpPr>
         <p:cNvPr id="1" name=""/>
@@ -2920,7 +2892,7 @@
         </p:nvSpPr>
         <p:spPr>
           <a:xfrm>
-            <a:off x="640080" y="2926080"/>
+            <a:off x="640080" y="2377440"/>
             <a:ext cx="2331720" cy="1188720"/>
           </a:xfrm>
           <a:prstGeom prst="roundRect">
@@ -2937,13 +2909,6 @@
             </a:solidFill>
             <a:prstDash val="solid"/>
           </a:ln>
-          <a:effectLst>
-            <a:outerShdw sx="100000" sy="100000" kx="0" ky="0" algn="bl" rotWithShape="0" blurRad="101600" dist="38100" dir="5400000">
-              <a:srgbClr val="1E2761">
-                <a:alpha val="15000"/>
-              </a:srgbClr>
-            </a:outerShdw>
-          </a:effectLst>
         </p:spPr>
       </p:sp>
       <p:sp>
@@ -2954,8 +2919,8 @@
         </p:nvSpPr>
         <p:spPr>
           <a:xfrm>
-            <a:off x="713232" y="3246120"/>
-            <a:ext cx="2185416" cy="548640"/>
+            <a:off x="713232" y="2377440"/>
+            <a:ext cx="2185416" cy="1188720"/>
           </a:xfrm>
           <a:prstGeom prst="rect">
             <a:avLst/>
@@ -3010,14 +2975,14 @@
         </p:nvSpPr>
         <p:spPr>
           <a:xfrm>
-            <a:off x="2971800" y="3520440"/>
-            <a:ext cx="502920" cy="9144"/>
+            <a:off x="2971800" y="2971800"/>
+            <a:ext cx="502920" cy="0"/>
           </a:xfrm>
           <a:prstGeom prst="line">
             <a:avLst/>
           </a:prstGeom>
           <a:noFill/>
-          <a:ln w="25400">
+          <a:ln w="19050">
             <a:solidFill>
               <a:srgbClr val="5B6B8C"/>
             </a:solidFill>
@@ -3034,30 +2999,18 @@
         </p:nvSpPr>
         <p:spPr>
           <a:xfrm>
-            <a:off x="3474720" y="2926080"/>
-            <a:ext cx="2331720" cy="1188720"/>
+            <a:off x="3474720" y="2240280"/>
+            <a:ext cx="2331720" cy="1463040"/>
           </a:xfrm>
           <a:prstGeom prst="roundRect">
             <a:avLst>
-              <a:gd name="adj" fmla="val 6154"/>
+              <a:gd name="adj" fmla="val 5000"/>
             </a:avLst>
           </a:prstGeom>
           <a:solidFill>
-            <a:srgbClr val="E7EFF8"/>
+            <a:srgbClr val="1E2761"/>
           </a:solidFill>
-          <a:ln w="12700">
-            <a:solidFill>
-              <a:srgbClr val="3B6EA5"/>
-            </a:solidFill>
-            <a:prstDash val="solid"/>
-          </a:ln>
-          <a:effectLst>
-            <a:outerShdw sx="100000" sy="100000" kx="0" ky="0" algn="bl" rotWithShape="0" blurRad="101600" dist="38100" dir="5400000">
-              <a:srgbClr val="1E2761">
-                <a:alpha val="15000"/>
-              </a:srgbClr>
-            </a:outerShdw>
-          </a:effectLst>
+          <a:ln/>
         </p:spPr>
       </p:sp>
       <p:sp>
@@ -3068,8 +3021,8 @@
         </p:nvSpPr>
         <p:spPr>
           <a:xfrm>
-            <a:off x="3547872" y="3246120"/>
-            <a:ext cx="2185416" cy="548640"/>
+            <a:off x="3547872" y="2240280"/>
+            <a:ext cx="2185416" cy="1463040"/>
           </a:xfrm>
           <a:prstGeom prst="rect">
             <a:avLst/>
@@ -3085,9 +3038,9 @@
               <a:buNone/>
             </a:pPr>
             <a:r>
-              <a:rPr lang="en-US" sz="1300" b="1" dirty="0">
-                <a:solidFill>
-                  <a:srgbClr val="1E2761"/>
+              <a:rPr lang="en-US" sz="1400" b="1" dirty="0">
+                <a:solidFill>
+                  <a:srgbClr val="FFFFFF"/>
                 </a:solidFill>
                 <a:latin typeface="Calibri" pitchFamily="34" charset="0"/>
                 <a:ea typeface="Calibri" pitchFamily="34" charset="-122"/>
@@ -3095,16 +3048,16 @@
               </a:rPr>
               <a:t>External</a:t>
             </a:r>
-            <a:endParaRPr lang="en-US" sz="1300" dirty="0"/>
+            <a:endParaRPr lang="en-US" sz="1400" dirty="0"/>
           </a:p>
           <a:p>
             <a:pPr algn="ctr" indent="0" marL="0">
               <a:buNone/>
             </a:pPr>
             <a:r>
-              <a:rPr lang="en-US" sz="1300" b="1" dirty="0">
-                <a:solidFill>
-                  <a:srgbClr val="1E2761"/>
+              <a:rPr lang="en-US" sz="1400" b="1" dirty="0">
+                <a:solidFill>
+                  <a:srgbClr val="FFFFFF"/>
                 </a:solidFill>
                 <a:latin typeface="Calibri" pitchFamily="34" charset="0"/>
                 <a:ea typeface="Calibri" pitchFamily="34" charset="-122"/>
@@ -3112,7 +3065,7 @@
               </a:rPr>
               <a:t>Secrets Operator</a:t>
             </a:r>
-            <a:endParaRPr lang="en-US" sz="1300" dirty="0"/>
+            <a:endParaRPr lang="en-US" sz="1400" dirty="0"/>
           </a:p>
         </p:txBody>
       </p:sp>
@@ -3124,14 +3077,14 @@
         </p:nvSpPr>
         <p:spPr>
           <a:xfrm>
-            <a:off x="5806440" y="3520440"/>
-            <a:ext cx="502920" cy="9144"/>
+            <a:off x="5806440" y="2971800"/>
+            <a:ext cx="502920" cy="0"/>
           </a:xfrm>
           <a:prstGeom prst="line">
             <a:avLst/>
           </a:prstGeom>
           <a:noFill/>
-          <a:ln w="25400">
+          <a:ln w="19050">
             <a:solidFill>
               <a:srgbClr val="5B6B8C"/>
             </a:solidFill>
@@ -3148,7 +3101,7 @@
         </p:nvSpPr>
         <p:spPr>
           <a:xfrm>
-            <a:off x="6309360" y="2926080"/>
+            <a:off x="6309360" y="2377440"/>
             <a:ext cx="2331720" cy="1188720"/>
           </a:xfrm>
           <a:prstGeom prst="roundRect">
@@ -3165,13 +3118,6 @@
             </a:solidFill>
             <a:prstDash val="solid"/>
           </a:ln>
-          <a:effectLst>
-            <a:outerShdw sx="100000" sy="100000" kx="0" ky="0" algn="bl" rotWithShape="0" blurRad="101600" dist="38100" dir="5400000">
-              <a:srgbClr val="1E2761">
-                <a:alpha val="15000"/>
-              </a:srgbClr>
-            </a:outerShdw>
-          </a:effectLst>
         </p:spPr>
       </p:sp>
       <p:sp>
@@ -3182,8 +3128,8 @@
         </p:nvSpPr>
         <p:spPr>
           <a:xfrm>
-            <a:off x="6382512" y="3246120"/>
-            <a:ext cx="2185416" cy="548640"/>
+            <a:off x="6382512" y="2377440"/>
+            <a:ext cx="2185416" cy="1188720"/>
           </a:xfrm>
           <a:prstGeom prst="rect">
             <a:avLst/>
@@ -3238,14 +3184,14 @@
         </p:nvSpPr>
         <p:spPr>
           <a:xfrm>
-            <a:off x="8641080" y="3520440"/>
-            <a:ext cx="502920" cy="9144"/>
+            <a:off x="8641080" y="2971800"/>
+            <a:ext cx="502920" cy="0"/>
           </a:xfrm>
           <a:prstGeom prst="line">
             <a:avLst/>
           </a:prstGeom>
           <a:noFill/>
-          <a:ln w="25400">
+          <a:ln w="19050">
             <a:solidFill>
               <a:srgbClr val="5B6B8C"/>
             </a:solidFill>
@@ -3262,7 +3208,7 @@
         </p:nvSpPr>
         <p:spPr>
           <a:xfrm>
-            <a:off x="9144000" y="2926080"/>
+            <a:off x="9144000" y="2377440"/>
             <a:ext cx="2331720" cy="1188720"/>
           </a:xfrm>
           <a:prstGeom prst="roundRect">
@@ -3279,13 +3225,6 @@
             </a:solidFill>
             <a:prstDash val="solid"/>
           </a:ln>
-          <a:effectLst>
-            <a:outerShdw sx="100000" sy="100000" kx="0" ky="0" algn="bl" rotWithShape="0" blurRad="101600" dist="38100" dir="5400000">
-              <a:srgbClr val="1E2761">
-                <a:alpha val="15000"/>
-              </a:srgbClr>
-            </a:outerShdw>
-          </a:effectLst>
         </p:spPr>
       </p:sp>
       <p:sp>
@@ -3296,8 +3235,8 @@
         </p:nvSpPr>
         <p:spPr>
           <a:xfrm>
-            <a:off x="9217152" y="3246120"/>
-            <a:ext cx="2185416" cy="548640"/>
+            <a:off x="9217152" y="2377440"/>
+            <a:ext cx="2185416" cy="1188720"/>
           </a:xfrm>
           <a:prstGeom prst="rect">
             <a:avLst/>
@@ -3352,8 +3291,8 @@
         </p:nvSpPr>
         <p:spPr>
           <a:xfrm>
-            <a:off x="640080" y="4572000"/>
-            <a:ext cx="10515600" cy="457200"/>
+            <a:off x="3474720" y="3767328"/>
+            <a:ext cx="2331720" cy="274320"/>
           </a:xfrm>
           <a:prstGeom prst="rect">
             <a:avLst/>
@@ -3369,6 +3308,45 @@
               <a:buNone/>
             </a:pPr>
             <a:r>
+              <a:rPr lang="en-US" sz="1100" i="1" dirty="0">
+                <a:solidFill>
+                  <a:srgbClr val="5B6B8C"/>
+                </a:solidFill>
+                <a:latin typeface="Calibri" pitchFamily="34" charset="0"/>
+                <a:ea typeface="Calibri" pitchFamily="34" charset="-122"/>
+                <a:cs typeface="Calibri" pitchFamily="34" charset="-120"/>
+              </a:rPr>
+              <a:t>the one moving part we run</a:t>
+            </a:r>
+            <a:endParaRPr lang="en-US" sz="1100" dirty="0"/>
+          </a:p>
+        </p:txBody>
+      </p:sp>
+      <p:sp>
+        <p:nvSpPr>
+          <p:cNvPr id="16" name="Text 14"/>
+          <p:cNvSpPr txBox="1"/>
+          <p:nvPr/>
+        </p:nvSpPr>
+        <p:spPr>
+          <a:xfrm>
+            <a:off x="640080" y="4343400"/>
+            <a:ext cx="10515600" cy="365760"/>
+          </a:xfrm>
+          <a:prstGeom prst="rect">
+            <a:avLst/>
+          </a:prstGeom>
+          <a:noFill/>
+          <a:ln/>
+        </p:spPr>
+        <p:txBody>
+          <a:bodyPr wrap="square" lIns="0" tIns="0" rIns="0" bIns="0" rtlCol="0" anchor="ctr"/>
+          <a:lstStyle/>
+          <a:p>
+            <a:pPr algn="ctr" indent="0" marL="0">
+              <a:buNone/>
+            </a:pPr>
+            <a:r>
               <a:rPr lang="en-US" sz="1400" i="1" dirty="0">
                 <a:solidFill>
                   <a:srgbClr val="5B6B8C"/>
@@ -3385,14 +3363,14 @@
       </p:sp>
       <p:sp>
         <p:nvSpPr>
-          <p:cNvPr id="16" name="Text 14"/>
-          <p:cNvSpPr txBox="1"/>
-          <p:nvPr/>
-        </p:nvSpPr>
-        <p:spPr>
-          <a:xfrm>
-            <a:off x="640080" y="5120640"/>
-            <a:ext cx="10515600" cy="457200"/>
+          <p:cNvPr id="17" name="Text 15"/>
+          <p:cNvSpPr txBox="1"/>
+          <p:nvPr/>
+        </p:nvSpPr>
+        <p:spPr>
+          <a:xfrm>
+            <a:off x="640080" y="4754880"/>
+            <a:ext cx="10515600" cy="365760"/>
           </a:xfrm>
           <a:prstGeom prst="rect">
             <a:avLst/>
@@ -3424,13 +3402,74 @@
       </p:sp>
       <p:sp>
         <p:nvSpPr>
-          <p:cNvPr id="17" name="Text 15"/>
-          <p:cNvSpPr txBox="1"/>
-          <p:nvPr/>
-        </p:nvSpPr>
-        <p:spPr>
-          <a:xfrm>
-            <a:off x="11365992" y="6400800"/>
+          <p:cNvPr id="18" name="Shape 16"/>
+          <p:cNvSpPr/>
+          <p:nvPr/>
+        </p:nvSpPr>
+        <p:spPr>
+          <a:xfrm>
+            <a:off x="548640" y="5440680"/>
+            <a:ext cx="10149840" cy="731520"/>
+          </a:xfrm>
+          <a:prstGeom prst="roundRect">
+            <a:avLst>
+              <a:gd name="adj" fmla="val 10000"/>
+            </a:avLst>
+          </a:prstGeom>
+          <a:solidFill>
+            <a:srgbClr val="1E2761"/>
+          </a:solidFill>
+          <a:ln/>
+        </p:spPr>
+      </p:sp>
+      <p:sp>
+        <p:nvSpPr>
+          <p:cNvPr id="19" name="Text 17"/>
+          <p:cNvSpPr txBox="1"/>
+          <p:nvPr/>
+        </p:nvSpPr>
+        <p:spPr>
+          <a:xfrm>
+            <a:off x="640080" y="5440680"/>
+            <a:ext cx="9966960" cy="731520"/>
+          </a:xfrm>
+          <a:prstGeom prst="rect">
+            <a:avLst/>
+          </a:prstGeom>
+          <a:noFill/>
+          <a:ln/>
+        </p:spPr>
+        <p:txBody>
+          <a:bodyPr wrap="square" lIns="0" tIns="0" rIns="0" bIns="0" rtlCol="0" anchor="ctr"/>
+          <a:lstStyle/>
+          <a:p>
+            <a:pPr algn="ctr" indent="0" marL="0">
+              <a:buNone/>
+            </a:pPr>
+            <a:r>
+              <a:rPr lang="en-US" sz="1400" b="1" dirty="0">
+                <a:solidFill>
+                  <a:srgbClr val="FFFFFF"/>
+                </a:solidFill>
+                <a:latin typeface="Calibri" pitchFamily="34" charset="0"/>
+                <a:ea typeface="Calibri" pitchFamily="34" charset="-122"/>
+                <a:cs typeface="Calibri" pitchFamily="34" charset="-120"/>
+              </a:rPr>
+              <a:t>No password in git. No AWS key in a pod. Nothing to rotate by hand.</a:t>
+            </a:r>
+            <a:endParaRPr lang="en-US" sz="1400" dirty="0"/>
+          </a:p>
+        </p:txBody>
+      </p:sp>
+      <p:sp>
+        <p:nvSpPr>
+          <p:cNvPr id="20" name="Text 18"/>
+          <p:cNvSpPr txBox="1"/>
+          <p:nvPr/>
+        </p:nvSpPr>
+        <p:spPr>
+          <a:xfrm>
+            <a:off x="11365992" y="6510528"/>
             <a:ext cx="457200" cy="274320"/>
           </a:xfrm>
           <a:prstGeom prst="rect">
@@ -3443,7 +3482,7 @@
           <a:bodyPr wrap="square" lIns="0" tIns="0" rIns="0" bIns="0" rtlCol="0" anchor="ctr"/>
           <a:lstStyle/>
           <a:p>
-            <a:pPr algn="r" indent="0" marL="0">
+            <a:pPr indent="0" marL="0">
               <a:buNone/>
             </a:pPr>
             <a:r>
@@ -3472,13 +3511,6 @@
 <file path=ppt/slides/slide12.xml><?xml version="1.0" encoding="utf-8"?>
 <p:sld xmlns:a="http://schemas.openxmlformats.org/drawingml/2006/main" xmlns:r="http://schemas.openxmlformats.org/officeDocument/2006/relationships" xmlns:p="http://schemas.openxmlformats.org/presentationml/2006/main">
   <p:cSld name="Slide 12">
-    <p:bg>
-      <p:bgPr>
-        <a:solidFill>
-          <a:srgbClr val="FFFFFF"/>
-        </a:solidFill>
-      </p:bgPr>
-    </p:bg>
     <p:spTree>
       <p:nvGrpSpPr>
         <p:cNvPr id="1" name=""/>
@@ -3596,13 +3628,6 @@
             </a:solidFill>
             <a:prstDash val="solid"/>
           </a:ln>
-          <a:effectLst>
-            <a:outerShdw sx="100000" sy="100000" kx="0" ky="0" algn="bl" rotWithShape="0" blurRad="101600" dist="38100" dir="5400000">
-              <a:srgbClr val="1E2761">
-                <a:alpha val="15000"/>
-              </a:srgbClr>
-            </a:outerShdw>
-          </a:effectLst>
         </p:spPr>
       </p:sp>
       <p:sp>
@@ -3613,8 +3638,8 @@
         </p:nvSpPr>
         <p:spPr>
           <a:xfrm>
-            <a:off x="713232" y="2286000"/>
-            <a:ext cx="2185416" cy="548640"/>
+            <a:off x="713232" y="2011680"/>
+            <a:ext cx="2185416" cy="1097280"/>
           </a:xfrm>
           <a:prstGeom prst="rect">
             <a:avLst/>
@@ -3670,13 +3695,13 @@
         <p:spPr>
           <a:xfrm>
             <a:off x="2971800" y="2560320"/>
-            <a:ext cx="502920" cy="9144"/>
+            <a:ext cx="502920" cy="0"/>
           </a:xfrm>
           <a:prstGeom prst="line">
             <a:avLst/>
           </a:prstGeom>
           <a:noFill/>
-          <a:ln w="25400">
+          <a:ln w="19050">
             <a:solidFill>
               <a:srgbClr val="5B6B8C"/>
             </a:solidFill>
@@ -3710,13 +3735,6 @@
             </a:solidFill>
             <a:prstDash val="solid"/>
           </a:ln>
-          <a:effectLst>
-            <a:outerShdw sx="100000" sy="100000" kx="0" ky="0" algn="bl" rotWithShape="0" blurRad="101600" dist="38100" dir="5400000">
-              <a:srgbClr val="1E2761">
-                <a:alpha val="15000"/>
-              </a:srgbClr>
-            </a:outerShdw>
-          </a:effectLst>
         </p:spPr>
       </p:sp>
       <p:sp>
@@ -3727,8 +3745,8 @@
         </p:nvSpPr>
         <p:spPr>
           <a:xfrm>
-            <a:off x="3547872" y="2286000"/>
-            <a:ext cx="2185416" cy="548640"/>
+            <a:off x="3547872" y="2011680"/>
+            <a:ext cx="2185416" cy="1097280"/>
           </a:xfrm>
           <a:prstGeom prst="rect">
             <a:avLst/>
@@ -3784,13 +3802,13 @@
         <p:spPr>
           <a:xfrm>
             <a:off x="5806440" y="2560320"/>
-            <a:ext cx="502920" cy="9144"/>
+            <a:ext cx="502920" cy="0"/>
           </a:xfrm>
           <a:prstGeom prst="line">
             <a:avLst/>
           </a:prstGeom>
           <a:noFill/>
-          <a:ln w="25400">
+          <a:ln w="19050">
             <a:solidFill>
               <a:srgbClr val="5B6B8C"/>
             </a:solidFill>
@@ -3824,13 +3842,6 @@
             </a:solidFill>
             <a:prstDash val="solid"/>
           </a:ln>
-          <a:effectLst>
-            <a:outerShdw sx="100000" sy="100000" kx="0" ky="0" algn="bl" rotWithShape="0" blurRad="101600" dist="38100" dir="5400000">
-              <a:srgbClr val="1E2761">
-                <a:alpha val="15000"/>
-              </a:srgbClr>
-            </a:outerShdw>
-          </a:effectLst>
         </p:spPr>
       </p:sp>
       <p:sp>
@@ -3841,8 +3852,8 @@
         </p:nvSpPr>
         <p:spPr>
           <a:xfrm>
-            <a:off x="6382512" y="2286000"/>
-            <a:ext cx="2185416" cy="548640"/>
+            <a:off x="6382512" y="2011680"/>
+            <a:ext cx="2185416" cy="1097280"/>
           </a:xfrm>
           <a:prstGeom prst="rect">
             <a:avLst/>
@@ -3898,13 +3909,13 @@
         <p:spPr>
           <a:xfrm>
             <a:off x="8641080" y="2560320"/>
-            <a:ext cx="502920" cy="9144"/>
+            <a:ext cx="502920" cy="0"/>
           </a:xfrm>
           <a:prstGeom prst="line">
             <a:avLst/>
           </a:prstGeom>
           <a:noFill/>
-          <a:ln w="25400">
+          <a:ln w="19050">
             <a:solidFill>
               <a:srgbClr val="5B6B8C"/>
             </a:solidFill>
@@ -3938,13 +3949,6 @@
             </a:solidFill>
             <a:prstDash val="solid"/>
           </a:ln>
-          <a:effectLst>
-            <a:outerShdw sx="100000" sy="100000" kx="0" ky="0" algn="bl" rotWithShape="0" blurRad="101600" dist="38100" dir="5400000">
-              <a:srgbClr val="1E2761">
-                <a:alpha val="15000"/>
-              </a:srgbClr>
-            </a:outerShdw>
-          </a:effectLst>
         </p:spPr>
       </p:sp>
       <p:sp>
@@ -3955,8 +3959,8 @@
         </p:nvSpPr>
         <p:spPr>
           <a:xfrm>
-            <a:off x="9217152" y="2286000"/>
-            <a:ext cx="2185416" cy="548640"/>
+            <a:off x="9217152" y="2011680"/>
+            <a:ext cx="2185416" cy="1097280"/>
           </a:xfrm>
           <a:prstGeom prst="rect">
             <a:avLst/>
@@ -4011,7 +4015,7 @@
         </p:nvSpPr>
         <p:spPr>
           <a:xfrm>
-            <a:off x="640080" y="3566160"/>
+            <a:off x="640080" y="3611880"/>
             <a:ext cx="10515600" cy="822960"/>
           </a:xfrm>
           <a:prstGeom prst="roundRect">
@@ -4033,8 +4037,8 @@
         </p:nvSpPr>
         <p:spPr>
           <a:xfrm>
-            <a:off x="713232" y="3703320"/>
-            <a:ext cx="10369296" cy="548640"/>
+            <a:off x="731520" y="3611880"/>
+            <a:ext cx="10332720" cy="822960"/>
           </a:xfrm>
           <a:prstGeom prst="rect">
             <a:avLst/>
@@ -4072,7 +4076,7 @@
         </p:nvSpPr>
         <p:spPr>
           <a:xfrm>
-            <a:off x="640080" y="4663440"/>
+            <a:off x="640080" y="4892040"/>
             <a:ext cx="10515600" cy="1188720"/>
           </a:xfrm>
           <a:prstGeom prst="roundRect">
@@ -4099,8 +4103,86 @@
         </p:nvSpPr>
         <p:spPr>
           <a:xfrm>
-            <a:off x="914400" y="4846320"/>
-            <a:ext cx="10058400" cy="365760"/>
+            <a:off x="914400" y="5074920"/>
+            <a:ext cx="9966960" cy="365760"/>
+          </a:xfrm>
+          <a:prstGeom prst="rect">
+            <a:avLst/>
+          </a:prstGeom>
+          <a:noFill/>
+          <a:ln/>
+        </p:spPr>
+        <p:txBody>
+          <a:bodyPr wrap="square" lIns="0" tIns="0" rIns="0" bIns="0" rtlCol="0" anchor="ctr"/>
+          <a:lstStyle/>
+          <a:p>
+            <a:pPr algn="ctr" indent="0" marL="0">
+              <a:buNone/>
+            </a:pPr>
+            <a:r>
+              <a:rPr lang="en-US" sz="1300" b="1" dirty="0">
+                <a:solidFill>
+                  <a:srgbClr val="1E2761"/>
+                </a:solidFill>
+                <a:latin typeface="Calibri" pitchFamily="34" charset="0"/>
+                <a:ea typeface="Calibri" pitchFamily="34" charset="-122"/>
+                <a:cs typeface="Calibri" pitchFamily="34" charset="-120"/>
+              </a:rPr>
+              <a:t>Upstream repo archived since Oct 2025 — no more security fixes coming.</a:t>
+            </a:r>
+            <a:endParaRPr lang="en-US" sz="1300" dirty="0"/>
+          </a:p>
+        </p:txBody>
+      </p:sp>
+      <p:sp>
+        <p:nvSpPr>
+          <p:cNvPr id="19" name="Text 17"/>
+          <p:cNvSpPr txBox="1"/>
+          <p:nvPr/>
+        </p:nvSpPr>
+        <p:spPr>
+          <a:xfrm>
+            <a:off x="914400" y="5468112"/>
+            <a:ext cx="9966960" cy="365760"/>
+          </a:xfrm>
+          <a:prstGeom prst="rect">
+            <a:avLst/>
+          </a:prstGeom>
+          <a:noFill/>
+          <a:ln/>
+        </p:spPr>
+        <p:txBody>
+          <a:bodyPr wrap="square" lIns="0" tIns="0" rIns="0" bIns="0" rtlCol="0" anchor="ctr"/>
+          <a:lstStyle/>
+          <a:p>
+            <a:pPr algn="ctr" indent="0" marL="0">
+              <a:buNone/>
+            </a:pPr>
+            <a:r>
+              <a:rPr lang="en-US" sz="1250" dirty="0">
+                <a:solidFill>
+                  <a:srgbClr val="5B6B8C"/>
+                </a:solidFill>
+                <a:latin typeface="Calibri" pitchFamily="34" charset="0"/>
+                <a:ea typeface="Calibri" pitchFamily="34" charset="-122"/>
+                <a:cs typeface="Calibri" pitchFamily="34" charset="-120"/>
+              </a:rPr>
+              <a:t>Image scanning in this pipeline is exactly the mitigation for that gap.</a:t>
+            </a:r>
+            <a:endParaRPr lang="en-US" sz="1250" dirty="0"/>
+          </a:p>
+        </p:txBody>
+      </p:sp>
+      <p:sp>
+        <p:nvSpPr>
+          <p:cNvPr id="20" name="Text 18"/>
+          <p:cNvSpPr txBox="1"/>
+          <p:nvPr/>
+        </p:nvSpPr>
+        <p:spPr>
+          <a:xfrm>
+            <a:off x="11365992" y="6510528"/>
+            <a:ext cx="457200" cy="274320"/>
           </a:xfrm>
           <a:prstGeom prst="rect">
             <a:avLst/>
@@ -4113,84 +4195,6 @@
           <a:lstStyle/>
           <a:p>
             <a:pPr indent="0" marL="0">
-              <a:buNone/>
-            </a:pPr>
-            <a:r>
-              <a:rPr lang="en-US" sz="1300" b="1" dirty="0">
-                <a:solidFill>
-                  <a:srgbClr val="1E2761"/>
-                </a:solidFill>
-                <a:latin typeface="Calibri" pitchFamily="34" charset="0"/>
-                <a:ea typeface="Calibri" pitchFamily="34" charset="-122"/>
-                <a:cs typeface="Calibri" pitchFamily="34" charset="-120"/>
-              </a:rPr>
-              <a:t>Upstream repo archived since Oct 2025 — no more security fixes coming.</a:t>
-            </a:r>
-            <a:endParaRPr lang="en-US" sz="1300" dirty="0"/>
-          </a:p>
-        </p:txBody>
-      </p:sp>
-      <p:sp>
-        <p:nvSpPr>
-          <p:cNvPr id="19" name="Text 17"/>
-          <p:cNvSpPr txBox="1"/>
-          <p:nvPr/>
-        </p:nvSpPr>
-        <p:spPr>
-          <a:xfrm>
-            <a:off x="914400" y="5212080"/>
-            <a:ext cx="10058400" cy="365760"/>
-          </a:xfrm>
-          <a:prstGeom prst="rect">
-            <a:avLst/>
-          </a:prstGeom>
-          <a:noFill/>
-          <a:ln/>
-        </p:spPr>
-        <p:txBody>
-          <a:bodyPr wrap="square" lIns="0" tIns="0" rIns="0" bIns="0" rtlCol="0" anchor="ctr"/>
-          <a:lstStyle/>
-          <a:p>
-            <a:pPr indent="0" marL="0">
-              <a:buNone/>
-            </a:pPr>
-            <a:r>
-              <a:rPr lang="en-US" sz="1250" dirty="0">
-                <a:solidFill>
-                  <a:srgbClr val="5B6B8C"/>
-                </a:solidFill>
-                <a:latin typeface="Calibri" pitchFamily="34" charset="0"/>
-                <a:ea typeface="Calibri" pitchFamily="34" charset="-122"/>
-                <a:cs typeface="Calibri" pitchFamily="34" charset="-120"/>
-              </a:rPr>
-              <a:t>Image scanning in this pipeline is exactly the mitigation for that gap.</a:t>
-            </a:r>
-            <a:endParaRPr lang="en-US" sz="1250" dirty="0"/>
-          </a:p>
-        </p:txBody>
-      </p:sp>
-      <p:sp>
-        <p:nvSpPr>
-          <p:cNvPr id="20" name="Text 18"/>
-          <p:cNvSpPr txBox="1"/>
-          <p:nvPr/>
-        </p:nvSpPr>
-        <p:spPr>
-          <a:xfrm>
-            <a:off x="11365992" y="6400800"/>
-            <a:ext cx="457200" cy="274320"/>
-          </a:xfrm>
-          <a:prstGeom prst="rect">
-            <a:avLst/>
-          </a:prstGeom>
-          <a:noFill/>
-          <a:ln/>
-        </p:spPr>
-        <p:txBody>
-          <a:bodyPr wrap="square" lIns="0" tIns="0" rIns="0" bIns="0" rtlCol="0" anchor="ctr"/>
-          <a:lstStyle/>
-          <a:p>
-            <a:pPr algn="r" indent="0" marL="0">
               <a:buNone/>
             </a:pPr>
             <a:r>
@@ -4219,13 +4223,6 @@
 <file path=ppt/slides/slide13.xml><?xml version="1.0" encoding="utf-8"?>
 <p:sld xmlns:a="http://schemas.openxmlformats.org/drawingml/2006/main" xmlns:r="http://schemas.openxmlformats.org/officeDocument/2006/relationships" xmlns:p="http://schemas.openxmlformats.org/presentationml/2006/main">
   <p:cSld name="Slide 13">
-    <p:bg>
-      <p:bgPr>
-        <a:solidFill>
-          <a:srgbClr val="FFFFFF"/>
-        </a:solidFill>
-      </p:bgPr>
-    </p:bg>
     <p:spTree>
       <p:nvGrpSpPr>
         <p:cNvPr id="1" name=""/>
@@ -4327,12 +4324,10 @@
         <p:spPr>
           <a:xfrm>
             <a:off x="548640" y="1920240"/>
-            <a:ext cx="6949440" cy="566928"/>
-          </a:xfrm>
-          <a:prstGeom prst="roundRect">
-            <a:avLst>
-              <a:gd name="adj" fmla="val 12903"/>
-            </a:avLst>
+            <a:ext cx="6949440" cy="713232"/>
+          </a:xfrm>
+          <a:prstGeom prst="rect">
+            <a:avLst/>
           </a:prstGeom>
           <a:solidFill>
             <a:srgbClr val="F2F5FC"/>
@@ -4348,8 +4343,8 @@
         </p:nvSpPr>
         <p:spPr>
           <a:xfrm>
-            <a:off x="777240" y="1975104"/>
-            <a:ext cx="5029200" cy="457200"/>
+            <a:off x="777240" y="1920240"/>
+            <a:ext cx="5029200" cy="713232"/>
           </a:xfrm>
           <a:prstGeom prst="rect">
             <a:avLst/>
@@ -4387,8 +4382,8 @@
         </p:nvSpPr>
         <p:spPr>
           <a:xfrm>
-            <a:off x="5760720" y="1975104"/>
-            <a:ext cx="1600200" cy="457200"/>
+            <a:off x="5760720" y="1920240"/>
+            <a:ext cx="1600200" cy="713232"/>
           </a:xfrm>
           <a:prstGeom prst="rect">
             <a:avLst/>
@@ -4426,13 +4421,11 @@
         </p:nvSpPr>
         <p:spPr>
           <a:xfrm>
-            <a:off x="548640" y="2542032"/>
-            <a:ext cx="6949440" cy="566928"/>
-          </a:xfrm>
-          <a:prstGeom prst="roundRect">
-            <a:avLst>
-              <a:gd name="adj" fmla="val 12903"/>
-            </a:avLst>
+            <a:off x="548640" y="2633472"/>
+            <a:ext cx="6949440" cy="713232"/>
+          </a:xfrm>
+          <a:prstGeom prst="rect">
+            <a:avLst/>
           </a:prstGeom>
           <a:solidFill>
             <a:srgbClr val="FFFFFF"/>
@@ -4448,8 +4441,8 @@
         </p:nvSpPr>
         <p:spPr>
           <a:xfrm>
-            <a:off x="777240" y="2596896"/>
-            <a:ext cx="5029200" cy="457200"/>
+            <a:off x="777240" y="2633472"/>
+            <a:ext cx="5029200" cy="713232"/>
           </a:xfrm>
           <a:prstGeom prst="rect">
             <a:avLst/>
@@ -4487,8 +4480,8 @@
         </p:nvSpPr>
         <p:spPr>
           <a:xfrm>
-            <a:off x="5760720" y="2596896"/>
-            <a:ext cx="1600200" cy="457200"/>
+            <a:off x="5760720" y="2633472"/>
+            <a:ext cx="1600200" cy="713232"/>
           </a:xfrm>
           <a:prstGeom prst="rect">
             <a:avLst/>
@@ -4526,13 +4519,11 @@
         </p:nvSpPr>
         <p:spPr>
           <a:xfrm>
-            <a:off x="548640" y="3163824"/>
-            <a:ext cx="6949440" cy="566928"/>
-          </a:xfrm>
-          <a:prstGeom prst="roundRect">
-            <a:avLst>
-              <a:gd name="adj" fmla="val 12903"/>
-            </a:avLst>
+            <a:off x="548640" y="3346704"/>
+            <a:ext cx="6949440" cy="713232"/>
+          </a:xfrm>
+          <a:prstGeom prst="rect">
+            <a:avLst/>
           </a:prstGeom>
           <a:solidFill>
             <a:srgbClr val="F2F5FC"/>
@@ -4548,8 +4539,8 @@
         </p:nvSpPr>
         <p:spPr>
           <a:xfrm>
-            <a:off x="777240" y="3218688"/>
-            <a:ext cx="5029200" cy="457200"/>
+            <a:off x="777240" y="3346704"/>
+            <a:ext cx="5029200" cy="713232"/>
           </a:xfrm>
           <a:prstGeom prst="rect">
             <a:avLst/>
@@ -4587,8 +4578,8 @@
         </p:nvSpPr>
         <p:spPr>
           <a:xfrm>
-            <a:off x="5760720" y="3218688"/>
-            <a:ext cx="1600200" cy="457200"/>
+            <a:off x="5760720" y="3346704"/>
+            <a:ext cx="1600200" cy="713232"/>
           </a:xfrm>
           <a:prstGeom prst="rect">
             <a:avLst/>
@@ -4626,13 +4617,11 @@
         </p:nvSpPr>
         <p:spPr>
           <a:xfrm>
-            <a:off x="548640" y="3785616"/>
-            <a:ext cx="6949440" cy="566928"/>
-          </a:xfrm>
-          <a:prstGeom prst="roundRect">
-            <a:avLst>
-              <a:gd name="adj" fmla="val 12903"/>
-            </a:avLst>
+            <a:off x="548640" y="4059936"/>
+            <a:ext cx="6949440" cy="713232"/>
+          </a:xfrm>
+          <a:prstGeom prst="rect">
+            <a:avLst/>
           </a:prstGeom>
           <a:solidFill>
             <a:srgbClr val="FFFFFF"/>
@@ -4648,8 +4637,8 @@
         </p:nvSpPr>
         <p:spPr>
           <a:xfrm>
-            <a:off x="777240" y="3840480"/>
-            <a:ext cx="5029200" cy="457200"/>
+            <a:off x="777240" y="4059936"/>
+            <a:ext cx="5029200" cy="713232"/>
           </a:xfrm>
           <a:prstGeom prst="rect">
             <a:avLst/>
@@ -4687,8 +4676,8 @@
         </p:nvSpPr>
         <p:spPr>
           <a:xfrm>
-            <a:off x="5760720" y="3840480"/>
-            <a:ext cx="1600200" cy="457200"/>
+            <a:off x="5760720" y="4059936"/>
+            <a:ext cx="1600200" cy="713232"/>
           </a:xfrm>
           <a:prstGeom prst="rect">
             <a:avLst/>
@@ -4726,13 +4715,11 @@
         </p:nvSpPr>
         <p:spPr>
           <a:xfrm>
-            <a:off x="548640" y="4407408"/>
-            <a:ext cx="6949440" cy="566928"/>
-          </a:xfrm>
-          <a:prstGeom prst="roundRect">
-            <a:avLst>
-              <a:gd name="adj" fmla="val 12903"/>
-            </a:avLst>
+            <a:off x="548640" y="4773168"/>
+            <a:ext cx="6949440" cy="713232"/>
+          </a:xfrm>
+          <a:prstGeom prst="rect">
+            <a:avLst/>
           </a:prstGeom>
           <a:solidFill>
             <a:srgbClr val="F2F5FC"/>
@@ -4748,8 +4735,8 @@
         </p:nvSpPr>
         <p:spPr>
           <a:xfrm>
-            <a:off x="777240" y="4462272"/>
-            <a:ext cx="5029200" cy="457200"/>
+            <a:off x="777240" y="4773168"/>
+            <a:ext cx="5029200" cy="713232"/>
           </a:xfrm>
           <a:prstGeom prst="rect">
             <a:avLst/>
@@ -4787,8 +4774,8 @@
         </p:nvSpPr>
         <p:spPr>
           <a:xfrm>
-            <a:off x="5760720" y="4462272"/>
-            <a:ext cx="1600200" cy="457200"/>
+            <a:off x="5760720" y="4773168"/>
+            <a:ext cx="1600200" cy="713232"/>
           </a:xfrm>
           <a:prstGeom prst="rect">
             <a:avLst/>
@@ -4827,24 +4814,17 @@
         <p:spPr>
           <a:xfrm>
             <a:off x="7863840" y="1920240"/>
-            <a:ext cx="3749040" cy="3200400"/>
+            <a:ext cx="3749040" cy="3566160"/>
           </a:xfrm>
           <a:prstGeom prst="roundRect">
             <a:avLst>
-              <a:gd name="adj" fmla="val 2286"/>
+              <a:gd name="adj" fmla="val 2051"/>
             </a:avLst>
           </a:prstGeom>
           <a:solidFill>
             <a:srgbClr val="1E2761"/>
           </a:solidFill>
           <a:ln/>
-          <a:effectLst>
-            <a:outerShdw sx="100000" sy="100000" kx="0" ky="0" algn="bl" rotWithShape="0" blurRad="101600" dist="38100" dir="5400000">
-              <a:srgbClr val="1E2761">
-                <a:alpha val="15000"/>
-              </a:srgbClr>
-            </a:outerShdw>
-          </a:effectLst>
         </p:spPr>
       </p:sp>
       <p:sp>
@@ -4855,8 +4835,8 @@
         </p:nvSpPr>
         <p:spPr>
           <a:xfrm>
-            <a:off x="7863840" y="2377440"/>
-            <a:ext cx="3749040" cy="822960"/>
+            <a:off x="7863840" y="2468880"/>
+            <a:ext cx="3749040" cy="868680"/>
           </a:xfrm>
           <a:prstGeom prst="rect">
             <a:avLst/>
@@ -4894,8 +4874,8 @@
         </p:nvSpPr>
         <p:spPr>
           <a:xfrm>
-            <a:off x="7863840" y="3200400"/>
-            <a:ext cx="3749040" cy="457200"/>
+            <a:off x="7863840" y="3383280"/>
+            <a:ext cx="3749040" cy="365760"/>
           </a:xfrm>
           <a:prstGeom prst="rect">
             <a:avLst/>
@@ -4933,8 +4913,8 @@
         </p:nvSpPr>
         <p:spPr>
           <a:xfrm>
-            <a:off x="7863840" y="4114800"/>
-            <a:ext cx="3749040" cy="457200"/>
+            <a:off x="7863840" y="4206240"/>
+            <a:ext cx="3749040" cy="411480"/>
           </a:xfrm>
           <a:prstGeom prst="rect">
             <a:avLst/>
@@ -4972,7 +4952,7 @@
         </p:nvSpPr>
         <p:spPr>
           <a:xfrm>
-            <a:off x="8138160" y="4572000"/>
+            <a:off x="8138160" y="4663440"/>
             <a:ext cx="3200400" cy="548640"/>
           </a:xfrm>
           <a:prstGeom prst="rect">
@@ -4982,7 +4962,7 @@
           <a:ln/>
         </p:spPr>
         <p:txBody>
-          <a:bodyPr wrap="square" lIns="0" tIns="0" rIns="0" bIns="0" rtlCol="0" anchor="ctr"/>
+          <a:bodyPr wrap="square" lIns="0" tIns="0" rIns="0" bIns="0" rtlCol="0" anchor="t"/>
           <a:lstStyle/>
           <a:p>
             <a:pPr algn="ctr" indent="0" marL="0">
@@ -5011,7 +4991,46 @@
         </p:nvSpPr>
         <p:spPr>
           <a:xfrm>
-            <a:off x="11365992" y="6400800"/>
+            <a:off x="548640" y="5715000"/>
+            <a:ext cx="10149840" cy="411480"/>
+          </a:xfrm>
+          <a:prstGeom prst="rect">
+            <a:avLst/>
+          </a:prstGeom>
+          <a:noFill/>
+          <a:ln/>
+        </p:spPr>
+        <p:txBody>
+          <a:bodyPr wrap="square" lIns="0" tIns="0" rIns="0" bIns="0" rtlCol="0" anchor="ctr"/>
+          <a:lstStyle/>
+          <a:p>
+            <a:pPr algn="ctr" indent="0" marL="0">
+              <a:buNone/>
+            </a:pPr>
+            <a:r>
+              <a:rPr lang="en-US" sz="1300" i="1" dirty="0">
+                <a:solidFill>
+                  <a:srgbClr val="5B6B8C"/>
+                </a:solidFill>
+                <a:latin typeface="Calibri" pitchFamily="34" charset="0"/>
+                <a:ea typeface="Calibri" pitchFamily="34" charset="-122"/>
+                <a:cs typeface="Calibri" pitchFamily="34" charset="-120"/>
+              </a:rPr>
+              <a:t>Multi-AZ on RDS and ElastiCache roughly doubles the data-layer cost — that premium is the survival requirement, priced.</a:t>
+            </a:r>
+            <a:endParaRPr lang="en-US" sz="1300" dirty="0"/>
+          </a:p>
+        </p:txBody>
+      </p:sp>
+      <p:sp>
+        <p:nvSpPr>
+          <p:cNvPr id="25" name="Text 23"/>
+          <p:cNvSpPr txBox="1"/>
+          <p:nvPr/>
+        </p:nvSpPr>
+        <p:spPr>
+          <a:xfrm>
+            <a:off x="11365992" y="6510528"/>
             <a:ext cx="457200" cy="274320"/>
           </a:xfrm>
           <a:prstGeom prst="rect">
@@ -5024,7 +5043,7 @@
           <a:bodyPr wrap="square" lIns="0" tIns="0" rIns="0" bIns="0" rtlCol="0" anchor="ctr"/>
           <a:lstStyle/>
           <a:p>
-            <a:pPr algn="r" indent="0" marL="0">
+            <a:pPr indent="0" marL="0">
               <a:buNone/>
             </a:pPr>
             <a:r>
@@ -5053,13 +5072,6 @@
 <file path=ppt/slides/slide14.xml><?xml version="1.0" encoding="utf-8"?>
 <p:sld xmlns:a="http://schemas.openxmlformats.org/drawingml/2006/main" xmlns:r="http://schemas.openxmlformats.org/officeDocument/2006/relationships" xmlns:p="http://schemas.openxmlformats.org/presentationml/2006/main">
   <p:cSld name="Slide 14">
-    <p:bg>
-      <p:bgPr>
-        <a:solidFill>
-          <a:srgbClr val="FFFFFF"/>
-        </a:solidFill>
-      </p:bgPr>
-    </p:bg>
     <p:spTree>
       <p:nvGrpSpPr>
         <p:cNvPr id="1" name=""/>
@@ -5107,7 +5119,7 @@
                 <a:ea typeface="Calibri" pitchFamily="34" charset="-122"/>
                 <a:cs typeface="Calibri" pitchFamily="34" charset="-120"/>
               </a:rPr>
-              <a:t>LOOKING AHEAD</a:t>
+              <a:t>TRADE-OFFS</a:t>
             </a:r>
             <a:endParaRPr lang="en-US" sz="1200" dirty="0"/>
           </a:p>
@@ -5146,7 +5158,7 @@
                 <a:ea typeface="Cambria" pitchFamily="34" charset="-122"/>
                 <a:cs typeface="Cambria" pitchFamily="34" charset="-120"/>
               </a:rPr>
-              <a:t>At Real Production Scale</a:t>
+              <a:t>What We Traded, and Why</a:t>
             </a:r>
             <a:endParaRPr lang="en-US" sz="3400" dirty="0"/>
           </a:p>
@@ -5154,22 +5166,61 @@
       </p:sp>
       <p:sp>
         <p:nvSpPr>
-          <p:cNvPr id="4" name="Shape 2"/>
+          <p:cNvPr id="4" name="Text 2"/>
+          <p:cNvSpPr txBox="1"/>
+          <p:nvPr/>
+        </p:nvSpPr>
+        <p:spPr>
+          <a:xfrm>
+            <a:off x="548640" y="1572768"/>
+            <a:ext cx="10149840" cy="365760"/>
+          </a:xfrm>
+          <a:prstGeom prst="rect">
+            <a:avLst/>
+          </a:prstGeom>
+          <a:noFill/>
+          <a:ln/>
+        </p:spPr>
+        <p:txBody>
+          <a:bodyPr wrap="square" lIns="0" tIns="0" rIns="0" bIns="0" rtlCol="0" anchor="ctr"/>
+          <a:lstStyle/>
+          <a:p>
+            <a:pPr indent="0" marL="0">
+              <a:buNone/>
+            </a:pPr>
+            <a:r>
+              <a:rPr lang="en-US" sz="1350" i="1" dirty="0">
+                <a:solidFill>
+                  <a:srgbClr val="5B6B8C"/>
+                </a:solidFill>
+                <a:latin typeface="Calibri" pitchFamily="34" charset="0"/>
+                <a:ea typeface="Calibri" pitchFamily="34" charset="-122"/>
+                <a:cs typeface="Calibri" pitchFamily="34" charset="-120"/>
+              </a:rPr>
+              <a:t>Three things a reviewer will look for and not find. Each one is a decision with a number or a rule behind it.</a:t>
+            </a:r>
+            <a:endParaRPr lang="en-US" sz="1350" dirty="0"/>
+          </a:p>
+        </p:txBody>
+      </p:sp>
+      <p:sp>
+        <p:nvSpPr>
+          <p:cNvPr id="5" name="Shape 3"/>
           <p:cNvSpPr/>
           <p:nvPr/>
         </p:nvSpPr>
         <p:spPr>
           <a:xfrm>
-            <a:off x="548640" y="2011680"/>
-            <a:ext cx="10149840" cy="1143000"/>
+            <a:off x="548640" y="2148840"/>
+            <a:ext cx="10149840" cy="1261872"/>
           </a:xfrm>
           <a:prstGeom prst="roundRect">
             <a:avLst>
-              <a:gd name="adj" fmla="val 6400"/>
+              <a:gd name="adj" fmla="val 5797"/>
             </a:avLst>
           </a:prstGeom>
           <a:solidFill>
-            <a:srgbClr val="F2F5FC"/>
+            <a:srgbClr val="FFFFFF"/>
           </a:solidFill>
           <a:ln w="12700">
             <a:solidFill>
@@ -5177,25 +5228,18 @@
             </a:solidFill>
             <a:prstDash val="solid"/>
           </a:ln>
-          <a:effectLst>
-            <a:outerShdw sx="100000" sy="100000" kx="0" ky="0" algn="bl" rotWithShape="0" blurRad="101600" dist="38100" dir="5400000">
-              <a:srgbClr val="1E2761">
-                <a:alpha val="15000"/>
-              </a:srgbClr>
-            </a:outerShdw>
-          </a:effectLst>
-        </p:spPr>
-      </p:sp>
-      <p:sp>
-        <p:nvSpPr>
-          <p:cNvPr id="5" name="Text 3"/>
-          <p:cNvSpPr txBox="1"/>
-          <p:nvPr/>
-        </p:nvSpPr>
-        <p:spPr>
-          <a:xfrm>
-            <a:off x="822960" y="2148840"/>
-            <a:ext cx="9509760" cy="457200"/>
+        </p:spPr>
+      </p:sp>
+      <p:sp>
+        <p:nvSpPr>
+          <p:cNvPr id="6" name="Text 4"/>
+          <p:cNvSpPr txBox="1"/>
+          <p:nvPr/>
+        </p:nvSpPr>
+        <p:spPr>
+          <a:xfrm>
+            <a:off x="822960" y="2240280"/>
+            <a:ext cx="9601200" cy="347472"/>
           </a:xfrm>
           <a:prstGeom prst="rect">
             <a:avLst/>
@@ -5211,7 +5255,7 @@
               <a:buNone/>
             </a:pPr>
             <a:r>
-              <a:rPr lang="en-US" sz="1700" b="1" dirty="0">
+              <a:rPr lang="en-US" sz="1550" b="1" dirty="0">
                 <a:solidFill>
                   <a:srgbClr val="1E2761"/>
                 </a:solidFill>
@@ -5219,22 +5263,22 @@
                 <a:ea typeface="Cambria" pitchFamily="34" charset="-122"/>
                 <a:cs typeface="Cambria" pitchFamily="34" charset="-120"/>
               </a:rPr>
-              <a:t>Single NAT Gateway</a:t>
-            </a:r>
-            <a:endParaRPr lang="en-US" sz="1700" dirty="0"/>
-          </a:p>
-        </p:txBody>
-      </p:sp>
-      <p:sp>
-        <p:nvSpPr>
-          <p:cNvPr id="6" name="Text 4"/>
+              <a:t>One NAT Gateway, not one per AZ</a:t>
+            </a:r>
+            <a:endParaRPr lang="en-US" sz="1550" dirty="0"/>
+          </a:p>
+        </p:txBody>
+      </p:sp>
+      <p:sp>
+        <p:nvSpPr>
+          <p:cNvPr id="7" name="Text 5"/>
           <p:cNvSpPr txBox="1"/>
           <p:nvPr/>
         </p:nvSpPr>
         <p:spPr>
           <a:xfrm>
             <a:off x="822960" y="2606040"/>
-            <a:ext cx="9509760" cy="457200"/>
+            <a:ext cx="9601200" cy="384048"/>
           </a:xfrm>
           <a:prstGeom prst="rect">
             <a:avLst/>
@@ -5250,7 +5294,74 @@
               <a:buNone/>
             </a:pPr>
             <a:r>
-              <a:rPr lang="en-US" sz="1300" dirty="0">
+              <a:rPr lang="en-US" sz="1200" b="1" dirty="0">
+                <a:solidFill>
+                  <a:srgbClr val="1E2761"/>
+                </a:solidFill>
+                <a:latin typeface="Calibri" pitchFamily="34" charset="0"/>
+                <a:ea typeface="Calibri" pitchFamily="34" charset="-122"/>
+                <a:cs typeface="Calibri" pitchFamily="34" charset="-120"/>
+              </a:rPr>
+              <a:t>Here: </a:t>
+            </a:r>
+            <a:pPr indent="0" marL="0">
+              <a:buNone/>
+            </a:pPr>
+            <a:r>
+              <a:rPr lang="en-US" sz="1200" dirty="0">
+                <a:solidFill>
+                  <a:srgbClr val="24304A"/>
+                </a:solidFill>
+                <a:latin typeface="Calibri" pitchFamily="34" charset="0"/>
+                <a:ea typeface="Calibri" pitchFamily="34" charset="-122"/>
+                <a:cs typeface="Calibri" pitchFamily="34" charset="-120"/>
+              </a:rPr>
+              <a:t>A second NAT is ~$32/mo — 11% of the whole budget — to protect egress on a cluster carrying no production traffic.</a:t>
+            </a:r>
+            <a:endParaRPr lang="en-US" sz="1200" dirty="0"/>
+          </a:p>
+        </p:txBody>
+      </p:sp>
+      <p:sp>
+        <p:nvSpPr>
+          <p:cNvPr id="8" name="Text 6"/>
+          <p:cNvSpPr txBox="1"/>
+          <p:nvPr/>
+        </p:nvSpPr>
+        <p:spPr>
+          <a:xfrm>
+            <a:off x="822960" y="2990088"/>
+            <a:ext cx="9601200" cy="329184"/>
+          </a:xfrm>
+          <a:prstGeom prst="rect">
+            <a:avLst/>
+          </a:prstGeom>
+          <a:noFill/>
+          <a:ln/>
+        </p:spPr>
+        <p:txBody>
+          <a:bodyPr wrap="square" lIns="0" tIns="0" rIns="0" bIns="0" rtlCol="0" anchor="ctr"/>
+          <a:lstStyle/>
+          <a:p>
+            <a:pPr indent="0" marL="0">
+              <a:buNone/>
+            </a:pPr>
+            <a:r>
+              <a:rPr lang="en-US" sz="1200" b="1" dirty="0">
+                <a:solidFill>
+                  <a:srgbClr val="1E7A52"/>
+                </a:solidFill>
+                <a:latin typeface="Calibri" pitchFamily="34" charset="0"/>
+                <a:ea typeface="Calibri" pitchFamily="34" charset="-122"/>
+                <a:cs typeface="Calibri" pitchFamily="34" charset="-120"/>
+              </a:rPr>
+              <a:t>At real scale: </a:t>
+            </a:r>
+            <a:pPr indent="0" marL="0">
+              <a:buNone/>
+            </a:pPr>
+            <a:r>
+              <a:rPr lang="en-US" sz="1200" dirty="0">
                 <a:solidFill>
                   <a:srgbClr val="5B6B8C"/>
                 </a:solidFill>
@@ -5258,30 +5369,30 @@
                 <a:ea typeface="Calibri" pitchFamily="34" charset="-122"/>
                 <a:cs typeface="Calibri" pitchFamily="34" charset="-120"/>
               </a:rPr>
-              <a:t>Known SPOF — real prod would run one per AZ</a:t>
-            </a:r>
-            <a:endParaRPr lang="en-US" sz="1300" dirty="0"/>
-          </a:p>
-        </p:txBody>
-      </p:sp>
-      <p:sp>
-        <p:nvSpPr>
-          <p:cNvPr id="7" name="Shape 5"/>
+              <a:t>One per AZ. The cost stops mattering the moment downtime does.</a:t>
+            </a:r>
+            <a:endParaRPr lang="en-US" sz="1200" dirty="0"/>
+          </a:p>
+        </p:txBody>
+      </p:sp>
+      <p:sp>
+        <p:nvSpPr>
+          <p:cNvPr id="9" name="Shape 7"/>
           <p:cNvSpPr/>
           <p:nvPr/>
         </p:nvSpPr>
         <p:spPr>
           <a:xfrm>
-            <a:off x="548640" y="3383280"/>
-            <a:ext cx="10149840" cy="1143000"/>
+            <a:off x="548640" y="3547872"/>
+            <a:ext cx="10149840" cy="1261872"/>
           </a:xfrm>
           <a:prstGeom prst="roundRect">
             <a:avLst>
-              <a:gd name="adj" fmla="val 6400"/>
+              <a:gd name="adj" fmla="val 5797"/>
             </a:avLst>
           </a:prstGeom>
           <a:solidFill>
-            <a:srgbClr val="F2F5FC"/>
+            <a:srgbClr val="FFFFFF"/>
           </a:solidFill>
           <a:ln w="12700">
             <a:solidFill>
@@ -5289,25 +5400,18 @@
             </a:solidFill>
             <a:prstDash val="solid"/>
           </a:ln>
-          <a:effectLst>
-            <a:outerShdw sx="100000" sy="100000" kx="0" ky="0" algn="bl" rotWithShape="0" blurRad="101600" dist="38100" dir="5400000">
-              <a:srgbClr val="1E2761">
-                <a:alpha val="15000"/>
-              </a:srgbClr>
-            </a:outerShdw>
-          </a:effectLst>
-        </p:spPr>
-      </p:sp>
-      <p:sp>
-        <p:nvSpPr>
-          <p:cNvPr id="8" name="Text 6"/>
-          <p:cNvSpPr txBox="1"/>
-          <p:nvPr/>
-        </p:nvSpPr>
-        <p:spPr>
-          <a:xfrm>
-            <a:off x="822960" y="3520440"/>
-            <a:ext cx="9509760" cy="457200"/>
+        </p:spPr>
+      </p:sp>
+      <p:sp>
+        <p:nvSpPr>
+          <p:cNvPr id="10" name="Text 8"/>
+          <p:cNvSpPr txBox="1"/>
+          <p:nvPr/>
+        </p:nvSpPr>
+        <p:spPr>
+          <a:xfrm>
+            <a:off x="822960" y="3639312"/>
+            <a:ext cx="9601200" cy="347472"/>
           </a:xfrm>
           <a:prstGeom prst="rect">
             <a:avLst/>
@@ -5323,7 +5427,7 @@
               <a:buNone/>
             </a:pPr>
             <a:r>
-              <a:rPr lang="en-US" sz="1700" b="1" dirty="0">
+              <a:rPr lang="en-US" sz="1550" b="1" dirty="0">
                 <a:solidFill>
                   <a:srgbClr val="1E2761"/>
                 </a:solidFill>
@@ -5331,22 +5435,22 @@
                 <a:ea typeface="Cambria" pitchFamily="34" charset="-122"/>
                 <a:cs typeface="Cambria" pitchFamily="34" charset="-120"/>
               </a:rPr>
-              <a:t>No GitOps</a:t>
-            </a:r>
-            <a:endParaRPr lang="en-US" sz="1700" dirty="0"/>
-          </a:p>
-        </p:txBody>
-      </p:sp>
-      <p:sp>
-        <p:nvSpPr>
-          <p:cNvPr id="9" name="Text 7"/>
-          <p:cNvSpPr txBox="1"/>
-          <p:nvPr/>
-        </p:nvSpPr>
-        <p:spPr>
-          <a:xfrm>
-            <a:off x="822960" y="3977640"/>
-            <a:ext cx="9509760" cy="457200"/>
+              <a:t>Push-deploy, not GitOps</a:t>
+            </a:r>
+            <a:endParaRPr lang="en-US" sz="1550" dirty="0"/>
+          </a:p>
+        </p:txBody>
+      </p:sp>
+      <p:sp>
+        <p:nvSpPr>
+          <p:cNvPr id="11" name="Text 9"/>
+          <p:cNvSpPr txBox="1"/>
+          <p:nvPr/>
+        </p:nvSpPr>
+        <p:spPr>
+          <a:xfrm>
+            <a:off x="822960" y="4005072"/>
+            <a:ext cx="9601200" cy="384048"/>
           </a:xfrm>
           <a:prstGeom prst="rect">
             <a:avLst/>
@@ -5362,7 +5466,74 @@
               <a:buNone/>
             </a:pPr>
             <a:r>
-              <a:rPr lang="en-US" sz="1300" dirty="0">
+              <a:rPr lang="en-US" sz="1200" b="1" dirty="0">
+                <a:solidFill>
+                  <a:srgbClr val="1E2761"/>
+                </a:solidFill>
+                <a:latin typeface="Calibri" pitchFamily="34" charset="0"/>
+                <a:ea typeface="Calibri" pitchFamily="34" charset="-122"/>
+                <a:cs typeface="Calibri" pitchFamily="34" charset="-120"/>
+              </a:rPr>
+              <a:t>Here: </a:t>
+            </a:r>
+            <a:pPr indent="0" marL="0">
+              <a:buNone/>
+            </a:pPr>
+            <a:r>
+              <a:rPr lang="en-US" sz="1200" dirty="0">
+                <a:solidFill>
+                  <a:srgbClr val="24304A"/>
+                </a:solidFill>
+                <a:latin typeface="Calibri" pitchFamily="34" charset="0"/>
+                <a:ea typeface="Calibri" pitchFamily="34" charset="-122"/>
+                <a:cs typeface="Calibri" pitchFamily="34" charset="-120"/>
+              </a:rPr>
+              <a:t>Argo CD's value is drift detection and multi-team approval. Two people on one cluster have neither problem yet.</a:t>
+            </a:r>
+            <a:endParaRPr lang="en-US" sz="1200" dirty="0"/>
+          </a:p>
+        </p:txBody>
+      </p:sp>
+      <p:sp>
+        <p:nvSpPr>
+          <p:cNvPr id="12" name="Text 10"/>
+          <p:cNvSpPr txBox="1"/>
+          <p:nvPr/>
+        </p:nvSpPr>
+        <p:spPr>
+          <a:xfrm>
+            <a:off x="822960" y="4389120"/>
+            <a:ext cx="9601200" cy="329184"/>
+          </a:xfrm>
+          <a:prstGeom prst="rect">
+            <a:avLst/>
+          </a:prstGeom>
+          <a:noFill/>
+          <a:ln/>
+        </p:spPr>
+        <p:txBody>
+          <a:bodyPr wrap="square" lIns="0" tIns="0" rIns="0" bIns="0" rtlCol="0" anchor="ctr"/>
+          <a:lstStyle/>
+          <a:p>
+            <a:pPr indent="0" marL="0">
+              <a:buNone/>
+            </a:pPr>
+            <a:r>
+              <a:rPr lang="en-US" sz="1200" b="1" dirty="0">
+                <a:solidFill>
+                  <a:srgbClr val="1E7A52"/>
+                </a:solidFill>
+                <a:latin typeface="Calibri" pitchFamily="34" charset="0"/>
+                <a:ea typeface="Calibri" pitchFamily="34" charset="-122"/>
+                <a:cs typeface="Calibri" pitchFamily="34" charset="-120"/>
+              </a:rPr>
+              <a:t>At real scale: </a:t>
+            </a:r>
+            <a:pPr indent="0" marL="0">
+              <a:buNone/>
+            </a:pPr>
+            <a:r>
+              <a:rPr lang="en-US" sz="1200" dirty="0">
                 <a:solidFill>
                   <a:srgbClr val="5B6B8C"/>
                 </a:solidFill>
@@ -5370,30 +5541,30 @@
                 <a:ea typeface="Calibri" pitchFamily="34" charset="-122"/>
                 <a:cs typeface="Calibri" pitchFamily="34" charset="-120"/>
               </a:rPr>
-              <a:t>Push-deploy today; Argo CD earns its keep at team scale</a:t>
-            </a:r>
-            <a:endParaRPr lang="en-US" sz="1300" dirty="0"/>
-          </a:p>
-        </p:txBody>
-      </p:sp>
-      <p:sp>
-        <p:nvSpPr>
-          <p:cNvPr id="10" name="Shape 8"/>
+              <a:t>Argo CD, once more people can deploy than can say what's deployed.</a:t>
+            </a:r>
+            <a:endParaRPr lang="en-US" sz="1200" dirty="0"/>
+          </a:p>
+        </p:txBody>
+      </p:sp>
+      <p:sp>
+        <p:nvSpPr>
+          <p:cNvPr id="13" name="Shape 11"/>
           <p:cNvSpPr/>
           <p:nvPr/>
         </p:nvSpPr>
         <p:spPr>
           <a:xfrm>
-            <a:off x="548640" y="4754880"/>
-            <a:ext cx="10149840" cy="1143000"/>
+            <a:off x="548640" y="4946904"/>
+            <a:ext cx="10149840" cy="1261872"/>
           </a:xfrm>
           <a:prstGeom prst="roundRect">
             <a:avLst>
-              <a:gd name="adj" fmla="val 6400"/>
+              <a:gd name="adj" fmla="val 5797"/>
             </a:avLst>
           </a:prstGeom>
           <a:solidFill>
-            <a:srgbClr val="F2F5FC"/>
+            <a:srgbClr val="FFFFFF"/>
           </a:solidFill>
           <a:ln w="12700">
             <a:solidFill>
@@ -5401,25 +5572,18 @@
             </a:solidFill>
             <a:prstDash val="solid"/>
           </a:ln>
-          <a:effectLst>
-            <a:outerShdw sx="100000" sy="100000" kx="0" ky="0" algn="bl" rotWithShape="0" blurRad="101600" dist="38100" dir="5400000">
-              <a:srgbClr val="1E2761">
-                <a:alpha val="15000"/>
-              </a:srgbClr>
-            </a:outerShdw>
-          </a:effectLst>
-        </p:spPr>
-      </p:sp>
-      <p:sp>
-        <p:nvSpPr>
-          <p:cNvPr id="11" name="Text 9"/>
-          <p:cNvSpPr txBox="1"/>
-          <p:nvPr/>
-        </p:nvSpPr>
-        <p:spPr>
-          <a:xfrm>
-            <a:off x="822960" y="4892040"/>
-            <a:ext cx="9509760" cy="457200"/>
+        </p:spPr>
+      </p:sp>
+      <p:sp>
+        <p:nvSpPr>
+          <p:cNvPr id="14" name="Text 12"/>
+          <p:cNvSpPr txBox="1"/>
+          <p:nvPr/>
+        </p:nvSpPr>
+        <p:spPr>
+          <a:xfrm>
+            <a:off x="822960" y="5038344"/>
+            <a:ext cx="9601200" cy="347472"/>
           </a:xfrm>
           <a:prstGeom prst="rect">
             <a:avLst/>
@@ -5435,7 +5599,7 @@
               <a:buNone/>
             </a:pPr>
             <a:r>
-              <a:rPr lang="en-US" sz="1700" b="1" dirty="0">
+              <a:rPr lang="en-US" sz="1550" b="1" dirty="0">
                 <a:solidFill>
                   <a:srgbClr val="1E2761"/>
                 </a:solidFill>
@@ -5443,22 +5607,22 @@
                 <a:ea typeface="Cambria" pitchFamily="34" charset="-122"/>
                 <a:cs typeface="Cambria" pitchFamily="34" charset="-120"/>
               </a:rPr>
-              <a:t>Some manual deploy steps</a:t>
-            </a:r>
-            <a:endParaRPr lang="en-US" sz="1700" dirty="0"/>
-          </a:p>
-        </p:txBody>
-      </p:sp>
-      <p:sp>
-        <p:nvSpPr>
-          <p:cNvPr id="12" name="Text 10"/>
-          <p:cNvSpPr txBox="1"/>
-          <p:nvPr/>
-        </p:nvSpPr>
-        <p:spPr>
-          <a:xfrm>
-            <a:off x="822960" y="5349240"/>
-            <a:ext cx="9509760" cy="457200"/>
+              <a:t>Terraform apply stays manual — on purpose</a:t>
+            </a:r>
+            <a:endParaRPr lang="en-US" sz="1550" dirty="0"/>
+          </a:p>
+        </p:txBody>
+      </p:sp>
+      <p:sp>
+        <p:nvSpPr>
+          <p:cNvPr id="15" name="Text 13"/>
+          <p:cNvSpPr txBox="1"/>
+          <p:nvPr/>
+        </p:nvSpPr>
+        <p:spPr>
+          <a:xfrm>
+            <a:off x="822960" y="5404104"/>
+            <a:ext cx="9601200" cy="384048"/>
           </a:xfrm>
           <a:prstGeom prst="rect">
             <a:avLst/>
@@ -5474,7 +5638,74 @@
               <a:buNone/>
             </a:pPr>
             <a:r>
-              <a:rPr lang="en-US" sz="1300" dirty="0">
+              <a:rPr lang="en-US" sz="1200" b="1" dirty="0">
+                <a:solidFill>
+                  <a:srgbClr val="1E2761"/>
+                </a:solidFill>
+                <a:latin typeface="Calibri" pitchFamily="34" charset="0"/>
+                <a:ea typeface="Calibri" pitchFamily="34" charset="-122"/>
+                <a:cs typeface="Calibri" pitchFamily="34" charset="-120"/>
+              </a:rPr>
+              <a:t>Here: </a:t>
+            </a:r>
+            <a:pPr indent="0" marL="0">
+              <a:buNone/>
+            </a:pPr>
+            <a:r>
+              <a:rPr lang="en-US" sz="1200" dirty="0">
+                <a:solidFill>
+                  <a:srgbClr val="24304A"/>
+                </a:solidFill>
+                <a:latin typeface="Calibri" pitchFamily="34" charset="0"/>
+                <a:ea typeface="Calibri" pitchFamily="34" charset="-122"/>
+                <a:cs typeface="Calibri" pitchFamily="34" charset="-120"/>
+              </a:rPr>
+              <a:t>App deploys are fully automated end-to-end. Infrastructure is not — a human approves any change to the VPC, database, or IAM.</a:t>
+            </a:r>
+            <a:endParaRPr lang="en-US" sz="1200" dirty="0"/>
+          </a:p>
+        </p:txBody>
+      </p:sp>
+      <p:sp>
+        <p:nvSpPr>
+          <p:cNvPr id="16" name="Text 14"/>
+          <p:cNvSpPr txBox="1"/>
+          <p:nvPr/>
+        </p:nvSpPr>
+        <p:spPr>
+          <a:xfrm>
+            <a:off x="822960" y="5788152"/>
+            <a:ext cx="9601200" cy="329184"/>
+          </a:xfrm>
+          <a:prstGeom prst="rect">
+            <a:avLst/>
+          </a:prstGeom>
+          <a:noFill/>
+          <a:ln/>
+        </p:spPr>
+        <p:txBody>
+          <a:bodyPr wrap="square" lIns="0" tIns="0" rIns="0" bIns="0" rtlCol="0" anchor="ctr"/>
+          <a:lstStyle/>
+          <a:p>
+            <a:pPr indent="0" marL="0">
+              <a:buNone/>
+            </a:pPr>
+            <a:r>
+              <a:rPr lang="en-US" sz="1200" b="1" dirty="0">
+                <a:solidFill>
+                  <a:srgbClr val="1E7A52"/>
+                </a:solidFill>
+                <a:latin typeface="Calibri" pitchFamily="34" charset="0"/>
+                <a:ea typeface="Calibri" pitchFamily="34" charset="-122"/>
+                <a:cs typeface="Calibri" pitchFamily="34" charset="-120"/>
+              </a:rPr>
+              <a:t>At real scale: </a:t>
+            </a:r>
+            <a:pPr indent="0" marL="0">
+              <a:buNone/>
+            </a:pPr>
+            <a:r>
+              <a:rPr lang="en-US" sz="1200" dirty="0">
                 <a:solidFill>
                   <a:srgbClr val="5B6B8C"/>
                 </a:solidFill>
@@ -5482,21 +5713,21 @@
                 <a:ea typeface="Calibri" pitchFamily="34" charset="-122"/>
                 <a:cs typeface="Calibri" pitchFamily="34" charset="-120"/>
               </a:rPr>
-              <a:t>Not yet fully automated end-to-end</a:t>
-            </a:r>
-            <a:endParaRPr lang="en-US" sz="1300" dirty="0"/>
-          </a:p>
-        </p:txBody>
-      </p:sp>
-      <p:sp>
-        <p:nvSpPr>
-          <p:cNvPr id="13" name="Text 11"/>
-          <p:cNvSpPr txBox="1"/>
-          <p:nvPr/>
-        </p:nvSpPr>
-        <p:spPr>
-          <a:xfrm>
-            <a:off x="11365992" y="6400800"/>
+              <a:t>Same rule, enforced by a plan-and-approve gate in the pipeline instead of by a laptop.</a:t>
+            </a:r>
+            <a:endParaRPr lang="en-US" sz="1200" dirty="0"/>
+          </a:p>
+        </p:txBody>
+      </p:sp>
+      <p:sp>
+        <p:nvSpPr>
+          <p:cNvPr id="17" name="Text 15"/>
+          <p:cNvSpPr txBox="1"/>
+          <p:nvPr/>
+        </p:nvSpPr>
+        <p:spPr>
+          <a:xfrm>
+            <a:off x="11365992" y="6510528"/>
             <a:ext cx="457200" cy="274320"/>
           </a:xfrm>
           <a:prstGeom prst="rect">
@@ -5509,7 +5740,7 @@
           <a:bodyPr wrap="square" lIns="0" tIns="0" rIns="0" bIns="0" rtlCol="0" anchor="ctr"/>
           <a:lstStyle/>
           <a:p>
-            <a:pPr algn="r" indent="0" marL="0">
+            <a:pPr indent="0" marL="0">
               <a:buNone/>
             </a:pPr>
             <a:r>
@@ -5666,7 +5897,7 @@
         <p:spPr>
           <a:xfrm>
             <a:off x="1554480" y="1783080"/>
-            <a:ext cx="9601200" cy="1005840"/>
+            <a:ext cx="9601200" cy="640080"/>
           </a:xfrm>
           <a:prstGeom prst="rect">
             <a:avLst/>
@@ -5764,7 +5995,7 @@
         <p:spPr>
           <a:xfrm>
             <a:off x="1554480" y="3063240"/>
-            <a:ext cx="9601200" cy="1005840"/>
+            <a:ext cx="9601200" cy="640080"/>
           </a:xfrm>
           <a:prstGeom prst="rect">
             <a:avLst/>
@@ -5862,7 +6093,7 @@
         <p:spPr>
           <a:xfrm>
             <a:off x="1554480" y="4343400"/>
-            <a:ext cx="9601200" cy="1005840"/>
+            <a:ext cx="9601200" cy="640080"/>
           </a:xfrm>
           <a:prstGeom prst="rect">
             <a:avLst/>
@@ -5900,20 +6131,20 @@
         </p:nvSpPr>
         <p:spPr>
           <a:xfrm>
-            <a:off x="822960" y="6035040"/>
-            <a:ext cx="5486400" cy="457200"/>
-          </a:xfrm>
-          <a:prstGeom prst="rect">
-            <a:avLst/>
-          </a:prstGeom>
-          <a:noFill/>
-          <a:ln/>
-        </p:spPr>
-        <p:txBody>
-          <a:bodyPr wrap="square" lIns="0" tIns="0" rIns="0" bIns="0" rtlCol="0" anchor="ctr"/>
-          <a:lstStyle/>
-          <a:p>
-            <a:pPr indent="0" marL="0">
+            <a:off x="548640" y="5806440"/>
+            <a:ext cx="11091672" cy="548640"/>
+          </a:xfrm>
+          <a:prstGeom prst="rect">
+            <a:avLst/>
+          </a:prstGeom>
+          <a:noFill/>
+          <a:ln/>
+        </p:spPr>
+        <p:txBody>
+          <a:bodyPr wrap="square" lIns="0" tIns="0" rIns="0" bIns="0" rtlCol="0" anchor="ctr"/>
+          <a:lstStyle/>
+          <a:p>
+            <a:pPr algn="ctr" indent="0" marL="0">
               <a:buNone/>
             </a:pPr>
             <a:r>
@@ -5942,13 +6173,6 @@
 <file path=ppt/slides/slide2.xml><?xml version="1.0" encoding="utf-8"?>
 <p:sld xmlns:a="http://schemas.openxmlformats.org/drawingml/2006/main" xmlns:r="http://schemas.openxmlformats.org/officeDocument/2006/relationships" xmlns:p="http://schemas.openxmlformats.org/presentationml/2006/main">
   <p:cSld name="Slide 2">
-    <p:bg>
-      <p:bgPr>
-        <a:solidFill>
-          <a:srgbClr val="FFFFFF"/>
-        </a:solidFill>
-      </p:bgPr>
-    </p:bg>
     <p:spTree>
       <p:nvGrpSpPr>
         <p:cNvPr id="1" name=""/>
@@ -6049,7 +6273,7 @@
         </p:nvSpPr>
         <p:spPr>
           <a:xfrm>
-            <a:off x="548640" y="1920240"/>
+            <a:off x="548640" y="2148840"/>
             <a:ext cx="822960" cy="822960"/>
           </a:xfrm>
           <a:prstGeom prst="ellipse">
@@ -6069,7 +6293,7 @@
         </p:nvSpPr>
         <p:spPr>
           <a:xfrm>
-            <a:off x="548640" y="1920240"/>
+            <a:off x="548640" y="2148840"/>
             <a:ext cx="822960" cy="822960"/>
           </a:xfrm>
           <a:prstGeom prst="rect">
@@ -6086,7 +6310,7 @@
               <a:buNone/>
             </a:pPr>
             <a:r>
-              <a:rPr lang="en-US" sz="2340" b="1" dirty="0">
+              <a:rPr lang="en-US" sz="2300" b="1" dirty="0">
                 <a:solidFill>
                   <a:srgbClr val="1E2761"/>
                 </a:solidFill>
@@ -6096,7 +6320,7 @@
               </a:rPr>
               <a:t>■</a:t>
             </a:r>
-            <a:endParaRPr lang="en-US" sz="2340" dirty="0"/>
+            <a:endParaRPr lang="en-US" sz="2300" dirty="0"/>
           </a:p>
         </p:txBody>
       </p:sp>
@@ -6108,8 +6332,8 @@
         </p:nvSpPr>
         <p:spPr>
           <a:xfrm>
-            <a:off x="1645920" y="1965960"/>
-            <a:ext cx="5486400" cy="457200"/>
+            <a:off x="1645920" y="2167128"/>
+            <a:ext cx="5486400" cy="411480"/>
           </a:xfrm>
           <a:prstGeom prst="rect">
             <a:avLst/>
@@ -6147,17 +6371,17 @@
         </p:nvSpPr>
         <p:spPr>
           <a:xfrm>
-            <a:off x="1645920" y="2377440"/>
-            <a:ext cx="5943600" cy="457200"/>
-          </a:xfrm>
-          <a:prstGeom prst="rect">
-            <a:avLst/>
-          </a:prstGeom>
-          <a:noFill/>
-          <a:ln/>
-        </p:spPr>
-        <p:txBody>
-          <a:bodyPr wrap="square" lIns="0" tIns="0" rIns="0" bIns="0" rtlCol="0" anchor="ctr"/>
+            <a:off x="1645920" y="2606040"/>
+            <a:ext cx="5760720" cy="685800"/>
+          </a:xfrm>
+          <a:prstGeom prst="rect">
+            <a:avLst/>
+          </a:prstGeom>
+          <a:noFill/>
+          <a:ln/>
+        </p:spPr>
+        <p:txBody>
+          <a:bodyPr wrap="square" lIns="0" tIns="0" rIns="0" bIns="0" rtlCol="0" anchor="t"/>
           <a:lstStyle/>
           <a:p>
             <a:pPr indent="0" marL="0">
@@ -6186,7 +6410,7 @@
         </p:nvSpPr>
         <p:spPr>
           <a:xfrm>
-            <a:off x="548640" y="3108960"/>
+            <a:off x="548640" y="3749040"/>
             <a:ext cx="822960" cy="822960"/>
           </a:xfrm>
           <a:prstGeom prst="ellipse">
@@ -6206,7 +6430,7 @@
         </p:nvSpPr>
         <p:spPr>
           <a:xfrm>
-            <a:off x="548640" y="3108960"/>
+            <a:off x="548640" y="3749040"/>
             <a:ext cx="822960" cy="822960"/>
           </a:xfrm>
           <a:prstGeom prst="rect">
@@ -6223,7 +6447,7 @@
               <a:buNone/>
             </a:pPr>
             <a:r>
-              <a:rPr lang="en-US" sz="2340" b="1" dirty="0">
+              <a:rPr lang="en-US" sz="2300" b="1" dirty="0">
                 <a:solidFill>
                   <a:srgbClr val="1E2761"/>
                 </a:solidFill>
@@ -6233,7 +6457,7 @@
               </a:rPr>
               <a:t>⚙</a:t>
             </a:r>
-            <a:endParaRPr lang="en-US" sz="2340" dirty="0"/>
+            <a:endParaRPr lang="en-US" sz="2300" dirty="0"/>
           </a:p>
         </p:txBody>
       </p:sp>
@@ -6245,8 +6469,8 @@
         </p:nvSpPr>
         <p:spPr>
           <a:xfrm>
-            <a:off x="1645920" y="3154680"/>
-            <a:ext cx="5486400" cy="457200"/>
+            <a:off x="1645920" y="3767328"/>
+            <a:ext cx="5486400" cy="411480"/>
           </a:xfrm>
           <a:prstGeom prst="rect">
             <a:avLst/>
@@ -6284,17 +6508,17 @@
         </p:nvSpPr>
         <p:spPr>
           <a:xfrm>
-            <a:off x="1645920" y="3566160"/>
-            <a:ext cx="5943600" cy="640080"/>
-          </a:xfrm>
-          <a:prstGeom prst="rect">
-            <a:avLst/>
-          </a:prstGeom>
-          <a:noFill/>
-          <a:ln/>
-        </p:spPr>
-        <p:txBody>
-          <a:bodyPr wrap="square" lIns="0" tIns="0" rIns="0" bIns="0" rtlCol="0" anchor="ctr"/>
+            <a:off x="1645920" y="4206240"/>
+            <a:ext cx="5760720" cy="685800"/>
+          </a:xfrm>
+          <a:prstGeom prst="rect">
+            <a:avLst/>
+          </a:prstGeom>
+          <a:noFill/>
+          <a:ln/>
+        </p:spPr>
+        <p:txBody>
+          <a:bodyPr wrap="square" lIns="0" tIns="0" rIns="0" bIns="0" rtlCol="0" anchor="t"/>
           <a:lstStyle/>
           <a:p>
             <a:pPr indent="0" marL="0">
@@ -6323,12 +6547,12 @@
         </p:nvSpPr>
         <p:spPr>
           <a:xfrm>
-            <a:off x="7589520" y="1920240"/>
-            <a:ext cx="1783080" cy="1097280"/>
+            <a:off x="7680960" y="2148840"/>
+            <a:ext cx="1783080" cy="1325880"/>
           </a:xfrm>
           <a:prstGeom prst="roundRect">
             <a:avLst>
-              <a:gd name="adj" fmla="val 6667"/>
+              <a:gd name="adj" fmla="val 5517"/>
             </a:avLst>
           </a:prstGeom>
           <a:solidFill>
@@ -6340,13 +6564,6 @@
             </a:solidFill>
             <a:prstDash val="solid"/>
           </a:ln>
-          <a:effectLst>
-            <a:outerShdw sx="100000" sy="100000" kx="0" ky="0" algn="bl" rotWithShape="0" blurRad="101600" dist="38100" dir="5400000">
-              <a:srgbClr val="1E2761">
-                <a:alpha val="15000"/>
-              </a:srgbClr>
-            </a:outerShdw>
-          </a:effectLst>
         </p:spPr>
       </p:sp>
       <p:sp>
@@ -6357,8 +6574,8 @@
         </p:nvSpPr>
         <p:spPr>
           <a:xfrm>
-            <a:off x="7662672" y="2194560"/>
-            <a:ext cx="1636776" cy="548640"/>
+            <a:off x="7754112" y="2148840"/>
+            <a:ext cx="1636776" cy="1325880"/>
           </a:xfrm>
           <a:prstGeom prst="rect">
             <a:avLst/>
@@ -6374,7 +6591,7 @@
               <a:buNone/>
             </a:pPr>
             <a:r>
-              <a:rPr lang="en-US" sz="1200" b="1" dirty="0">
+              <a:rPr lang="en-US" sz="1250" b="1" dirty="0">
                 <a:solidFill>
                   <a:srgbClr val="1E2761"/>
                 </a:solidFill>
@@ -6384,7 +6601,7 @@
               </a:rPr>
               <a:t>Web</a:t>
             </a:r>
-            <a:endParaRPr lang="en-US" sz="1200" dirty="0"/>
+            <a:endParaRPr lang="en-US" sz="1250" dirty="0"/>
           </a:p>
         </p:txBody>
       </p:sp>
@@ -6396,12 +6613,12 @@
         </p:nvSpPr>
         <p:spPr>
           <a:xfrm>
-            <a:off x="9555480" y="1920240"/>
-            <a:ext cx="1783080" cy="1097280"/>
+            <a:off x="9601200" y="2148840"/>
+            <a:ext cx="1783080" cy="1325880"/>
           </a:xfrm>
           <a:prstGeom prst="roundRect">
             <a:avLst>
-              <a:gd name="adj" fmla="val 6667"/>
+              <a:gd name="adj" fmla="val 5517"/>
             </a:avLst>
           </a:prstGeom>
           <a:solidFill>
@@ -6413,13 +6630,6 @@
             </a:solidFill>
             <a:prstDash val="solid"/>
           </a:ln>
-          <a:effectLst>
-            <a:outerShdw sx="100000" sy="100000" kx="0" ky="0" algn="bl" rotWithShape="0" blurRad="101600" dist="38100" dir="5400000">
-              <a:srgbClr val="1E2761">
-                <a:alpha val="15000"/>
-              </a:srgbClr>
-            </a:outerShdw>
-          </a:effectLst>
         </p:spPr>
       </p:sp>
       <p:sp>
@@ -6430,8 +6640,8 @@
         </p:nvSpPr>
         <p:spPr>
           <a:xfrm>
-            <a:off x="9628632" y="2194560"/>
-            <a:ext cx="1636776" cy="548640"/>
+            <a:off x="9674352" y="2148840"/>
+            <a:ext cx="1636776" cy="1325880"/>
           </a:xfrm>
           <a:prstGeom prst="rect">
             <a:avLst/>
@@ -6447,7 +6657,7 @@
               <a:buNone/>
             </a:pPr>
             <a:r>
-              <a:rPr lang="en-US" sz="1200" b="1" dirty="0">
+              <a:rPr lang="en-US" sz="1250" b="1" dirty="0">
                 <a:solidFill>
                   <a:srgbClr val="1E2761"/>
                 </a:solidFill>
@@ -6457,7 +6667,7 @@
               </a:rPr>
               <a:t>Database</a:t>
             </a:r>
-            <a:endParaRPr lang="en-US" sz="1200" dirty="0"/>
+            <a:endParaRPr lang="en-US" sz="1250" dirty="0"/>
           </a:p>
         </p:txBody>
       </p:sp>
@@ -6469,12 +6679,12 @@
         </p:nvSpPr>
         <p:spPr>
           <a:xfrm>
-            <a:off x="7589520" y="3291840"/>
-            <a:ext cx="1783080" cy="1097280"/>
+            <a:off x="7680960" y="3749040"/>
+            <a:ext cx="1783080" cy="1325880"/>
           </a:xfrm>
           <a:prstGeom prst="roundRect">
             <a:avLst>
-              <a:gd name="adj" fmla="val 6667"/>
+              <a:gd name="adj" fmla="val 5517"/>
             </a:avLst>
           </a:prstGeom>
           <a:solidFill>
@@ -6486,13 +6696,6 @@
             </a:solidFill>
             <a:prstDash val="solid"/>
           </a:ln>
-          <a:effectLst>
-            <a:outerShdw sx="100000" sy="100000" kx="0" ky="0" algn="bl" rotWithShape="0" blurRad="101600" dist="38100" dir="5400000">
-              <a:srgbClr val="1E2761">
-                <a:alpha val="15000"/>
-              </a:srgbClr>
-            </a:outerShdw>
-          </a:effectLst>
         </p:spPr>
       </p:sp>
       <p:sp>
@@ -6503,8 +6706,8 @@
         </p:nvSpPr>
         <p:spPr>
           <a:xfrm>
-            <a:off x="7662672" y="3566160"/>
-            <a:ext cx="1636776" cy="548640"/>
+            <a:off x="7754112" y="3749040"/>
+            <a:ext cx="1636776" cy="1325880"/>
           </a:xfrm>
           <a:prstGeom prst="rect">
             <a:avLst/>
@@ -6520,7 +6723,7 @@
               <a:buNone/>
             </a:pPr>
             <a:r>
-              <a:rPr lang="en-US" sz="1200" b="1" dirty="0">
+              <a:rPr lang="en-US" sz="1250" b="1" dirty="0">
                 <a:solidFill>
                   <a:srgbClr val="1E2761"/>
                 </a:solidFill>
@@ -6530,7 +6733,7 @@
               </a:rPr>
               <a:t>Cache/Queue</a:t>
             </a:r>
-            <a:endParaRPr lang="en-US" sz="1200" dirty="0"/>
+            <a:endParaRPr lang="en-US" sz="1250" dirty="0"/>
           </a:p>
         </p:txBody>
       </p:sp>
@@ -6542,12 +6745,12 @@
         </p:nvSpPr>
         <p:spPr>
           <a:xfrm>
-            <a:off x="9555480" y="3291840"/>
-            <a:ext cx="1783080" cy="1097280"/>
+            <a:off x="9601200" y="3749040"/>
+            <a:ext cx="1783080" cy="1325880"/>
           </a:xfrm>
           <a:prstGeom prst="roundRect">
             <a:avLst>
-              <a:gd name="adj" fmla="val 6667"/>
+              <a:gd name="adj" fmla="val 5517"/>
             </a:avLst>
           </a:prstGeom>
           <a:solidFill>
@@ -6559,13 +6762,6 @@
             </a:solidFill>
             <a:prstDash val="solid"/>
           </a:ln>
-          <a:effectLst>
-            <a:outerShdw sx="100000" sy="100000" kx="0" ky="0" algn="bl" rotWithShape="0" blurRad="101600" dist="38100" dir="5400000">
-              <a:srgbClr val="1E2761">
-                <a:alpha val="15000"/>
-              </a:srgbClr>
-            </a:outerShdw>
-          </a:effectLst>
         </p:spPr>
       </p:sp>
       <p:sp>
@@ -6576,8 +6772,8 @@
         </p:nvSpPr>
         <p:spPr>
           <a:xfrm>
-            <a:off x="9628632" y="3566160"/>
-            <a:ext cx="1636776" cy="548640"/>
+            <a:off x="9674352" y="3749040"/>
+            <a:ext cx="1636776" cy="1325880"/>
           </a:xfrm>
           <a:prstGeom prst="rect">
             <a:avLst/>
@@ -6593,7 +6789,7 @@
               <a:buNone/>
             </a:pPr>
             <a:r>
-              <a:rPr lang="en-US" sz="1200" b="1" dirty="0">
+              <a:rPr lang="en-US" sz="1250" b="1" dirty="0">
                 <a:solidFill>
                   <a:srgbClr val="1E2761"/>
                 </a:solidFill>
@@ -6603,7 +6799,7 @@
               </a:rPr>
               <a:t>Workers</a:t>
             </a:r>
-            <a:endParaRPr lang="en-US" sz="1200" dirty="0"/>
+            <a:endParaRPr lang="en-US" sz="1250" dirty="0"/>
           </a:p>
         </p:txBody>
       </p:sp>
@@ -6615,7 +6811,7 @@
         </p:nvSpPr>
         <p:spPr>
           <a:xfrm>
-            <a:off x="11365992" y="6400800"/>
+            <a:off x="11365992" y="6510528"/>
             <a:ext cx="457200" cy="274320"/>
           </a:xfrm>
           <a:prstGeom prst="rect">
@@ -6628,7 +6824,7 @@
           <a:bodyPr wrap="square" lIns="0" tIns="0" rIns="0" bIns="0" rtlCol="0" anchor="ctr"/>
           <a:lstStyle/>
           <a:p>
-            <a:pPr algn="r" indent="0" marL="0">
+            <a:pPr indent="0" marL="0">
               <a:buNone/>
             </a:pPr>
             <a:r>
@@ -6657,13 +6853,6 @@
 <file path=ppt/slides/slide3.xml><?xml version="1.0" encoding="utf-8"?>
 <p:sld xmlns:a="http://schemas.openxmlformats.org/drawingml/2006/main" xmlns:r="http://schemas.openxmlformats.org/officeDocument/2006/relationships" xmlns:p="http://schemas.openxmlformats.org/presentationml/2006/main">
   <p:cSld name="Slide 3">
-    <p:bg>
-      <p:bgPr>
-        <a:solidFill>
-          <a:srgbClr val="FFFFFF"/>
-        </a:solidFill>
-      </p:bgPr>
-    </p:bg>
     <p:spTree>
       <p:nvGrpSpPr>
         <p:cNvPr id="1" name=""/>
@@ -6764,7 +6953,7 @@
         </p:nvSpPr>
         <p:spPr>
           <a:xfrm>
-            <a:off x="548640" y="1737360"/>
+            <a:off x="548640" y="1783080"/>
             <a:ext cx="10149840" cy="822960"/>
           </a:xfrm>
           <a:prstGeom prst="roundRect">
@@ -6786,8 +6975,8 @@
         </p:nvSpPr>
         <p:spPr>
           <a:xfrm>
-            <a:off x="621792" y="1874520"/>
-            <a:ext cx="10003536" cy="548640"/>
+            <a:off x="640080" y="1783080"/>
+            <a:ext cx="9966960" cy="822960"/>
           </a:xfrm>
           <a:prstGeom prst="rect">
             <a:avLst/>
@@ -6825,8 +7014,8 @@
         </p:nvSpPr>
         <p:spPr>
           <a:xfrm>
-            <a:off x="4572000" y="2880360"/>
-            <a:ext cx="3657600" cy="365760"/>
+            <a:off x="4389120" y="2926080"/>
+            <a:ext cx="3108960" cy="320040"/>
           </a:xfrm>
           <a:prstGeom prst="rect">
             <a:avLst/>
@@ -6844,7 +7033,7 @@
             <a:r>
               <a:rPr lang="en-US" sz="1300" b="1" dirty="0">
                 <a:solidFill>
-                  <a:srgbClr val="2F9E6E"/>
+                  <a:srgbClr val="1E7A52"/>
                 </a:solidFill>
                 <a:latin typeface="Calibri" pitchFamily="34" charset="0"/>
                 <a:ea typeface="Calibri" pitchFamily="34" charset="-122"/>
@@ -6864,8 +7053,8 @@
         </p:nvSpPr>
         <p:spPr>
           <a:xfrm>
-            <a:off x="8229600" y="2880360"/>
-            <a:ext cx="3657600" cy="365760"/>
+            <a:off x="7680960" y="2926080"/>
+            <a:ext cx="2834640" cy="320040"/>
           </a:xfrm>
           <a:prstGeom prst="rect">
             <a:avLst/>
@@ -6897,23 +7086,43 @@
       </p:sp>
       <p:sp>
         <p:nvSpPr>
-          <p:cNvPr id="8" name="Text 6"/>
-          <p:cNvSpPr txBox="1"/>
-          <p:nvPr/>
-        </p:nvSpPr>
-        <p:spPr>
-          <a:xfrm>
-            <a:off x="548640" y="3337560"/>
-            <a:ext cx="3840480" cy="731520"/>
-          </a:xfrm>
-          <a:prstGeom prst="rect">
-            <a:avLst/>
-          </a:prstGeom>
-          <a:noFill/>
-          <a:ln/>
-        </p:spPr>
-        <p:txBody>
-          <a:bodyPr wrap="square" lIns="0" tIns="0" rIns="0" bIns="0" rtlCol="0" anchor="t"/>
+          <p:cNvPr id="8" name="Shape 6"/>
+          <p:cNvSpPr/>
+          <p:nvPr/>
+        </p:nvSpPr>
+        <p:spPr>
+          <a:xfrm>
+            <a:off x="548640" y="3383280"/>
+            <a:ext cx="10149840" cy="841248"/>
+          </a:xfrm>
+          <a:prstGeom prst="rect">
+            <a:avLst/>
+          </a:prstGeom>
+          <a:solidFill>
+            <a:srgbClr val="F2F5FC"/>
+          </a:solidFill>
+          <a:ln/>
+        </p:spPr>
+      </p:sp>
+      <p:sp>
+        <p:nvSpPr>
+          <p:cNvPr id="9" name="Text 7"/>
+          <p:cNvSpPr txBox="1"/>
+          <p:nvPr/>
+        </p:nvSpPr>
+        <p:spPr>
+          <a:xfrm>
+            <a:off x="777240" y="3383280"/>
+            <a:ext cx="3383280" cy="841248"/>
+          </a:xfrm>
+          <a:prstGeom prst="rect">
+            <a:avLst/>
+          </a:prstGeom>
+          <a:noFill/>
+          <a:ln/>
+        </p:spPr>
+        <p:txBody>
+          <a:bodyPr wrap="square" lIns="0" tIns="0" rIns="0" bIns="0" rtlCol="0" anchor="ctr"/>
           <a:lstStyle/>
           <a:p>
             <a:pPr indent="0" marL="0">
@@ -6936,23 +7145,23 @@
       </p:sp>
       <p:sp>
         <p:nvSpPr>
-          <p:cNvPr id="9" name="Text 7"/>
-          <p:cNvSpPr txBox="1"/>
-          <p:nvPr/>
-        </p:nvSpPr>
-        <p:spPr>
-          <a:xfrm>
-            <a:off x="4572000" y="3337560"/>
-            <a:ext cx="3474720" cy="731520"/>
-          </a:xfrm>
-          <a:prstGeom prst="rect">
-            <a:avLst/>
-          </a:prstGeom>
-          <a:noFill/>
-          <a:ln/>
-        </p:spPr>
-        <p:txBody>
-          <a:bodyPr wrap="square" lIns="0" tIns="0" rIns="0" bIns="0" rtlCol="0" anchor="t"/>
+          <p:cNvPr id="10" name="Text 8"/>
+          <p:cNvSpPr txBox="1"/>
+          <p:nvPr/>
+        </p:nvSpPr>
+        <p:spPr>
+          <a:xfrm>
+            <a:off x="4389120" y="3383280"/>
+            <a:ext cx="3108960" cy="841248"/>
+          </a:xfrm>
+          <a:prstGeom prst="rect">
+            <a:avLst/>
+          </a:prstGeom>
+          <a:noFill/>
+          <a:ln/>
+        </p:spPr>
+        <p:txBody>
+          <a:bodyPr wrap="square" lIns="0" tIns="0" rIns="0" bIns="0" rtlCol="0" anchor="ctr"/>
           <a:lstStyle/>
           <a:p>
             <a:pPr indent="0" marL="0">
@@ -6975,23 +7184,23 @@
       </p:sp>
       <p:sp>
         <p:nvSpPr>
-          <p:cNvPr id="10" name="Text 8"/>
-          <p:cNvSpPr txBox="1"/>
-          <p:nvPr/>
-        </p:nvSpPr>
-        <p:spPr>
-          <a:xfrm>
-            <a:off x="8229600" y="3337560"/>
-            <a:ext cx="3474720" cy="731520"/>
-          </a:xfrm>
-          <a:prstGeom prst="rect">
-            <a:avLst/>
-          </a:prstGeom>
-          <a:noFill/>
-          <a:ln/>
-        </p:spPr>
-        <p:txBody>
-          <a:bodyPr wrap="square" lIns="0" tIns="0" rIns="0" bIns="0" rtlCol="0" anchor="t"/>
+          <p:cNvPr id="11" name="Text 9"/>
+          <p:cNvSpPr txBox="1"/>
+          <p:nvPr/>
+        </p:nvSpPr>
+        <p:spPr>
+          <a:xfrm>
+            <a:off x="7680960" y="3383280"/>
+            <a:ext cx="2834640" cy="841248"/>
+          </a:xfrm>
+          <a:prstGeom prst="rect">
+            <a:avLst/>
+          </a:prstGeom>
+          <a:noFill/>
+          <a:ln/>
+        </p:spPr>
+        <p:txBody>
+          <a:bodyPr wrap="square" lIns="0" tIns="0" rIns="0" bIns="0" rtlCol="0" anchor="ctr"/>
           <a:lstStyle/>
           <a:p>
             <a:pPr indent="0" marL="0">
@@ -7014,23 +7223,23 @@
       </p:sp>
       <p:sp>
         <p:nvSpPr>
-          <p:cNvPr id="11" name="Text 9"/>
-          <p:cNvSpPr txBox="1"/>
-          <p:nvPr/>
-        </p:nvSpPr>
-        <p:spPr>
-          <a:xfrm>
-            <a:off x="548640" y="4206240"/>
-            <a:ext cx="3840480" cy="731520"/>
-          </a:xfrm>
-          <a:prstGeom prst="rect">
-            <a:avLst/>
-          </a:prstGeom>
-          <a:noFill/>
-          <a:ln/>
-        </p:spPr>
-        <p:txBody>
-          <a:bodyPr wrap="square" lIns="0" tIns="0" rIns="0" bIns="0" rtlCol="0" anchor="t"/>
+          <p:cNvPr id="12" name="Text 10"/>
+          <p:cNvSpPr txBox="1"/>
+          <p:nvPr/>
+        </p:nvSpPr>
+        <p:spPr>
+          <a:xfrm>
+            <a:off x="777240" y="4315968"/>
+            <a:ext cx="3383280" cy="841248"/>
+          </a:xfrm>
+          <a:prstGeom prst="rect">
+            <a:avLst/>
+          </a:prstGeom>
+          <a:noFill/>
+          <a:ln/>
+        </p:spPr>
+        <p:txBody>
+          <a:bodyPr wrap="square" lIns="0" tIns="0" rIns="0" bIns="0" rtlCol="0" anchor="ctr"/>
           <a:lstStyle/>
           <a:p>
             <a:pPr indent="0" marL="0">
@@ -7053,23 +7262,23 @@
       </p:sp>
       <p:sp>
         <p:nvSpPr>
-          <p:cNvPr id="12" name="Text 10"/>
-          <p:cNvSpPr txBox="1"/>
-          <p:nvPr/>
-        </p:nvSpPr>
-        <p:spPr>
-          <a:xfrm>
-            <a:off x="4572000" y="4206240"/>
-            <a:ext cx="3474720" cy="731520"/>
-          </a:xfrm>
-          <a:prstGeom prst="rect">
-            <a:avLst/>
-          </a:prstGeom>
-          <a:noFill/>
-          <a:ln/>
-        </p:spPr>
-        <p:txBody>
-          <a:bodyPr wrap="square" lIns="0" tIns="0" rIns="0" bIns="0" rtlCol="0" anchor="t"/>
+          <p:cNvPr id="13" name="Text 11"/>
+          <p:cNvSpPr txBox="1"/>
+          <p:nvPr/>
+        </p:nvSpPr>
+        <p:spPr>
+          <a:xfrm>
+            <a:off x="4389120" y="4315968"/>
+            <a:ext cx="3108960" cy="841248"/>
+          </a:xfrm>
+          <a:prstGeom prst="rect">
+            <a:avLst/>
+          </a:prstGeom>
+          <a:noFill/>
+          <a:ln/>
+        </p:spPr>
+        <p:txBody>
+          <a:bodyPr wrap="square" lIns="0" tIns="0" rIns="0" bIns="0" rtlCol="0" anchor="ctr"/>
           <a:lstStyle/>
           <a:p>
             <a:pPr indent="0" marL="0">
@@ -7092,23 +7301,23 @@
       </p:sp>
       <p:sp>
         <p:nvSpPr>
-          <p:cNvPr id="13" name="Text 11"/>
-          <p:cNvSpPr txBox="1"/>
-          <p:nvPr/>
-        </p:nvSpPr>
-        <p:spPr>
-          <a:xfrm>
-            <a:off x="8229600" y="4206240"/>
-            <a:ext cx="3474720" cy="731520"/>
-          </a:xfrm>
-          <a:prstGeom prst="rect">
-            <a:avLst/>
-          </a:prstGeom>
-          <a:noFill/>
-          <a:ln/>
-        </p:spPr>
-        <p:txBody>
-          <a:bodyPr wrap="square" lIns="0" tIns="0" rIns="0" bIns="0" rtlCol="0" anchor="t"/>
+          <p:cNvPr id="14" name="Text 12"/>
+          <p:cNvSpPr txBox="1"/>
+          <p:nvPr/>
+        </p:nvSpPr>
+        <p:spPr>
+          <a:xfrm>
+            <a:off x="7680960" y="4315968"/>
+            <a:ext cx="2834640" cy="841248"/>
+          </a:xfrm>
+          <a:prstGeom prst="rect">
+            <a:avLst/>
+          </a:prstGeom>
+          <a:noFill/>
+          <a:ln/>
+        </p:spPr>
+        <p:txBody>
+          <a:bodyPr wrap="square" lIns="0" tIns="0" rIns="0" bIns="0" rtlCol="0" anchor="ctr"/>
           <a:lstStyle/>
           <a:p>
             <a:pPr indent="0" marL="0">
@@ -7131,23 +7340,43 @@
       </p:sp>
       <p:sp>
         <p:nvSpPr>
-          <p:cNvPr id="14" name="Text 12"/>
-          <p:cNvSpPr txBox="1"/>
-          <p:nvPr/>
-        </p:nvSpPr>
-        <p:spPr>
-          <a:xfrm>
-            <a:off x="548640" y="5074920"/>
-            <a:ext cx="3840480" cy="731520"/>
-          </a:xfrm>
-          <a:prstGeom prst="rect">
-            <a:avLst/>
-          </a:prstGeom>
-          <a:noFill/>
-          <a:ln/>
-        </p:spPr>
-        <p:txBody>
-          <a:bodyPr wrap="square" lIns="0" tIns="0" rIns="0" bIns="0" rtlCol="0" anchor="t"/>
+          <p:cNvPr id="15" name="Shape 13"/>
+          <p:cNvSpPr/>
+          <p:nvPr/>
+        </p:nvSpPr>
+        <p:spPr>
+          <a:xfrm>
+            <a:off x="548640" y="5248656"/>
+            <a:ext cx="10149840" cy="841248"/>
+          </a:xfrm>
+          <a:prstGeom prst="rect">
+            <a:avLst/>
+          </a:prstGeom>
+          <a:solidFill>
+            <a:srgbClr val="F2F5FC"/>
+          </a:solidFill>
+          <a:ln/>
+        </p:spPr>
+      </p:sp>
+      <p:sp>
+        <p:nvSpPr>
+          <p:cNvPr id="16" name="Text 14"/>
+          <p:cNvSpPr txBox="1"/>
+          <p:nvPr/>
+        </p:nvSpPr>
+        <p:spPr>
+          <a:xfrm>
+            <a:off x="777240" y="5248656"/>
+            <a:ext cx="3383280" cy="841248"/>
+          </a:xfrm>
+          <a:prstGeom prst="rect">
+            <a:avLst/>
+          </a:prstGeom>
+          <a:noFill/>
+          <a:ln/>
+        </p:spPr>
+        <p:txBody>
+          <a:bodyPr wrap="square" lIns="0" tIns="0" rIns="0" bIns="0" rtlCol="0" anchor="ctr"/>
           <a:lstStyle/>
           <a:p>
             <a:pPr indent="0" marL="0">
@@ -7170,23 +7399,23 @@
       </p:sp>
       <p:sp>
         <p:nvSpPr>
-          <p:cNvPr id="15" name="Text 13"/>
-          <p:cNvSpPr txBox="1"/>
-          <p:nvPr/>
-        </p:nvSpPr>
-        <p:spPr>
-          <a:xfrm>
-            <a:off x="4572000" y="5074920"/>
-            <a:ext cx="3474720" cy="731520"/>
-          </a:xfrm>
-          <a:prstGeom prst="rect">
-            <a:avLst/>
-          </a:prstGeom>
-          <a:noFill/>
-          <a:ln/>
-        </p:spPr>
-        <p:txBody>
-          <a:bodyPr wrap="square" lIns="0" tIns="0" rIns="0" bIns="0" rtlCol="0" anchor="t"/>
+          <p:cNvPr id="17" name="Text 15"/>
+          <p:cNvSpPr txBox="1"/>
+          <p:nvPr/>
+        </p:nvSpPr>
+        <p:spPr>
+          <a:xfrm>
+            <a:off x="4389120" y="5248656"/>
+            <a:ext cx="3108960" cy="841248"/>
+          </a:xfrm>
+          <a:prstGeom prst="rect">
+            <a:avLst/>
+          </a:prstGeom>
+          <a:noFill/>
+          <a:ln/>
+        </p:spPr>
+        <p:txBody>
+          <a:bodyPr wrap="square" lIns="0" tIns="0" rIns="0" bIns="0" rtlCol="0" anchor="ctr"/>
           <a:lstStyle/>
           <a:p>
             <a:pPr indent="0" marL="0">
@@ -7209,23 +7438,23 @@
       </p:sp>
       <p:sp>
         <p:nvSpPr>
-          <p:cNvPr id="16" name="Text 14"/>
-          <p:cNvSpPr txBox="1"/>
-          <p:nvPr/>
-        </p:nvSpPr>
-        <p:spPr>
-          <a:xfrm>
-            <a:off x="8229600" y="5074920"/>
-            <a:ext cx="3474720" cy="731520"/>
-          </a:xfrm>
-          <a:prstGeom prst="rect">
-            <a:avLst/>
-          </a:prstGeom>
-          <a:noFill/>
-          <a:ln/>
-        </p:spPr>
-        <p:txBody>
-          <a:bodyPr wrap="square" lIns="0" tIns="0" rIns="0" bIns="0" rtlCol="0" anchor="t"/>
+          <p:cNvPr id="18" name="Text 16"/>
+          <p:cNvSpPr txBox="1"/>
+          <p:nvPr/>
+        </p:nvSpPr>
+        <p:spPr>
+          <a:xfrm>
+            <a:off x="7680960" y="5248656"/>
+            <a:ext cx="2834640" cy="841248"/>
+          </a:xfrm>
+          <a:prstGeom prst="rect">
+            <a:avLst/>
+          </a:prstGeom>
+          <a:noFill/>
+          <a:ln/>
+        </p:spPr>
+        <p:txBody>
+          <a:bodyPr wrap="square" lIns="0" tIns="0" rIns="0" bIns="0" rtlCol="0" anchor="ctr"/>
           <a:lstStyle/>
           <a:p>
             <a:pPr indent="0" marL="0">
@@ -7248,13 +7477,13 @@
       </p:sp>
       <p:sp>
         <p:nvSpPr>
-          <p:cNvPr id="17" name="Text 15"/>
-          <p:cNvSpPr txBox="1"/>
-          <p:nvPr/>
-        </p:nvSpPr>
-        <p:spPr>
-          <a:xfrm>
-            <a:off x="11365992" y="6400800"/>
+          <p:cNvPr id="19" name="Text 17"/>
+          <p:cNvSpPr txBox="1"/>
+          <p:nvPr/>
+        </p:nvSpPr>
+        <p:spPr>
+          <a:xfrm>
+            <a:off x="11365992" y="6510528"/>
             <a:ext cx="457200" cy="274320"/>
           </a:xfrm>
           <a:prstGeom prst="rect">
@@ -7267,7 +7496,7 @@
           <a:bodyPr wrap="square" lIns="0" tIns="0" rIns="0" bIns="0" rtlCol="0" anchor="ctr"/>
           <a:lstStyle/>
           <a:p>
-            <a:pPr algn="r" indent="0" marL="0">
+            <a:pPr indent="0" marL="0">
               <a:buNone/>
             </a:pPr>
             <a:r>
@@ -7296,13 +7525,6 @@
 <file path=ppt/slides/slide4.xml><?xml version="1.0" encoding="utf-8"?>
 <p:sld xmlns:a="http://schemas.openxmlformats.org/drawingml/2006/main" xmlns:r="http://schemas.openxmlformats.org/officeDocument/2006/relationships" xmlns:p="http://schemas.openxmlformats.org/presentationml/2006/main">
   <p:cSld name="Slide 4">
-    <p:bg>
-      <p:bgPr>
-        <a:solidFill>
-          <a:srgbClr val="FFFFFF"/>
-        </a:solidFill>
-      </p:bgPr>
-    </p:bg>
     <p:spTree>
       <p:nvGrpSpPr>
         <p:cNvPr id="1" name=""/>
@@ -7404,11 +7626,11 @@
         <p:spPr>
           <a:xfrm>
             <a:off x="548640" y="1920240"/>
-            <a:ext cx="3291840" cy="3108960"/>
+            <a:ext cx="3291840" cy="4023360"/>
           </a:xfrm>
           <a:prstGeom prst="roundRect">
             <a:avLst>
-              <a:gd name="adj" fmla="val 2353"/>
+              <a:gd name="adj" fmla="val 2222"/>
             </a:avLst>
           </a:prstGeom>
           <a:solidFill>
@@ -7420,13 +7642,6 @@
             </a:solidFill>
             <a:prstDash val="solid"/>
           </a:ln>
-          <a:effectLst>
-            <a:outerShdw sx="100000" sy="100000" kx="0" ky="0" algn="bl" rotWithShape="0" blurRad="101600" dist="38100" dir="5400000">
-              <a:srgbClr val="1E2761">
-                <a:alpha val="15000"/>
-              </a:srgbClr>
-            </a:outerShdw>
-          </a:effectLst>
         </p:spPr>
       </p:sp>
       <p:sp>
@@ -7437,8 +7652,8 @@
         </p:nvSpPr>
         <p:spPr>
           <a:xfrm>
-            <a:off x="548640" y="2331720"/>
-            <a:ext cx="3291840" cy="822960"/>
+            <a:off x="548640" y="2788920"/>
+            <a:ext cx="3291840" cy="914400"/>
           </a:xfrm>
           <a:prstGeom prst="rect">
             <a:avLst/>
@@ -7476,8 +7691,8 @@
         </p:nvSpPr>
         <p:spPr>
           <a:xfrm>
-            <a:off x="548640" y="3154680"/>
-            <a:ext cx="3291840" cy="457200"/>
+            <a:off x="548640" y="3703320"/>
+            <a:ext cx="3291840" cy="365760"/>
           </a:xfrm>
           <a:prstGeom prst="rect">
             <a:avLst/>
@@ -7515,17 +7730,17 @@
         </p:nvSpPr>
         <p:spPr>
           <a:xfrm>
-            <a:off x="822960" y="3749040"/>
-            <a:ext cx="2743200" cy="1097280"/>
-          </a:xfrm>
-          <a:prstGeom prst="rect">
-            <a:avLst/>
-          </a:prstGeom>
-          <a:noFill/>
-          <a:ln/>
-        </p:spPr>
-        <p:txBody>
-          <a:bodyPr wrap="square" lIns="0" tIns="0" rIns="0" bIns="0" rtlCol="0" anchor="ctr"/>
+            <a:off x="868680" y="4434840"/>
+            <a:ext cx="2651760" cy="914400"/>
+          </a:xfrm>
+          <a:prstGeom prst="rect">
+            <a:avLst/>
+          </a:prstGeom>
+          <a:noFill/>
+          <a:ln/>
+        </p:spPr>
+        <p:txBody>
+          <a:bodyPr wrap="square" lIns="0" tIns="0" rIns="0" bIns="0" rtlCol="0" anchor="t"/>
           <a:lstStyle/>
           <a:p>
             <a:pPr algn="ctr" indent="0" marL="0">
@@ -7548,14 +7763,80 @@
       </p:sp>
       <p:sp>
         <p:nvSpPr>
-          <p:cNvPr id="8" name="Text 6"/>
-          <p:cNvSpPr txBox="1"/>
-          <p:nvPr/>
-        </p:nvSpPr>
-        <p:spPr>
-          <a:xfrm>
-            <a:off x="4297680" y="2103120"/>
-            <a:ext cx="7315200" cy="3840480"/>
+          <p:cNvPr id="8" name="Shape 6"/>
+          <p:cNvSpPr/>
+          <p:nvPr/>
+        </p:nvSpPr>
+        <p:spPr>
+          <a:xfrm>
+            <a:off x="4297680" y="1920240"/>
+            <a:ext cx="7315200" cy="1188720"/>
+          </a:xfrm>
+          <a:prstGeom prst="roundRect">
+            <a:avLst>
+              <a:gd name="adj" fmla="val 6154"/>
+            </a:avLst>
+          </a:prstGeom>
+          <a:solidFill>
+            <a:srgbClr val="FFFFFF"/>
+          </a:solidFill>
+          <a:ln w="12700">
+            <a:solidFill>
+              <a:srgbClr val="CADCFC"/>
+            </a:solidFill>
+            <a:prstDash val="solid"/>
+          </a:ln>
+        </p:spPr>
+      </p:sp>
+      <p:sp>
+        <p:nvSpPr>
+          <p:cNvPr id="9" name="Text 7"/>
+          <p:cNvSpPr txBox="1"/>
+          <p:nvPr/>
+        </p:nvSpPr>
+        <p:spPr>
+          <a:xfrm>
+            <a:off x="4526280" y="2057400"/>
+            <a:ext cx="6858000" cy="384048"/>
+          </a:xfrm>
+          <a:prstGeom prst="rect">
+            <a:avLst/>
+          </a:prstGeom>
+          <a:noFill/>
+          <a:ln/>
+        </p:spPr>
+        <p:txBody>
+          <a:bodyPr wrap="square" lIns="0" tIns="0" rIns="0" bIns="0" rtlCol="0" anchor="ctr"/>
+          <a:lstStyle/>
+          <a:p>
+            <a:pPr indent="0" marL="0">
+              <a:buNone/>
+            </a:pPr>
+            <a:r>
+              <a:rPr lang="en-US" sz="1550" b="1" dirty="0">
+                <a:solidFill>
+                  <a:srgbClr val="1E2761"/>
+                </a:solidFill>
+                <a:latin typeface="Cambria" pitchFamily="34" charset="0"/>
+                <a:ea typeface="Cambria" pitchFamily="34" charset="-122"/>
+                <a:cs typeface="Cambria" pitchFamily="34" charset="-120"/>
+              </a:rPr>
+              <a:t>Multi-AZ, automatically</a:t>
+            </a:r>
+            <a:endParaRPr lang="en-US" sz="1550" dirty="0"/>
+          </a:p>
+        </p:txBody>
+      </p:sp>
+      <p:sp>
+        <p:nvSpPr>
+          <p:cNvPr id="10" name="Text 8"/>
+          <p:cNvSpPr txBox="1"/>
+          <p:nvPr/>
+        </p:nvSpPr>
+        <p:spPr>
+          <a:xfrm>
+            <a:off x="4526280" y="2487168"/>
+            <a:ext cx="6858000" cy="502920"/>
           </a:xfrm>
           <a:prstGeom prst="rect">
             <a:avLst/>
@@ -7567,79 +7848,243 @@
           <a:bodyPr wrap="square" lIns="0" tIns="0" rIns="0" bIns="0" rtlCol="0" anchor="t"/>
           <a:lstStyle/>
           <a:p>
-            <a:pPr marL="228600" indent="-228600">
-              <a:spcAft>
-                <a:spcPts val="1000"/>
-              </a:spcAft>
-              <a:buSzPct val="100000"/>
-              <a:buChar char="●"/>
-            </a:pPr>
-            <a:r>
-              <a:rPr lang="en-US" sz="1500" dirty="0">
-                <a:solidFill>
-                  <a:srgbClr val="24304A"/>
-                </a:solidFill>
-                <a:latin typeface="Calibri" pitchFamily="34" charset="0"/>
-                <a:ea typeface="Calibri" pitchFamily="34" charset="-122"/>
-                <a:cs typeface="Calibri" pitchFamily="34" charset="-120"/>
-              </a:rPr>
-              <a:t>Multi-AZ control plane, automatic — no HA to build ourselves</a:t>
-            </a:r>
-            <a:endParaRPr lang="en-US" sz="1500" dirty="0"/>
-          </a:p>
-          <a:p>
-            <a:pPr marL="228600" indent="-228600">
-              <a:spcAft>
-                <a:spcPts val="1000"/>
-              </a:spcAft>
-              <a:buSzPct val="100000"/>
-              <a:buChar char="●"/>
-            </a:pPr>
-            <a:r>
-              <a:rPr lang="en-US" sz="1500" dirty="0">
-                <a:solidFill>
-                  <a:srgbClr val="24304A"/>
-                </a:solidFill>
-                <a:latin typeface="Calibri" pitchFamily="34" charset="0"/>
-                <a:ea typeface="Calibri" pitchFamily="34" charset="-122"/>
-                <a:cs typeface="Calibri" pitchFamily="34" charset="-120"/>
-              </a:rPr>
-              <a:t>~1 hour to stand up with Terraform, vs. days of kubeadm debugging</a:t>
-            </a:r>
-            <a:endParaRPr lang="en-US" sz="1500" dirty="0"/>
-          </a:p>
-          <a:p>
-            <a:pPr marL="228600" indent="-228600">
-              <a:spcAft>
-                <a:spcPts val="1000"/>
-              </a:spcAft>
-              <a:buSzPct val="100000"/>
-              <a:buChar char="●"/>
-            </a:pPr>
-            <a:r>
-              <a:rPr lang="en-US" sz="1500" dirty="0">
-                <a:solidFill>
-                  <a:srgbClr val="24304A"/>
-                </a:solidFill>
-                <a:latin typeface="Calibri" pitchFamily="34" charset="0"/>
-                <a:ea typeface="Calibri" pitchFamily="34" charset="-122"/>
-                <a:cs typeface="Calibri" pitchFamily="34" charset="-120"/>
-              </a:rPr>
-              <a:t>Fixed timeline can't absorb control-plane failures — self-managed risked eating a week</a:t>
-            </a:r>
-            <a:endParaRPr lang="en-US" sz="1500" dirty="0"/>
-          </a:p>
-        </p:txBody>
-      </p:sp>
-      <p:sp>
-        <p:nvSpPr>
-          <p:cNvPr id="9" name="Text 7"/>
-          <p:cNvSpPr txBox="1"/>
-          <p:nvPr/>
-        </p:nvSpPr>
-        <p:spPr>
-          <a:xfrm>
-            <a:off x="11365992" y="6400800"/>
+            <a:pPr indent="0" marL="0">
+              <a:buNone/>
+            </a:pPr>
+            <a:r>
+              <a:rPr lang="en-US" sz="1250" dirty="0">
+                <a:solidFill>
+                  <a:srgbClr val="5B6B8C"/>
+                </a:solidFill>
+                <a:latin typeface="Calibri" pitchFamily="34" charset="0"/>
+                <a:ea typeface="Calibri" pitchFamily="34" charset="-122"/>
+                <a:cs typeface="Calibri" pitchFamily="34" charset="-120"/>
+              </a:rPr>
+              <a:t>The control plane spans AZs with no HA for us to build</a:t>
+            </a:r>
+            <a:endParaRPr lang="en-US" sz="1250" dirty="0"/>
+          </a:p>
+        </p:txBody>
+      </p:sp>
+      <p:sp>
+        <p:nvSpPr>
+          <p:cNvPr id="11" name="Shape 9"/>
+          <p:cNvSpPr/>
+          <p:nvPr/>
+        </p:nvSpPr>
+        <p:spPr>
+          <a:xfrm>
+            <a:off x="4297680" y="3337560"/>
+            <a:ext cx="7315200" cy="1188720"/>
+          </a:xfrm>
+          <a:prstGeom prst="roundRect">
+            <a:avLst>
+              <a:gd name="adj" fmla="val 6154"/>
+            </a:avLst>
+          </a:prstGeom>
+          <a:solidFill>
+            <a:srgbClr val="FFFFFF"/>
+          </a:solidFill>
+          <a:ln w="12700">
+            <a:solidFill>
+              <a:srgbClr val="CADCFC"/>
+            </a:solidFill>
+            <a:prstDash val="solid"/>
+          </a:ln>
+        </p:spPr>
+      </p:sp>
+      <p:sp>
+        <p:nvSpPr>
+          <p:cNvPr id="12" name="Text 10"/>
+          <p:cNvSpPr txBox="1"/>
+          <p:nvPr/>
+        </p:nvSpPr>
+        <p:spPr>
+          <a:xfrm>
+            <a:off x="4526280" y="3474720"/>
+            <a:ext cx="6858000" cy="384048"/>
+          </a:xfrm>
+          <a:prstGeom prst="rect">
+            <a:avLst/>
+          </a:prstGeom>
+          <a:noFill/>
+          <a:ln/>
+        </p:spPr>
+        <p:txBody>
+          <a:bodyPr wrap="square" lIns="0" tIns="0" rIns="0" bIns="0" rtlCol="0" anchor="ctr"/>
+          <a:lstStyle/>
+          <a:p>
+            <a:pPr indent="0" marL="0">
+              <a:buNone/>
+            </a:pPr>
+            <a:r>
+              <a:rPr lang="en-US" sz="1550" b="1" dirty="0">
+                <a:solidFill>
+                  <a:srgbClr val="1E2761"/>
+                </a:solidFill>
+                <a:latin typeface="Cambria" pitchFamily="34" charset="0"/>
+                <a:ea typeface="Cambria" pitchFamily="34" charset="-122"/>
+                <a:cs typeface="Cambria" pitchFamily="34" charset="-120"/>
+              </a:rPr>
+              <a:t>~1 hour, not days</a:t>
+            </a:r>
+            <a:endParaRPr lang="en-US" sz="1550" dirty="0"/>
+          </a:p>
+        </p:txBody>
+      </p:sp>
+      <p:sp>
+        <p:nvSpPr>
+          <p:cNvPr id="13" name="Text 11"/>
+          <p:cNvSpPr txBox="1"/>
+          <p:nvPr/>
+        </p:nvSpPr>
+        <p:spPr>
+          <a:xfrm>
+            <a:off x="4526280" y="3904488"/>
+            <a:ext cx="6858000" cy="502920"/>
+          </a:xfrm>
+          <a:prstGeom prst="rect">
+            <a:avLst/>
+          </a:prstGeom>
+          <a:noFill/>
+          <a:ln/>
+        </p:spPr>
+        <p:txBody>
+          <a:bodyPr wrap="square" lIns="0" tIns="0" rIns="0" bIns="0" rtlCol="0" anchor="t"/>
+          <a:lstStyle/>
+          <a:p>
+            <a:pPr indent="0" marL="0">
+              <a:buNone/>
+            </a:pPr>
+            <a:r>
+              <a:rPr lang="en-US" sz="1250" dirty="0">
+                <a:solidFill>
+                  <a:srgbClr val="5B6B8C"/>
+                </a:solidFill>
+                <a:latin typeface="Calibri" pitchFamily="34" charset="0"/>
+                <a:ea typeface="Calibri" pitchFamily="34" charset="-122"/>
+                <a:cs typeface="Calibri" pitchFamily="34" charset="-120"/>
+              </a:rPr>
+              <a:t>Stood up with Terraform, vs. days of kubeadm debugging</a:t>
+            </a:r>
+            <a:endParaRPr lang="en-US" sz="1250" dirty="0"/>
+          </a:p>
+        </p:txBody>
+      </p:sp>
+      <p:sp>
+        <p:nvSpPr>
+          <p:cNvPr id="14" name="Shape 12"/>
+          <p:cNvSpPr/>
+          <p:nvPr/>
+        </p:nvSpPr>
+        <p:spPr>
+          <a:xfrm>
+            <a:off x="4297680" y="4754880"/>
+            <a:ext cx="7315200" cy="1188720"/>
+          </a:xfrm>
+          <a:prstGeom prst="roundRect">
+            <a:avLst>
+              <a:gd name="adj" fmla="val 6154"/>
+            </a:avLst>
+          </a:prstGeom>
+          <a:solidFill>
+            <a:srgbClr val="FFFFFF"/>
+          </a:solidFill>
+          <a:ln w="12700">
+            <a:solidFill>
+              <a:srgbClr val="CADCFC"/>
+            </a:solidFill>
+            <a:prstDash val="solid"/>
+          </a:ln>
+        </p:spPr>
+      </p:sp>
+      <p:sp>
+        <p:nvSpPr>
+          <p:cNvPr id="15" name="Text 13"/>
+          <p:cNvSpPr txBox="1"/>
+          <p:nvPr/>
+        </p:nvSpPr>
+        <p:spPr>
+          <a:xfrm>
+            <a:off x="4526280" y="4892040"/>
+            <a:ext cx="6858000" cy="384048"/>
+          </a:xfrm>
+          <a:prstGeom prst="rect">
+            <a:avLst/>
+          </a:prstGeom>
+          <a:noFill/>
+          <a:ln/>
+        </p:spPr>
+        <p:txBody>
+          <a:bodyPr wrap="square" lIns="0" tIns="0" rIns="0" bIns="0" rtlCol="0" anchor="ctr"/>
+          <a:lstStyle/>
+          <a:p>
+            <a:pPr indent="0" marL="0">
+              <a:buNone/>
+            </a:pPr>
+            <a:r>
+              <a:rPr lang="en-US" sz="1550" b="1" dirty="0">
+                <a:solidFill>
+                  <a:srgbClr val="1E2761"/>
+                </a:solidFill>
+                <a:latin typeface="Cambria" pitchFamily="34" charset="0"/>
+                <a:ea typeface="Cambria" pitchFamily="34" charset="-122"/>
+                <a:cs typeface="Cambria" pitchFamily="34" charset="-120"/>
+              </a:rPr>
+              <a:t>A fixed timeline can't absorb it</a:t>
+            </a:r>
+            <a:endParaRPr lang="en-US" sz="1550" dirty="0"/>
+          </a:p>
+        </p:txBody>
+      </p:sp>
+      <p:sp>
+        <p:nvSpPr>
+          <p:cNvPr id="16" name="Text 14"/>
+          <p:cNvSpPr txBox="1"/>
+          <p:nvPr/>
+        </p:nvSpPr>
+        <p:spPr>
+          <a:xfrm>
+            <a:off x="4526280" y="5321808"/>
+            <a:ext cx="6858000" cy="502920"/>
+          </a:xfrm>
+          <a:prstGeom prst="rect">
+            <a:avLst/>
+          </a:prstGeom>
+          <a:noFill/>
+          <a:ln/>
+        </p:spPr>
+        <p:txBody>
+          <a:bodyPr wrap="square" lIns="0" tIns="0" rIns="0" bIns="0" rtlCol="0" anchor="t"/>
+          <a:lstStyle/>
+          <a:p>
+            <a:pPr indent="0" marL="0">
+              <a:buNone/>
+            </a:pPr>
+            <a:r>
+              <a:rPr lang="en-US" sz="1250" dirty="0">
+                <a:solidFill>
+                  <a:srgbClr val="5B6B8C"/>
+                </a:solidFill>
+                <a:latin typeface="Calibri" pitchFamily="34" charset="0"/>
+                <a:ea typeface="Calibri" pitchFamily="34" charset="-122"/>
+                <a:cs typeface="Calibri" pitchFamily="34" charset="-120"/>
+              </a:rPr>
+              <a:t>A self-managed control-plane failure risked eating a week</a:t>
+            </a:r>
+            <a:endParaRPr lang="en-US" sz="1250" dirty="0"/>
+          </a:p>
+        </p:txBody>
+      </p:sp>
+      <p:sp>
+        <p:nvSpPr>
+          <p:cNvPr id="17" name="Text 15"/>
+          <p:cNvSpPr txBox="1"/>
+          <p:nvPr/>
+        </p:nvSpPr>
+        <p:spPr>
+          <a:xfrm>
+            <a:off x="11365992" y="6510528"/>
             <a:ext cx="457200" cy="274320"/>
           </a:xfrm>
           <a:prstGeom prst="rect">
@@ -7652,7 +8097,7 @@
           <a:bodyPr wrap="square" lIns="0" tIns="0" rIns="0" bIns="0" rtlCol="0" anchor="ctr"/>
           <a:lstStyle/>
           <a:p>
-            <a:pPr algn="r" indent="0" marL="0">
+            <a:pPr indent="0" marL="0">
               <a:buNone/>
             </a:pPr>
             <a:r>
@@ -7681,13 +8126,6 @@
 <file path=ppt/slides/slide5.xml><?xml version="1.0" encoding="utf-8"?>
 <p:sld xmlns:a="http://schemas.openxmlformats.org/drawingml/2006/main" xmlns:r="http://schemas.openxmlformats.org/officeDocument/2006/relationships" xmlns:p="http://schemas.openxmlformats.org/presentationml/2006/main">
   <p:cSld name="Slide 5">
-    <p:bg>
-      <p:bgPr>
-        <a:solidFill>
-          <a:srgbClr val="FFFFFF"/>
-        </a:solidFill>
-      </p:bgPr>
-    </p:bg>
     <p:spTree>
       <p:nvGrpSpPr>
         <p:cNvPr id="1" name=""/>
@@ -7749,7 +8187,7 @@
         </p:nvSpPr>
         <p:spPr>
           <a:xfrm>
-            <a:off x="548640" y="502920"/>
+            <a:off x="548640" y="685800"/>
             <a:ext cx="10515600" cy="822960"/>
           </a:xfrm>
           <a:prstGeom prst="rect">
@@ -7789,11 +8227,11 @@
         <p:spPr>
           <a:xfrm>
             <a:off x="457200" y="1417320"/>
-            <a:ext cx="11247120" cy="5074920"/>
+            <a:ext cx="11247120" cy="4937760"/>
           </a:xfrm>
           <a:prstGeom prst="roundRect">
             <a:avLst>
-              <a:gd name="adj" fmla="val 1441"/>
+              <a:gd name="adj" fmla="val 1111"/>
             </a:avLst>
           </a:prstGeom>
           <a:solidFill>
@@ -7815,8 +8253,8 @@
         </p:nvSpPr>
         <p:spPr>
           <a:xfrm>
-            <a:off x="530352" y="1472184"/>
-            <a:ext cx="11100816" cy="548640"/>
+            <a:off x="530352" y="1463040"/>
+            <a:ext cx="11100816" cy="274320"/>
           </a:xfrm>
           <a:prstGeom prst="rect">
             <a:avLst/>
@@ -7854,12 +8292,12 @@
         </p:nvSpPr>
         <p:spPr>
           <a:xfrm>
-            <a:off x="731520" y="1874520"/>
+            <a:off x="731520" y="1828800"/>
             <a:ext cx="10698480" cy="1234440"/>
           </a:xfrm>
           <a:prstGeom prst="roundRect">
             <a:avLst>
-              <a:gd name="adj" fmla="val 5926"/>
+              <a:gd name="adj" fmla="val 4444"/>
             </a:avLst>
           </a:prstGeom>
           <a:solidFill>
@@ -7881,8 +8319,8 @@
         </p:nvSpPr>
         <p:spPr>
           <a:xfrm>
-            <a:off x="868680" y="1920240"/>
-            <a:ext cx="2743200" cy="274320"/>
+            <a:off x="868680" y="1874520"/>
+            <a:ext cx="5486400" cy="228600"/>
           </a:xfrm>
           <a:prstGeom prst="rect">
             <a:avLst/>
@@ -7898,7 +8336,7 @@
               <a:buNone/>
             </a:pPr>
             <a:r>
-              <a:rPr lang="en-US" sz="900" b="1" dirty="0">
+              <a:rPr lang="en-US" sz="900" b="1" spc="100" kern="0" dirty="0">
                 <a:solidFill>
                   <a:srgbClr val="E0812F"/>
                 </a:solidFill>
@@ -7920,12 +8358,12 @@
         </p:nvSpPr>
         <p:spPr>
           <a:xfrm>
-            <a:off x="914400" y="2286000"/>
+            <a:off x="914400" y="2240280"/>
             <a:ext cx="1828800" cy="685800"/>
           </a:xfrm>
           <a:prstGeom prst="roundRect">
             <a:avLst>
-              <a:gd name="adj" fmla="val 10667"/>
+              <a:gd name="adj" fmla="val 8000"/>
             </a:avLst>
           </a:prstGeom>
           <a:solidFill>
@@ -7947,8 +8385,8 @@
         </p:nvSpPr>
         <p:spPr>
           <a:xfrm>
-            <a:off x="987552" y="2354580"/>
-            <a:ext cx="1682496" cy="548640"/>
+            <a:off x="969264" y="2240280"/>
+            <a:ext cx="1719072" cy="685800"/>
           </a:xfrm>
           <a:prstGeom prst="rect">
             <a:avLst/>
@@ -7986,12 +8424,12 @@
         </p:nvSpPr>
         <p:spPr>
           <a:xfrm>
-            <a:off x="3017520" y="2286000"/>
+            <a:off x="3017520" y="2240280"/>
             <a:ext cx="2011680" cy="685800"/>
           </a:xfrm>
           <a:prstGeom prst="roundRect">
             <a:avLst>
-              <a:gd name="adj" fmla="val 10667"/>
+              <a:gd name="adj" fmla="val 8000"/>
             </a:avLst>
           </a:prstGeom>
           <a:solidFill>
@@ -8013,8 +8451,8 @@
         </p:nvSpPr>
         <p:spPr>
           <a:xfrm>
-            <a:off x="3090672" y="2354580"/>
-            <a:ext cx="1865376" cy="548640"/>
+            <a:off x="3072384" y="2240280"/>
+            <a:ext cx="1901952" cy="685800"/>
           </a:xfrm>
           <a:prstGeom prst="rect">
             <a:avLst/>
@@ -8052,12 +8490,12 @@
         </p:nvSpPr>
         <p:spPr>
           <a:xfrm>
-            <a:off x="8686800" y="2286000"/>
+            <a:off x="8686800" y="2240280"/>
             <a:ext cx="2468880" cy="685800"/>
           </a:xfrm>
           <a:prstGeom prst="roundRect">
             <a:avLst>
-              <a:gd name="adj" fmla="val 10667"/>
+              <a:gd name="adj" fmla="val 8000"/>
             </a:avLst>
           </a:prstGeom>
           <a:solidFill>
@@ -8079,8 +8517,8 @@
         </p:nvSpPr>
         <p:spPr>
           <a:xfrm>
-            <a:off x="8759952" y="2354580"/>
-            <a:ext cx="2322576" cy="548640"/>
+            <a:off x="8741664" y="2240280"/>
+            <a:ext cx="2359152" cy="685800"/>
           </a:xfrm>
           <a:prstGeom prst="rect">
             <a:avLst/>
@@ -8118,14 +8556,14 @@
         </p:nvSpPr>
         <p:spPr>
           <a:xfrm>
-            <a:off x="2743200" y="2624328"/>
-            <a:ext cx="274320" cy="9144"/>
+            <a:off x="2743200" y="2578608"/>
+            <a:ext cx="274320" cy="0"/>
           </a:xfrm>
           <a:prstGeom prst="line">
             <a:avLst/>
           </a:prstGeom>
           <a:noFill/>
-          <a:ln w="25400">
+          <a:ln w="19050">
             <a:solidFill>
               <a:srgbClr val="5B6B8C"/>
             </a:solidFill>
@@ -8142,12 +8580,12 @@
         </p:nvSpPr>
         <p:spPr>
           <a:xfrm>
-            <a:off x="731520" y="3291840"/>
+            <a:off x="731520" y="3246120"/>
             <a:ext cx="10698480" cy="1371600"/>
           </a:xfrm>
           <a:prstGeom prst="roundRect">
             <a:avLst>
-              <a:gd name="adj" fmla="val 5333"/>
+              <a:gd name="adj" fmla="val 4000"/>
             </a:avLst>
           </a:prstGeom>
           <a:solidFill>
@@ -8169,8 +8607,8 @@
         </p:nvSpPr>
         <p:spPr>
           <a:xfrm>
-            <a:off x="868680" y="3337560"/>
-            <a:ext cx="4572000" cy="274320"/>
+            <a:off x="868680" y="3291840"/>
+            <a:ext cx="5486400" cy="228600"/>
           </a:xfrm>
           <a:prstGeom prst="rect">
             <a:avLst/>
@@ -8186,7 +8624,7 @@
               <a:buNone/>
             </a:pPr>
             <a:r>
-              <a:rPr lang="en-US" sz="900" b="1" dirty="0">
+              <a:rPr lang="en-US" sz="900" b="1" spc="100" kern="0" dirty="0">
                 <a:solidFill>
                   <a:srgbClr val="3B6EA5"/>
                 </a:solidFill>
@@ -8208,12 +8646,12 @@
         </p:nvSpPr>
         <p:spPr>
           <a:xfrm>
-            <a:off x="914400" y="3703320"/>
+            <a:off x="914400" y="3657600"/>
             <a:ext cx="1783080" cy="822960"/>
           </a:xfrm>
           <a:prstGeom prst="roundRect">
             <a:avLst>
-              <a:gd name="adj" fmla="val 8889"/>
+              <a:gd name="adj" fmla="val 6667"/>
             </a:avLst>
           </a:prstGeom>
           <a:solidFill>
@@ -8235,8 +8673,8 @@
         </p:nvSpPr>
         <p:spPr>
           <a:xfrm>
-            <a:off x="987552" y="3840480"/>
-            <a:ext cx="1636776" cy="548640"/>
+            <a:off x="969264" y="3657600"/>
+            <a:ext cx="1673352" cy="822960"/>
           </a:xfrm>
           <a:prstGeom prst="rect">
             <a:avLst/>
@@ -8274,12 +8712,12 @@
         </p:nvSpPr>
         <p:spPr>
           <a:xfrm>
-            <a:off x="2880360" y="3703320"/>
+            <a:off x="2880360" y="3657600"/>
             <a:ext cx="1783080" cy="822960"/>
           </a:xfrm>
           <a:prstGeom prst="roundRect">
             <a:avLst>
-              <a:gd name="adj" fmla="val 8889"/>
+              <a:gd name="adj" fmla="val 6667"/>
             </a:avLst>
           </a:prstGeom>
           <a:solidFill>
@@ -8301,8 +8739,8 @@
         </p:nvSpPr>
         <p:spPr>
           <a:xfrm>
-            <a:off x="2953512" y="3840480"/>
-            <a:ext cx="1636776" cy="548640"/>
+            <a:off x="2935224" y="3657600"/>
+            <a:ext cx="1673352" cy="822960"/>
           </a:xfrm>
           <a:prstGeom prst="rect">
             <a:avLst/>
@@ -8340,12 +8778,12 @@
         </p:nvSpPr>
         <p:spPr>
           <a:xfrm>
-            <a:off x="4846320" y="3703320"/>
+            <a:off x="4846320" y="3657600"/>
             <a:ext cx="1783080" cy="822960"/>
           </a:xfrm>
           <a:prstGeom prst="roundRect">
             <a:avLst>
-              <a:gd name="adj" fmla="val 8889"/>
+              <a:gd name="adj" fmla="val 6667"/>
             </a:avLst>
           </a:prstGeom>
           <a:solidFill>
@@ -8367,8 +8805,8 @@
         </p:nvSpPr>
         <p:spPr>
           <a:xfrm>
-            <a:off x="4919472" y="3840480"/>
-            <a:ext cx="1636776" cy="548640"/>
+            <a:off x="4901184" y="3657600"/>
+            <a:ext cx="1673352" cy="822960"/>
           </a:xfrm>
           <a:prstGeom prst="rect">
             <a:avLst/>
@@ -8406,12 +8844,12 @@
         </p:nvSpPr>
         <p:spPr>
           <a:xfrm>
-            <a:off x="8503920" y="3703320"/>
+            <a:off x="8503920" y="3657600"/>
             <a:ext cx="2651760" cy="822960"/>
           </a:xfrm>
           <a:prstGeom prst="roundRect">
             <a:avLst>
-              <a:gd name="adj" fmla="val 8889"/>
+              <a:gd name="adj" fmla="val 6667"/>
             </a:avLst>
           </a:prstGeom>
           <a:solidFill>
@@ -8433,8 +8871,8 @@
         </p:nvSpPr>
         <p:spPr>
           <a:xfrm>
-            <a:off x="8577072" y="3840480"/>
-            <a:ext cx="2505456" cy="548640"/>
+            <a:off x="8558784" y="3730752"/>
+            <a:ext cx="2542032" cy="452628"/>
           </a:xfrm>
           <a:prstGeom prst="rect">
             <a:avLst/>
@@ -8450,7 +8888,7 @@
               <a:buNone/>
             </a:pPr>
             <a:r>
-              <a:rPr lang="en-US" sz="1050" b="1" dirty="0">
+              <a:rPr lang="en-US" sz="1100" b="1" dirty="0">
                 <a:solidFill>
                   <a:srgbClr val="1E2761"/>
                 </a:solidFill>
@@ -8460,16 +8898,38 @@
               </a:rPr>
               <a:t>CloudFront + S3</a:t>
             </a:r>
-            <a:endParaRPr lang="en-US" sz="1050" dirty="0"/>
-          </a:p>
+            <a:endParaRPr lang="en-US" sz="1100" dirty="0"/>
+          </a:p>
+        </p:txBody>
+      </p:sp>
+      <p:sp>
+        <p:nvSpPr>
+          <p:cNvPr id="25" name="Text 23"/>
+          <p:cNvSpPr txBox="1"/>
+          <p:nvPr/>
+        </p:nvSpPr>
+        <p:spPr>
+          <a:xfrm>
+            <a:off x="8558784" y="4110228"/>
+            <a:ext cx="2542032" cy="312725"/>
+          </a:xfrm>
+          <a:prstGeom prst="rect">
+            <a:avLst/>
+          </a:prstGeom>
+          <a:noFill/>
+          <a:ln/>
+        </p:spPr>
+        <p:txBody>
+          <a:bodyPr wrap="square" lIns="0" tIns="0" rIns="0" bIns="0" rtlCol="0" anchor="ctr"/>
+          <a:lstStyle/>
           <a:p>
             <a:pPr algn="ctr" indent="0" marL="0">
               <a:buNone/>
             </a:pPr>
             <a:r>
-              <a:rPr lang="en-US" sz="1050" b="1" dirty="0">
-                <a:solidFill>
-                  <a:srgbClr val="1E2761"/>
+              <a:rPr lang="en-US" sz="950" dirty="0">
+                <a:solidFill>
+                  <a:srgbClr val="5B6B8C"/>
                 </a:solidFill>
                 <a:latin typeface="Calibri" pitchFamily="34" charset="0"/>
                 <a:ea typeface="Calibri" pitchFamily="34" charset="-122"/>
@@ -8477,24 +8937,48 @@
               </a:rPr>
               <a:t>(static assets)</a:t>
             </a:r>
-            <a:endParaRPr lang="en-US" sz="1050" dirty="0"/>
-          </a:p>
-        </p:txBody>
-      </p:sp>
-      <p:sp>
-        <p:nvSpPr>
-          <p:cNvPr id="25" name="Shape 23"/>
+            <a:endParaRPr lang="en-US" sz="950" dirty="0"/>
+          </a:p>
+        </p:txBody>
+      </p:sp>
+      <p:sp>
+        <p:nvSpPr>
+          <p:cNvPr id="26" name="Shape 24"/>
           <p:cNvSpPr/>
           <p:nvPr/>
         </p:nvSpPr>
         <p:spPr>
           <a:xfrm>
-            <a:off x="731520" y="4892040"/>
+            <a:off x="4023360" y="2926080"/>
+            <a:ext cx="0" cy="320040"/>
+          </a:xfrm>
+          <a:prstGeom prst="line">
+            <a:avLst/>
+          </a:prstGeom>
+          <a:noFill/>
+          <a:ln w="19050">
+            <a:solidFill>
+              <a:srgbClr val="3B6EA5"/>
+            </a:solidFill>
+            <a:prstDash val="solid"/>
+            <a:tailEnd type="triangle"/>
+          </a:ln>
+        </p:spPr>
+      </p:sp>
+      <p:sp>
+        <p:nvSpPr>
+          <p:cNvPr id="27" name="Shape 25"/>
+          <p:cNvSpPr/>
+          <p:nvPr/>
+        </p:nvSpPr>
+        <p:spPr>
+          <a:xfrm>
+            <a:off x="731520" y="4846320"/>
             <a:ext cx="10698480" cy="1371600"/>
           </a:xfrm>
           <a:prstGeom prst="roundRect">
             <a:avLst>
-              <a:gd name="adj" fmla="val 5333"/>
+              <a:gd name="adj" fmla="val 4000"/>
             </a:avLst>
           </a:prstGeom>
           <a:solidFill>
@@ -8510,14 +8994,14 @@
       </p:sp>
       <p:sp>
         <p:nvSpPr>
-          <p:cNvPr id="26" name="Text 24"/>
-          <p:cNvSpPr txBox="1"/>
-          <p:nvPr/>
-        </p:nvSpPr>
-        <p:spPr>
-          <a:xfrm>
-            <a:off x="868680" y="4937760"/>
-            <a:ext cx="4572000" cy="274320"/>
+          <p:cNvPr id="28" name="Text 26"/>
+          <p:cNvSpPr txBox="1"/>
+          <p:nvPr/>
+        </p:nvSpPr>
+        <p:spPr>
+          <a:xfrm>
+            <a:off x="868680" y="4892040"/>
+            <a:ext cx="5486400" cy="228600"/>
           </a:xfrm>
           <a:prstGeom prst="rect">
             <a:avLst/>
@@ -8533,7 +9017,7 @@
               <a:buNone/>
             </a:pPr>
             <a:r>
-              <a:rPr lang="en-US" sz="900" b="1" dirty="0">
+              <a:rPr lang="en-US" sz="900" b="1" spc="100" kern="0" dirty="0">
                 <a:solidFill>
                   <a:srgbClr val="2F9E6E"/>
                 </a:solidFill>
@@ -8549,18 +9033,18 @@
       </p:sp>
       <p:sp>
         <p:nvSpPr>
-          <p:cNvPr id="27" name="Shape 25"/>
+          <p:cNvPr id="29" name="Shape 27"/>
           <p:cNvSpPr/>
           <p:nvPr/>
         </p:nvSpPr>
         <p:spPr>
           <a:xfrm>
-            <a:off x="914400" y="5303520"/>
+            <a:off x="914400" y="5257800"/>
             <a:ext cx="2743200" cy="822960"/>
           </a:xfrm>
           <a:prstGeom prst="roundRect">
             <a:avLst>
-              <a:gd name="adj" fmla="val 8889"/>
+              <a:gd name="adj" fmla="val 6667"/>
             </a:avLst>
           </a:prstGeom>
           <a:solidFill>
@@ -8576,23 +9060,23 @@
       </p:sp>
       <p:sp>
         <p:nvSpPr>
-          <p:cNvPr id="28" name="Text 26"/>
-          <p:cNvSpPr txBox="1"/>
-          <p:nvPr/>
-        </p:nvSpPr>
-        <p:spPr>
-          <a:xfrm>
-            <a:off x="987552" y="5394960"/>
-            <a:ext cx="2596896" cy="452628"/>
-          </a:xfrm>
-          <a:prstGeom prst="rect">
-            <a:avLst/>
-          </a:prstGeom>
-          <a:noFill/>
-          <a:ln/>
-        </p:spPr>
-        <p:txBody>
-          <a:bodyPr wrap="square" lIns="0" tIns="0" rIns="0" bIns="0" rtlCol="0" anchor="b"/>
+          <p:cNvPr id="30" name="Text 28"/>
+          <p:cNvSpPr txBox="1"/>
+          <p:nvPr/>
+        </p:nvSpPr>
+        <p:spPr>
+          <a:xfrm>
+            <a:off x="969264" y="5330952"/>
+            <a:ext cx="2633472" cy="452628"/>
+          </a:xfrm>
+          <a:prstGeom prst="rect">
+            <a:avLst/>
+          </a:prstGeom>
+          <a:noFill/>
+          <a:ln/>
+        </p:spPr>
+        <p:txBody>
+          <a:bodyPr wrap="square" lIns="0" tIns="0" rIns="0" bIns="0" rtlCol="0" anchor="ctr"/>
           <a:lstStyle/>
           <a:p>
             <a:pPr algn="ctr" indent="0" marL="0">
@@ -8615,23 +9099,23 @@
       </p:sp>
       <p:sp>
         <p:nvSpPr>
-          <p:cNvPr id="29" name="Text 27"/>
-          <p:cNvSpPr txBox="1"/>
-          <p:nvPr/>
-        </p:nvSpPr>
-        <p:spPr>
-          <a:xfrm>
-            <a:off x="987552" y="5797296"/>
-            <a:ext cx="2596896" cy="288036"/>
-          </a:xfrm>
-          <a:prstGeom prst="rect">
-            <a:avLst/>
-          </a:prstGeom>
-          <a:noFill/>
-          <a:ln/>
-        </p:spPr>
-        <p:txBody>
-          <a:bodyPr wrap="square" lIns="0" tIns="0" rIns="0" bIns="0" rtlCol="0" anchor="t"/>
+          <p:cNvPr id="31" name="Text 29"/>
+          <p:cNvSpPr txBox="1"/>
+          <p:nvPr/>
+        </p:nvSpPr>
+        <p:spPr>
+          <a:xfrm>
+            <a:off x="969264" y="5710428"/>
+            <a:ext cx="2633472" cy="312725"/>
+          </a:xfrm>
+          <a:prstGeom prst="rect">
+            <a:avLst/>
+          </a:prstGeom>
+          <a:noFill/>
+          <a:ln/>
+        </p:spPr>
+        <p:txBody>
+          <a:bodyPr wrap="square" lIns="0" tIns="0" rIns="0" bIns="0" rtlCol="0" anchor="ctr"/>
           <a:lstStyle/>
           <a:p>
             <a:pPr algn="ctr" indent="0" marL="0">
@@ -8654,18 +9138,18 @@
       </p:sp>
       <p:sp>
         <p:nvSpPr>
-          <p:cNvPr id="30" name="Shape 28"/>
+          <p:cNvPr id="32" name="Shape 30"/>
           <p:cNvSpPr/>
           <p:nvPr/>
         </p:nvSpPr>
         <p:spPr>
           <a:xfrm>
-            <a:off x="3931920" y="5303520"/>
+            <a:off x="3931920" y="5257800"/>
             <a:ext cx="2743200" cy="822960"/>
           </a:xfrm>
           <a:prstGeom prst="roundRect">
             <a:avLst>
-              <a:gd name="adj" fmla="val 8889"/>
+              <a:gd name="adj" fmla="val 6667"/>
             </a:avLst>
           </a:prstGeom>
           <a:solidFill>
@@ -8681,23 +9165,23 @@
       </p:sp>
       <p:sp>
         <p:nvSpPr>
-          <p:cNvPr id="31" name="Text 29"/>
-          <p:cNvSpPr txBox="1"/>
-          <p:nvPr/>
-        </p:nvSpPr>
-        <p:spPr>
-          <a:xfrm>
-            <a:off x="4005072" y="5394960"/>
-            <a:ext cx="2596896" cy="452628"/>
-          </a:xfrm>
-          <a:prstGeom prst="rect">
-            <a:avLst/>
-          </a:prstGeom>
-          <a:noFill/>
-          <a:ln/>
-        </p:spPr>
-        <p:txBody>
-          <a:bodyPr wrap="square" lIns="0" tIns="0" rIns="0" bIns="0" rtlCol="0" anchor="b"/>
+          <p:cNvPr id="33" name="Text 31"/>
+          <p:cNvSpPr txBox="1"/>
+          <p:nvPr/>
+        </p:nvSpPr>
+        <p:spPr>
+          <a:xfrm>
+            <a:off x="3986784" y="5330952"/>
+            <a:ext cx="2633472" cy="452628"/>
+          </a:xfrm>
+          <a:prstGeom prst="rect">
+            <a:avLst/>
+          </a:prstGeom>
+          <a:noFill/>
+          <a:ln/>
+        </p:spPr>
+        <p:txBody>
+          <a:bodyPr wrap="square" lIns="0" tIns="0" rIns="0" bIns="0" rtlCol="0" anchor="ctr"/>
           <a:lstStyle/>
           <a:p>
             <a:pPr algn="ctr" indent="0" marL="0">
@@ -8720,23 +9204,23 @@
       </p:sp>
       <p:sp>
         <p:nvSpPr>
-          <p:cNvPr id="32" name="Text 30"/>
-          <p:cNvSpPr txBox="1"/>
-          <p:nvPr/>
-        </p:nvSpPr>
-        <p:spPr>
-          <a:xfrm>
-            <a:off x="4005072" y="5797296"/>
-            <a:ext cx="2596896" cy="288036"/>
-          </a:xfrm>
-          <a:prstGeom prst="rect">
-            <a:avLst/>
-          </a:prstGeom>
-          <a:noFill/>
-          <a:ln/>
-        </p:spPr>
-        <p:txBody>
-          <a:bodyPr wrap="square" lIns="0" tIns="0" rIns="0" bIns="0" rtlCol="0" anchor="t"/>
+          <p:cNvPr id="34" name="Text 32"/>
+          <p:cNvSpPr txBox="1"/>
+          <p:nvPr/>
+        </p:nvSpPr>
+        <p:spPr>
+          <a:xfrm>
+            <a:off x="3986784" y="5710428"/>
+            <a:ext cx="2633472" cy="312725"/>
+          </a:xfrm>
+          <a:prstGeom prst="rect">
+            <a:avLst/>
+          </a:prstGeom>
+          <a:noFill/>
+          <a:ln/>
+        </p:spPr>
+        <p:txBody>
+          <a:bodyPr wrap="square" lIns="0" tIns="0" rIns="0" bIns="0" rtlCol="0" anchor="ctr"/>
           <a:lstStyle/>
           <a:p>
             <a:pPr algn="ctr" indent="0" marL="0">
@@ -8759,18 +9243,18 @@
       </p:sp>
       <p:sp>
         <p:nvSpPr>
-          <p:cNvPr id="33" name="Shape 31"/>
+          <p:cNvPr id="35" name="Shape 33"/>
           <p:cNvSpPr/>
           <p:nvPr/>
         </p:nvSpPr>
         <p:spPr>
           <a:xfrm>
-            <a:off x="6949440" y="5303520"/>
+            <a:off x="6949440" y="5257800"/>
             <a:ext cx="4206240" cy="822960"/>
           </a:xfrm>
           <a:prstGeom prst="roundRect">
             <a:avLst>
-              <a:gd name="adj" fmla="val 8889"/>
+              <a:gd name="adj" fmla="val 6667"/>
             </a:avLst>
           </a:prstGeom>
           <a:solidFill>
@@ -8786,14 +9270,14 @@
       </p:sp>
       <p:sp>
         <p:nvSpPr>
-          <p:cNvPr id="34" name="Text 32"/>
-          <p:cNvSpPr txBox="1"/>
-          <p:nvPr/>
-        </p:nvSpPr>
-        <p:spPr>
-          <a:xfrm>
-            <a:off x="7022592" y="5440680"/>
-            <a:ext cx="4059936" cy="548640"/>
+          <p:cNvPr id="36" name="Text 34"/>
+          <p:cNvSpPr txBox="1"/>
+          <p:nvPr/>
+        </p:nvSpPr>
+        <p:spPr>
+          <a:xfrm>
+            <a:off x="7004304" y="5257800"/>
+            <a:ext cx="4096512" cy="822960"/>
           </a:xfrm>
           <a:prstGeom prst="rect">
             <a:avLst/>
@@ -8809,7 +9293,7 @@
               <a:buNone/>
             </a:pPr>
             <a:r>
-              <a:rPr lang="en-US" sz="1050" b="1" dirty="0">
+              <a:rPr lang="en-US" sz="1100" b="1" dirty="0">
                 <a:solidFill>
                   <a:srgbClr val="1E2761"/>
                 </a:solidFill>
@@ -8819,50 +9303,26 @@
               </a:rPr>
               <a:t>Secrets Manager → ESO → pod (IRSA)</a:t>
             </a:r>
-            <a:endParaRPr lang="en-US" sz="1050" dirty="0"/>
-          </a:p>
-        </p:txBody>
-      </p:sp>
-      <p:sp>
-        <p:nvSpPr>
-          <p:cNvPr id="35" name="Shape 33"/>
+            <a:endParaRPr lang="en-US" sz="1100" dirty="0"/>
+          </a:p>
+        </p:txBody>
+      </p:sp>
+      <p:sp>
+        <p:nvSpPr>
+          <p:cNvPr id="37" name="Shape 35"/>
           <p:cNvSpPr/>
           <p:nvPr/>
         </p:nvSpPr>
         <p:spPr>
           <a:xfrm>
-            <a:off x="4023360" y="2971800"/>
-            <a:ext cx="9144" cy="320040"/>
+            <a:off x="2194560" y="4480560"/>
+            <a:ext cx="0" cy="365760"/>
           </a:xfrm>
           <a:prstGeom prst="line">
             <a:avLst/>
           </a:prstGeom>
           <a:noFill/>
-          <a:ln w="25400">
-            <a:solidFill>
-              <a:srgbClr val="3B6EA5"/>
-            </a:solidFill>
-            <a:prstDash val="solid"/>
-            <a:tailEnd type="triangle"/>
-          </a:ln>
-        </p:spPr>
-      </p:sp>
-      <p:sp>
-        <p:nvSpPr>
-          <p:cNvPr id="36" name="Shape 34"/>
-          <p:cNvSpPr/>
-          <p:nvPr/>
-        </p:nvSpPr>
-        <p:spPr>
-          <a:xfrm>
-            <a:off x="2194560" y="4526280"/>
-            <a:ext cx="9144" cy="365760"/>
-          </a:xfrm>
-          <a:prstGeom prst="line">
-            <a:avLst/>
-          </a:prstGeom>
-          <a:noFill/>
-          <a:ln w="25400">
+          <a:ln w="19050">
             <a:solidFill>
               <a:srgbClr val="2F9E6E"/>
             </a:solidFill>
@@ -8873,20 +9333,20 @@
       </p:sp>
       <p:sp>
         <p:nvSpPr>
-          <p:cNvPr id="37" name="Shape 35"/>
+          <p:cNvPr id="38" name="Shape 36"/>
           <p:cNvSpPr/>
           <p:nvPr/>
         </p:nvSpPr>
         <p:spPr>
           <a:xfrm>
-            <a:off x="4937760" y="4526280"/>
-            <a:ext cx="9144" cy="365760"/>
+            <a:off x="4937760" y="4480560"/>
+            <a:ext cx="0" cy="365760"/>
           </a:xfrm>
           <a:prstGeom prst="line">
             <a:avLst/>
           </a:prstGeom>
           <a:noFill/>
-          <a:ln w="25400">
+          <a:ln w="19050">
             <a:solidFill>
               <a:srgbClr val="2F9E6E"/>
             </a:solidFill>
@@ -8897,13 +9357,13 @@
       </p:sp>
       <p:sp>
         <p:nvSpPr>
-          <p:cNvPr id="38" name="Text 36"/>
-          <p:cNvSpPr txBox="1"/>
-          <p:nvPr/>
-        </p:nvSpPr>
-        <p:spPr>
-          <a:xfrm>
-            <a:off x="11365992" y="6400800"/>
+          <p:cNvPr id="39" name="Text 37"/>
+          <p:cNvSpPr txBox="1"/>
+          <p:nvPr/>
+        </p:nvSpPr>
+        <p:spPr>
+          <a:xfrm>
+            <a:off x="11365992" y="6510528"/>
             <a:ext cx="457200" cy="274320"/>
           </a:xfrm>
           <a:prstGeom prst="rect">
@@ -8916,7 +9376,7 @@
           <a:bodyPr wrap="square" lIns="0" tIns="0" rIns="0" bIns="0" rtlCol="0" anchor="ctr"/>
           <a:lstStyle/>
           <a:p>
-            <a:pPr algn="r" indent="0" marL="0">
+            <a:pPr indent="0" marL="0">
               <a:buNone/>
             </a:pPr>
             <a:r>
@@ -8945,13 +9405,6 @@
 <file path=ppt/slides/slide6.xml><?xml version="1.0" encoding="utf-8"?>
 <p:sld xmlns:a="http://schemas.openxmlformats.org/drawingml/2006/main" xmlns:r="http://schemas.openxmlformats.org/officeDocument/2006/relationships" xmlns:p="http://schemas.openxmlformats.org/presentationml/2006/main">
   <p:cSld name="Slide 6">
-    <p:bg>
-      <p:bgPr>
-        <a:solidFill>
-          <a:srgbClr val="FFFFFF"/>
-        </a:solidFill>
-      </p:bgPr>
-    </p:bg>
     <p:spTree>
       <p:nvGrpSpPr>
         <p:cNvPr id="1" name=""/>
@@ -9053,11 +9506,11 @@
         <p:spPr>
           <a:xfrm>
             <a:off x="640080" y="1783080"/>
-            <a:ext cx="5120640" cy="4023360"/>
+            <a:ext cx="5120640" cy="3977640"/>
           </a:xfrm>
           <a:prstGeom prst="roundRect">
             <a:avLst>
-              <a:gd name="adj" fmla="val 1818"/>
+              <a:gd name="adj" fmla="val 1839"/>
             </a:avLst>
           </a:prstGeom>
           <a:solidFill>
@@ -9079,20 +9532,20 @@
         </p:nvSpPr>
         <p:spPr>
           <a:xfrm>
-            <a:off x="713232" y="1837944"/>
-            <a:ext cx="4974336" cy="548640"/>
-          </a:xfrm>
-          <a:prstGeom prst="rect">
-            <a:avLst/>
-          </a:prstGeom>
-          <a:noFill/>
-          <a:ln/>
-        </p:spPr>
-        <p:txBody>
-          <a:bodyPr wrap="square" lIns="0" tIns="0" rIns="0" bIns="0" rtlCol="0" anchor="ctr"/>
-          <a:lstStyle/>
-          <a:p>
-            <a:pPr algn="ctr" indent="0" marL="0">
+            <a:off x="713232" y="1828800"/>
+            <a:ext cx="4974336" cy="365760"/>
+          </a:xfrm>
+          <a:prstGeom prst="rect">
+            <a:avLst/>
+          </a:prstGeom>
+          <a:noFill/>
+          <a:ln/>
+        </p:spPr>
+        <p:txBody>
+          <a:bodyPr wrap="square" lIns="0" tIns="0" rIns="0" bIns="0" rtlCol="0" anchor="ctr"/>
+          <a:lstStyle/>
+          <a:p>
+            <a:pPr indent="0" marL="0">
               <a:buNone/>
             </a:pPr>
             <a:r>
@@ -9123,7 +9576,7 @@
           </a:xfrm>
           <a:prstGeom prst="roundRect">
             <a:avLst>
-              <a:gd name="adj" fmla="val 8000"/>
+              <a:gd name="adj" fmla="val 6000"/>
             </a:avLst>
           </a:prstGeom>
           <a:solidFill>
@@ -9145,8 +9598,8 @@
         </p:nvSpPr>
         <p:spPr>
           <a:xfrm>
-            <a:off x="941832" y="2468880"/>
-            <a:ext cx="4517136" cy="548640"/>
+            <a:off x="941832" y="2286000"/>
+            <a:ext cx="4517136" cy="914400"/>
           </a:xfrm>
           <a:prstGeom prst="rect">
             <a:avLst/>
@@ -9189,7 +9642,7 @@
           </a:xfrm>
           <a:prstGeom prst="roundRect">
             <a:avLst>
-              <a:gd name="adj" fmla="val 8000"/>
+              <a:gd name="adj" fmla="val 6000"/>
             </a:avLst>
           </a:prstGeom>
           <a:solidFill>
@@ -9211,8 +9664,8 @@
         </p:nvSpPr>
         <p:spPr>
           <a:xfrm>
-            <a:off x="941832" y="3566160"/>
-            <a:ext cx="4517136" cy="548640"/>
+            <a:off x="941832" y="3383280"/>
+            <a:ext cx="4517136" cy="914400"/>
           </a:xfrm>
           <a:prstGeom prst="rect">
             <a:avLst/>
@@ -9255,7 +9708,7 @@
           </a:xfrm>
           <a:prstGeom prst="roundRect">
             <a:avLst>
-              <a:gd name="adj" fmla="val 8000"/>
+              <a:gd name="adj" fmla="val 6000"/>
             </a:avLst>
           </a:prstGeom>
           <a:solidFill>
@@ -9277,8 +9730,8 @@
         </p:nvSpPr>
         <p:spPr>
           <a:xfrm>
-            <a:off x="941832" y="4663440"/>
-            <a:ext cx="4517136" cy="548640"/>
+            <a:off x="941832" y="4480560"/>
+            <a:ext cx="4517136" cy="914400"/>
           </a:xfrm>
           <a:prstGeom prst="rect">
             <a:avLst/>
@@ -9317,11 +9770,11 @@
         <p:spPr>
           <a:xfrm>
             <a:off x="6035040" y="1783080"/>
-            <a:ext cx="5120640" cy="4023360"/>
+            <a:ext cx="5120640" cy="3977640"/>
           </a:xfrm>
           <a:prstGeom prst="roundRect">
             <a:avLst>
-              <a:gd name="adj" fmla="val 1818"/>
+              <a:gd name="adj" fmla="val 1839"/>
             </a:avLst>
           </a:prstGeom>
           <a:solidFill>
@@ -9343,20 +9796,20 @@
         </p:nvSpPr>
         <p:spPr>
           <a:xfrm>
-            <a:off x="6108192" y="1837944"/>
-            <a:ext cx="4974336" cy="548640"/>
-          </a:xfrm>
-          <a:prstGeom prst="rect">
-            <a:avLst/>
-          </a:prstGeom>
-          <a:noFill/>
-          <a:ln/>
-        </p:spPr>
-        <p:txBody>
-          <a:bodyPr wrap="square" lIns="0" tIns="0" rIns="0" bIns="0" rtlCol="0" anchor="ctr"/>
-          <a:lstStyle/>
-          <a:p>
-            <a:pPr algn="ctr" indent="0" marL="0">
+            <a:off x="6108192" y="1828800"/>
+            <a:ext cx="4974336" cy="365760"/>
+          </a:xfrm>
+          <a:prstGeom prst="rect">
+            <a:avLst/>
+          </a:prstGeom>
+          <a:noFill/>
+          <a:ln/>
+        </p:spPr>
+        <p:txBody>
+          <a:bodyPr wrap="square" lIns="0" tIns="0" rIns="0" bIns="0" rtlCol="0" anchor="ctr"/>
+          <a:lstStyle/>
+          <a:p>
+            <a:pPr indent="0" marL="0">
               <a:buNone/>
             </a:pPr>
             <a:r>
@@ -9387,7 +9840,7 @@
           </a:xfrm>
           <a:prstGeom prst="roundRect">
             <a:avLst>
-              <a:gd name="adj" fmla="val 8000"/>
+              <a:gd name="adj" fmla="val 6000"/>
             </a:avLst>
           </a:prstGeom>
           <a:solidFill>
@@ -9409,8 +9862,8 @@
         </p:nvSpPr>
         <p:spPr>
           <a:xfrm>
-            <a:off x="6336792" y="2468880"/>
-            <a:ext cx="4517136" cy="548640"/>
+            <a:off x="6336792" y="2286000"/>
+            <a:ext cx="4517136" cy="914400"/>
           </a:xfrm>
           <a:prstGeom prst="rect">
             <a:avLst/>
@@ -9453,7 +9906,7 @@
           </a:xfrm>
           <a:prstGeom prst="roundRect">
             <a:avLst>
-              <a:gd name="adj" fmla="val 8000"/>
+              <a:gd name="adj" fmla="val 6000"/>
             </a:avLst>
           </a:prstGeom>
           <a:solidFill>
@@ -9475,8 +9928,8 @@
         </p:nvSpPr>
         <p:spPr>
           <a:xfrm>
-            <a:off x="6336792" y="3566160"/>
-            <a:ext cx="4517136" cy="548640"/>
+            <a:off x="6336792" y="3383280"/>
+            <a:ext cx="4517136" cy="914400"/>
           </a:xfrm>
           <a:prstGeom prst="rect">
             <a:avLst/>
@@ -9519,7 +9972,7 @@
           </a:xfrm>
           <a:prstGeom prst="roundRect">
             <a:avLst>
-              <a:gd name="adj" fmla="val 8000"/>
+              <a:gd name="adj" fmla="val 6000"/>
             </a:avLst>
           </a:prstGeom>
           <a:solidFill>
@@ -9541,8 +9994,8 @@
         </p:nvSpPr>
         <p:spPr>
           <a:xfrm>
-            <a:off x="6336792" y="4663440"/>
-            <a:ext cx="4517136" cy="548640"/>
+            <a:off x="6336792" y="4480560"/>
+            <a:ext cx="4517136" cy="914400"/>
           </a:xfrm>
           <a:prstGeom prst="rect">
             <a:avLst/>
@@ -9580,12 +10033,12 @@
         </p:nvSpPr>
         <p:spPr>
           <a:xfrm>
-            <a:off x="640080" y="6035040"/>
-            <a:ext cx="10789920" cy="640080"/>
+            <a:off x="640080" y="5989320"/>
+            <a:ext cx="10515600" cy="621792"/>
           </a:xfrm>
           <a:prstGeom prst="roundRect">
             <a:avLst>
-              <a:gd name="adj" fmla="val 11429"/>
+              <a:gd name="adj" fmla="val 11765"/>
             </a:avLst>
           </a:prstGeom>
           <a:solidFill>
@@ -9602,8 +10055,8 @@
         </p:nvSpPr>
         <p:spPr>
           <a:xfrm>
-            <a:off x="713232" y="6080760"/>
-            <a:ext cx="10643616" cy="548640"/>
+            <a:off x="731520" y="5989320"/>
+            <a:ext cx="10332720" cy="621792"/>
           </a:xfrm>
           <a:prstGeom prst="rect">
             <a:avLst/>
@@ -9641,7 +10094,7 @@
         </p:nvSpPr>
         <p:spPr>
           <a:xfrm>
-            <a:off x="11365992" y="6400800"/>
+            <a:off x="11365992" y="6510528"/>
             <a:ext cx="457200" cy="274320"/>
           </a:xfrm>
           <a:prstGeom prst="rect">
@@ -9654,7 +10107,7 @@
           <a:bodyPr wrap="square" lIns="0" tIns="0" rIns="0" bIns="0" rtlCol="0" anchor="ctr"/>
           <a:lstStyle/>
           <a:p>
-            <a:pPr algn="r" indent="0" marL="0">
+            <a:pPr indent="0" marL="0">
               <a:buNone/>
             </a:pPr>
             <a:r>
@@ -9683,13 +10136,6 @@
 <file path=ppt/slides/slide7.xml><?xml version="1.0" encoding="utf-8"?>
 <p:sld xmlns:a="http://schemas.openxmlformats.org/drawingml/2006/main" xmlns:r="http://schemas.openxmlformats.org/officeDocument/2006/relationships" xmlns:p="http://schemas.openxmlformats.org/presentationml/2006/main">
   <p:cSld name="Slide 7">
-    <p:bg>
-      <p:bgPr>
-        <a:solidFill>
-          <a:srgbClr val="FFFFFF"/>
-        </a:solidFill>
-      </p:bgPr>
-    </p:bg>
     <p:spTree>
       <p:nvGrpSpPr>
         <p:cNvPr id="1" name=""/>
@@ -9812,8 +10258,8 @@
         </p:nvSpPr>
         <p:spPr>
           <a:xfrm>
-            <a:off x="621792" y="2103120"/>
-            <a:ext cx="10003536" cy="548640"/>
+            <a:off x="640080" y="1920240"/>
+            <a:ext cx="9966960" cy="914400"/>
           </a:xfrm>
           <a:prstGeom prst="rect">
             <a:avLst/>
@@ -9845,88 +10291,30 @@
       </p:sp>
       <p:sp>
         <p:nvSpPr>
-          <p:cNvPr id="6" name="Text 4"/>
-          <p:cNvSpPr txBox="1"/>
-          <p:nvPr/>
-        </p:nvSpPr>
-        <p:spPr>
-          <a:xfrm>
-            <a:off x="548640" y="3108960"/>
-            <a:ext cx="10058400" cy="3840480"/>
-          </a:xfrm>
-          <a:prstGeom prst="rect">
-            <a:avLst/>
-          </a:prstGeom>
-          <a:noFill/>
-          <a:ln/>
-        </p:spPr>
-        <p:txBody>
-          <a:bodyPr wrap="square" lIns="0" tIns="0" rIns="0" bIns="0" rtlCol="0" anchor="t"/>
-          <a:lstStyle/>
-          <a:p>
-            <a:pPr marL="228600" indent="-228600">
-              <a:spcAft>
-                <a:spcPts val="1000"/>
-              </a:spcAft>
-              <a:buSzPct val="100000"/>
-              <a:buChar char="●"/>
-            </a:pPr>
-            <a:r>
-              <a:rPr lang="en-US" sz="1600" dirty="0">
-                <a:solidFill>
-                  <a:srgbClr val="24304A"/>
-                </a:solidFill>
-                <a:latin typeface="Calibri" pitchFamily="34" charset="0"/>
-                <a:ea typeface="Calibri" pitchFamily="34" charset="-122"/>
-                <a:cs typeface="Calibri" pitchFamily="34" charset="-120"/>
-              </a:rPr>
-              <a:t>Fixed, predictable EC2 capacity — fits a $300 budget cleanly</a:t>
-            </a:r>
-            <a:endParaRPr lang="en-US" sz="1600" dirty="0"/>
-          </a:p>
-          <a:p>
-            <a:pPr marL="228600" indent="-228600">
-              <a:spcAft>
-                <a:spcPts val="1000"/>
-              </a:spcAft>
-              <a:buSzPct val="100000"/>
-              <a:buChar char="●"/>
-            </a:pPr>
-            <a:r>
-              <a:rPr lang="en-US" sz="1600" dirty="0">
-                <a:solidFill>
-                  <a:srgbClr val="24304A"/>
-                </a:solidFill>
-                <a:latin typeface="Calibri" pitchFamily="34" charset="0"/>
-                <a:ea typeface="Calibri" pitchFamily="34" charset="-122"/>
-                <a:cs typeface="Calibri" pitchFamily="34" charset="-120"/>
-              </a:rPr>
-              <a:t>Fargate and Karpenter both solve scaling problems this project doesn't have</a:t>
-            </a:r>
-            <a:endParaRPr lang="en-US" sz="1600" dirty="0"/>
-          </a:p>
-          <a:p>
-            <a:pPr marL="228600" indent="-228600">
-              <a:spcAft>
-                <a:spcPts val="1000"/>
-              </a:spcAft>
-              <a:buSzPct val="100000"/>
-              <a:buChar char="●"/>
-            </a:pPr>
-            <a:r>
-              <a:rPr lang="en-US" sz="1600" dirty="0">
-                <a:solidFill>
-                  <a:srgbClr val="24304A"/>
-                </a:solidFill>
-                <a:latin typeface="Calibri" pitchFamily="34" charset="0"/>
-                <a:ea typeface="Calibri" pitchFamily="34" charset="-122"/>
-                <a:cs typeface="Calibri" pitchFamily="34" charset="-120"/>
-              </a:rPr>
-              <a:t>Even on EKS, nodes stay our responsibility — “managed” only covers the control plane</a:t>
-            </a:r>
-            <a:endParaRPr lang="en-US" sz="1600" dirty="0"/>
-          </a:p>
-        </p:txBody>
+          <p:cNvPr id="6" name="Shape 4"/>
+          <p:cNvSpPr/>
+          <p:nvPr/>
+        </p:nvSpPr>
+        <p:spPr>
+          <a:xfrm>
+            <a:off x="548640" y="3154680"/>
+            <a:ext cx="10149840" cy="841248"/>
+          </a:xfrm>
+          <a:prstGeom prst="roundRect">
+            <a:avLst>
+              <a:gd name="adj" fmla="val 8696"/>
+            </a:avLst>
+          </a:prstGeom>
+          <a:solidFill>
+            <a:srgbClr val="FFFFFF"/>
+          </a:solidFill>
+          <a:ln w="12700">
+            <a:solidFill>
+              <a:srgbClr val="CADCFC"/>
+            </a:solidFill>
+            <a:prstDash val="solid"/>
+          </a:ln>
+        </p:spPr>
       </p:sp>
       <p:sp>
         <p:nvSpPr>
@@ -9936,7 +10324,295 @@
         </p:nvSpPr>
         <p:spPr>
           <a:xfrm>
-            <a:off x="11365992" y="6400800"/>
+            <a:off x="822960" y="3227832"/>
+            <a:ext cx="9509760" cy="347472"/>
+          </a:xfrm>
+          <a:prstGeom prst="rect">
+            <a:avLst/>
+          </a:prstGeom>
+          <a:noFill/>
+          <a:ln/>
+        </p:spPr>
+        <p:txBody>
+          <a:bodyPr wrap="square" lIns="0" tIns="0" rIns="0" bIns="0" rtlCol="0" anchor="ctr"/>
+          <a:lstStyle/>
+          <a:p>
+            <a:pPr indent="0" marL="0">
+              <a:buNone/>
+            </a:pPr>
+            <a:r>
+              <a:rPr lang="en-US" sz="1500" b="1" dirty="0">
+                <a:solidFill>
+                  <a:srgbClr val="1E2761"/>
+                </a:solidFill>
+                <a:latin typeface="Cambria" pitchFamily="34" charset="0"/>
+                <a:ea typeface="Cambria" pitchFamily="34" charset="-122"/>
+                <a:cs typeface="Cambria" pitchFamily="34" charset="-120"/>
+              </a:rPr>
+              <a:t>Fixed, predictable capacity</a:t>
+            </a:r>
+            <a:endParaRPr lang="en-US" sz="1500" dirty="0"/>
+          </a:p>
+        </p:txBody>
+      </p:sp>
+      <p:sp>
+        <p:nvSpPr>
+          <p:cNvPr id="8" name="Text 6"/>
+          <p:cNvSpPr txBox="1"/>
+          <p:nvPr/>
+        </p:nvSpPr>
+        <p:spPr>
+          <a:xfrm>
+            <a:off x="822960" y="3593592"/>
+            <a:ext cx="9509760" cy="329184"/>
+          </a:xfrm>
+          <a:prstGeom prst="rect">
+            <a:avLst/>
+          </a:prstGeom>
+          <a:noFill/>
+          <a:ln/>
+        </p:spPr>
+        <p:txBody>
+          <a:bodyPr wrap="square" lIns="0" tIns="0" rIns="0" bIns="0" rtlCol="0" anchor="ctr"/>
+          <a:lstStyle/>
+          <a:p>
+            <a:pPr indent="0" marL="0">
+              <a:buNone/>
+            </a:pPr>
+            <a:r>
+              <a:rPr lang="en-US" sz="1250" dirty="0">
+                <a:solidFill>
+                  <a:srgbClr val="5B6B8C"/>
+                </a:solidFill>
+                <a:latin typeface="Calibri" pitchFamily="34" charset="0"/>
+                <a:ea typeface="Calibri" pitchFamily="34" charset="-122"/>
+                <a:cs typeface="Calibri" pitchFamily="34" charset="-120"/>
+              </a:rPr>
+              <a:t>A known EC2 bill fits a $300 budget cleanly</a:t>
+            </a:r>
+            <a:endParaRPr lang="en-US" sz="1250" dirty="0"/>
+          </a:p>
+        </p:txBody>
+      </p:sp>
+      <p:sp>
+        <p:nvSpPr>
+          <p:cNvPr id="9" name="Shape 7"/>
+          <p:cNvSpPr/>
+          <p:nvPr/>
+        </p:nvSpPr>
+        <p:spPr>
+          <a:xfrm>
+            <a:off x="548640" y="4142232"/>
+            <a:ext cx="10149840" cy="841248"/>
+          </a:xfrm>
+          <a:prstGeom prst="roundRect">
+            <a:avLst>
+              <a:gd name="adj" fmla="val 8696"/>
+            </a:avLst>
+          </a:prstGeom>
+          <a:solidFill>
+            <a:srgbClr val="FFFFFF"/>
+          </a:solidFill>
+          <a:ln w="12700">
+            <a:solidFill>
+              <a:srgbClr val="CADCFC"/>
+            </a:solidFill>
+            <a:prstDash val="solid"/>
+          </a:ln>
+        </p:spPr>
+      </p:sp>
+      <p:sp>
+        <p:nvSpPr>
+          <p:cNvPr id="10" name="Text 8"/>
+          <p:cNvSpPr txBox="1"/>
+          <p:nvPr/>
+        </p:nvSpPr>
+        <p:spPr>
+          <a:xfrm>
+            <a:off x="822960" y="4215384"/>
+            <a:ext cx="9509760" cy="347472"/>
+          </a:xfrm>
+          <a:prstGeom prst="rect">
+            <a:avLst/>
+          </a:prstGeom>
+          <a:noFill/>
+          <a:ln/>
+        </p:spPr>
+        <p:txBody>
+          <a:bodyPr wrap="square" lIns="0" tIns="0" rIns="0" bIns="0" rtlCol="0" anchor="ctr"/>
+          <a:lstStyle/>
+          <a:p>
+            <a:pPr indent="0" marL="0">
+              <a:buNone/>
+            </a:pPr>
+            <a:r>
+              <a:rPr lang="en-US" sz="1500" b="1" dirty="0">
+                <a:solidFill>
+                  <a:srgbClr val="1E2761"/>
+                </a:solidFill>
+                <a:latin typeface="Cambria" pitchFamily="34" charset="0"/>
+                <a:ea typeface="Cambria" pitchFamily="34" charset="-122"/>
+                <a:cs typeface="Cambria" pitchFamily="34" charset="-120"/>
+              </a:rPr>
+              <a:t>Fargate and Karpenter solve a problem we don't have</a:t>
+            </a:r>
+            <a:endParaRPr lang="en-US" sz="1500" dirty="0"/>
+          </a:p>
+        </p:txBody>
+      </p:sp>
+      <p:sp>
+        <p:nvSpPr>
+          <p:cNvPr id="11" name="Text 9"/>
+          <p:cNvSpPr txBox="1"/>
+          <p:nvPr/>
+        </p:nvSpPr>
+        <p:spPr>
+          <a:xfrm>
+            <a:off x="822960" y="4581144"/>
+            <a:ext cx="9509760" cy="329184"/>
+          </a:xfrm>
+          <a:prstGeom prst="rect">
+            <a:avLst/>
+          </a:prstGeom>
+          <a:noFill/>
+          <a:ln/>
+        </p:spPr>
+        <p:txBody>
+          <a:bodyPr wrap="square" lIns="0" tIns="0" rIns="0" bIns="0" rtlCol="0" anchor="ctr"/>
+          <a:lstStyle/>
+          <a:p>
+            <a:pPr indent="0" marL="0">
+              <a:buNone/>
+            </a:pPr>
+            <a:r>
+              <a:rPr lang="en-US" sz="1250" dirty="0">
+                <a:solidFill>
+                  <a:srgbClr val="5B6B8C"/>
+                </a:solidFill>
+                <a:latin typeface="Calibri" pitchFamily="34" charset="0"/>
+                <a:ea typeface="Calibri" pitchFamily="34" charset="-122"/>
+                <a:cs typeface="Calibri" pitchFamily="34" charset="-120"/>
+              </a:rPr>
+              <a:t>Both are answers to scale volatility this project never sees</a:t>
+            </a:r>
+            <a:endParaRPr lang="en-US" sz="1250" dirty="0"/>
+          </a:p>
+        </p:txBody>
+      </p:sp>
+      <p:sp>
+        <p:nvSpPr>
+          <p:cNvPr id="12" name="Shape 10"/>
+          <p:cNvSpPr/>
+          <p:nvPr/>
+        </p:nvSpPr>
+        <p:spPr>
+          <a:xfrm>
+            <a:off x="548640" y="5129784"/>
+            <a:ext cx="10149840" cy="841248"/>
+          </a:xfrm>
+          <a:prstGeom prst="roundRect">
+            <a:avLst>
+              <a:gd name="adj" fmla="val 8696"/>
+            </a:avLst>
+          </a:prstGeom>
+          <a:solidFill>
+            <a:srgbClr val="FFFFFF"/>
+          </a:solidFill>
+          <a:ln w="12700">
+            <a:solidFill>
+              <a:srgbClr val="CADCFC"/>
+            </a:solidFill>
+            <a:prstDash val="solid"/>
+          </a:ln>
+        </p:spPr>
+      </p:sp>
+      <p:sp>
+        <p:nvSpPr>
+          <p:cNvPr id="13" name="Text 11"/>
+          <p:cNvSpPr txBox="1"/>
+          <p:nvPr/>
+        </p:nvSpPr>
+        <p:spPr>
+          <a:xfrm>
+            <a:off x="822960" y="5202936"/>
+            <a:ext cx="9509760" cy="347472"/>
+          </a:xfrm>
+          <a:prstGeom prst="rect">
+            <a:avLst/>
+          </a:prstGeom>
+          <a:noFill/>
+          <a:ln/>
+        </p:spPr>
+        <p:txBody>
+          <a:bodyPr wrap="square" lIns="0" tIns="0" rIns="0" bIns="0" rtlCol="0" anchor="ctr"/>
+          <a:lstStyle/>
+          <a:p>
+            <a:pPr indent="0" marL="0">
+              <a:buNone/>
+            </a:pPr>
+            <a:r>
+              <a:rPr lang="en-US" sz="1500" b="1" dirty="0">
+                <a:solidFill>
+                  <a:srgbClr val="1E2761"/>
+                </a:solidFill>
+                <a:latin typeface="Cambria" pitchFamily="34" charset="0"/>
+                <a:ea typeface="Cambria" pitchFamily="34" charset="-122"/>
+                <a:cs typeface="Cambria" pitchFamily="34" charset="-120"/>
+              </a:rPr>
+              <a:t>Nodes are still ours</a:t>
+            </a:r>
+            <a:endParaRPr lang="en-US" sz="1500" dirty="0"/>
+          </a:p>
+        </p:txBody>
+      </p:sp>
+      <p:sp>
+        <p:nvSpPr>
+          <p:cNvPr id="14" name="Text 12"/>
+          <p:cNvSpPr txBox="1"/>
+          <p:nvPr/>
+        </p:nvSpPr>
+        <p:spPr>
+          <a:xfrm>
+            <a:off x="822960" y="5568696"/>
+            <a:ext cx="9509760" cy="329184"/>
+          </a:xfrm>
+          <a:prstGeom prst="rect">
+            <a:avLst/>
+          </a:prstGeom>
+          <a:noFill/>
+          <a:ln/>
+        </p:spPr>
+        <p:txBody>
+          <a:bodyPr wrap="square" lIns="0" tIns="0" rIns="0" bIns="0" rtlCol="0" anchor="ctr"/>
+          <a:lstStyle/>
+          <a:p>
+            <a:pPr indent="0" marL="0">
+              <a:buNone/>
+            </a:pPr>
+            <a:r>
+              <a:rPr lang="en-US" sz="1250" dirty="0">
+                <a:solidFill>
+                  <a:srgbClr val="5B6B8C"/>
+                </a:solidFill>
+                <a:latin typeface="Calibri" pitchFamily="34" charset="0"/>
+                <a:ea typeface="Calibri" pitchFamily="34" charset="-122"/>
+                <a:cs typeface="Calibri" pitchFamily="34" charset="-120"/>
+              </a:rPr>
+              <a:t>“Managed” on EKS covers the control plane, not the workers</a:t>
+            </a:r>
+            <a:endParaRPr lang="en-US" sz="1250" dirty="0"/>
+          </a:p>
+        </p:txBody>
+      </p:sp>
+      <p:sp>
+        <p:nvSpPr>
+          <p:cNvPr id="15" name="Text 13"/>
+          <p:cNvSpPr txBox="1"/>
+          <p:nvPr/>
+        </p:nvSpPr>
+        <p:spPr>
+          <a:xfrm>
+            <a:off x="11365992" y="6510528"/>
             <a:ext cx="457200" cy="274320"/>
           </a:xfrm>
           <a:prstGeom prst="rect">
@@ -9949,7 +10625,7 @@
           <a:bodyPr wrap="square" lIns="0" tIns="0" rIns="0" bIns="0" rtlCol="0" anchor="ctr"/>
           <a:lstStyle/>
           <a:p>
-            <a:pPr algn="r" indent="0" marL="0">
+            <a:pPr indent="0" marL="0">
               <a:buNone/>
             </a:pPr>
             <a:r>
@@ -9978,13 +10654,6 @@
 <file path=ppt/slides/slide8.xml><?xml version="1.0" encoding="utf-8"?>
 <p:sld xmlns:a="http://schemas.openxmlformats.org/drawingml/2006/main" xmlns:r="http://schemas.openxmlformats.org/officeDocument/2006/relationships" xmlns:p="http://schemas.openxmlformats.org/presentationml/2006/main">
   <p:cSld name="Slide 8">
-    <p:bg>
-      <p:bgPr>
-        <a:solidFill>
-          <a:srgbClr val="FFFFFF"/>
-        </a:solidFill>
-      </p:bgPr>
-    </p:bg>
     <p:spTree>
       <p:nvGrpSpPr>
         <p:cNvPr id="1" name=""/>
@@ -10086,11 +10755,11 @@
         <p:spPr>
           <a:xfrm>
             <a:off x="548640" y="1920240"/>
-            <a:ext cx="5029200" cy="3200400"/>
+            <a:ext cx="5029200" cy="3108960"/>
           </a:xfrm>
           <a:prstGeom prst="roundRect">
             <a:avLst>
-              <a:gd name="adj" fmla="val 2286"/>
+              <a:gd name="adj" fmla="val 2353"/>
             </a:avLst>
           </a:prstGeom>
           <a:solidFill>
@@ -10102,13 +10771,6 @@
             </a:solidFill>
             <a:prstDash val="solid"/>
           </a:ln>
-          <a:effectLst>
-            <a:outerShdw sx="100000" sy="100000" kx="0" ky="0" algn="bl" rotWithShape="0" blurRad="101600" dist="38100" dir="5400000">
-              <a:srgbClr val="1E2761">
-                <a:alpha val="15000"/>
-              </a:srgbClr>
-            </a:outerShdw>
-          </a:effectLst>
         </p:spPr>
       </p:sp>
       <p:sp>
@@ -10119,8 +10781,8 @@
         </p:nvSpPr>
         <p:spPr>
           <a:xfrm>
-            <a:off x="822960" y="2148840"/>
-            <a:ext cx="4572000" cy="457200"/>
+            <a:off x="822960" y="2194560"/>
+            <a:ext cx="4480560" cy="457200"/>
           </a:xfrm>
           <a:prstGeom prst="rect">
             <a:avLst/>
@@ -10158,8 +10820,8 @@
         </p:nvSpPr>
         <p:spPr>
           <a:xfrm>
-            <a:off x="822960" y="2743200"/>
-            <a:ext cx="4389120" cy="3840480"/>
+            <a:off x="822960" y="2880360"/>
+            <a:ext cx="4480560" cy="2011680"/>
           </a:xfrm>
           <a:prstGeom prst="rect">
             <a:avLst/>
@@ -10171,15 +10833,15 @@
           <a:bodyPr wrap="square" lIns="0" tIns="0" rIns="0" bIns="0" rtlCol="0" anchor="t"/>
           <a:lstStyle/>
           <a:p>
-            <a:pPr marL="228600" indent="-228600">
+            <a:pPr marL="342900" indent="-342900">
               <a:spcAft>
-                <a:spcPts val="800"/>
+                <a:spcPts val="1000"/>
               </a:spcAft>
               <a:buSzPct val="100000"/>
-              <a:buChar char="●"/>
-            </a:pPr>
-            <a:r>
-              <a:rPr lang="en-US" sz="1300" dirty="0">
+              <a:buChar char="•"/>
+            </a:pPr>
+            <a:r>
+              <a:rPr lang="en-US" sz="1350" dirty="0">
                 <a:solidFill>
                   <a:srgbClr val="24304A"/>
                 </a:solidFill>
@@ -10189,18 +10851,18 @@
               </a:rPr>
               <a:t>Multi-AZ, automatic failover</a:t>
             </a:r>
-            <a:endParaRPr lang="en-US" sz="1300" dirty="0"/>
-          </a:p>
-          <a:p>
-            <a:pPr marL="228600" indent="-228600">
+            <a:endParaRPr lang="en-US" sz="1350" dirty="0"/>
+          </a:p>
+          <a:p>
+            <a:pPr marL="342900" indent="-342900">
               <a:spcAft>
-                <a:spcPts val="800"/>
+                <a:spcPts val="1000"/>
               </a:spcAft>
               <a:buSzPct val="100000"/>
-              <a:buChar char="●"/>
-            </a:pPr>
-            <a:r>
-              <a:rPr lang="en-US" sz="1300" dirty="0">
+              <a:buChar char="•"/>
+            </a:pPr>
+            <a:r>
+              <a:rPr lang="en-US" sz="1350" dirty="0">
                 <a:solidFill>
                   <a:srgbClr val="24304A"/>
                 </a:solidFill>
@@ -10210,18 +10872,18 @@
               </a:rPr>
               <a:t>Survival is a mentor grading criterion</a:t>
             </a:r>
-            <a:endParaRPr lang="en-US" sz="1300" dirty="0"/>
-          </a:p>
-          <a:p>
-            <a:pPr marL="228600" indent="-228600">
+            <a:endParaRPr lang="en-US" sz="1350" dirty="0"/>
+          </a:p>
+          <a:p>
+            <a:pPr marL="342900" indent="-342900">
               <a:spcAft>
-                <a:spcPts val="800"/>
+                <a:spcPts val="1000"/>
               </a:spcAft>
               <a:buSzPct val="100000"/>
-              <a:buChar char="●"/>
-            </a:pPr>
-            <a:r>
-              <a:rPr lang="en-US" sz="1300" dirty="0">
+              <a:buChar char="•"/>
+            </a:pPr>
+            <a:r>
+              <a:rPr lang="en-US" sz="1350" dirty="0">
                 <a:solidFill>
                   <a:srgbClr val="24304A"/>
                 </a:solidFill>
@@ -10231,7 +10893,7 @@
               </a:rPr>
               <a:t>Master password auto-managed in Secrets Manager</a:t>
             </a:r>
-            <a:endParaRPr lang="en-US" sz="1300" dirty="0"/>
+            <a:endParaRPr lang="en-US" sz="1350" dirty="0"/>
           </a:p>
         </p:txBody>
       </p:sp>
@@ -10244,11 +10906,11 @@
         <p:spPr>
           <a:xfrm>
             <a:off x="5760720" y="1920240"/>
-            <a:ext cx="4937760" cy="3200400"/>
+            <a:ext cx="4937760" cy="3108960"/>
           </a:xfrm>
           <a:prstGeom prst="roundRect">
             <a:avLst>
-              <a:gd name="adj" fmla="val 2286"/>
+              <a:gd name="adj" fmla="val 2353"/>
             </a:avLst>
           </a:prstGeom>
           <a:solidFill>
@@ -10260,13 +10922,6 @@
             </a:solidFill>
             <a:prstDash val="solid"/>
           </a:ln>
-          <a:effectLst>
-            <a:outerShdw sx="100000" sy="100000" kx="0" ky="0" algn="bl" rotWithShape="0" blurRad="101600" dist="38100" dir="5400000">
-              <a:srgbClr val="1E2761">
-                <a:alpha val="15000"/>
-              </a:srgbClr>
-            </a:outerShdw>
-          </a:effectLst>
         </p:spPr>
       </p:sp>
       <p:sp>
@@ -10277,8 +10932,8 @@
         </p:nvSpPr>
         <p:spPr>
           <a:xfrm>
-            <a:off x="6035040" y="2148840"/>
-            <a:ext cx="4572000" cy="457200"/>
+            <a:off x="6035040" y="2194560"/>
+            <a:ext cx="4389120" cy="457200"/>
           </a:xfrm>
           <a:prstGeom prst="rect">
             <a:avLst/>
@@ -10316,8 +10971,8 @@
         </p:nvSpPr>
         <p:spPr>
           <a:xfrm>
-            <a:off x="6035040" y="2743200"/>
-            <a:ext cx="4480560" cy="3840480"/>
+            <a:off x="6035040" y="2880360"/>
+            <a:ext cx="4389120" cy="2011680"/>
           </a:xfrm>
           <a:prstGeom prst="rect">
             <a:avLst/>
@@ -10329,15 +10984,15 @@
           <a:bodyPr wrap="square" lIns="0" tIns="0" rIns="0" bIns="0" rtlCol="0" anchor="t"/>
           <a:lstStyle/>
           <a:p>
-            <a:pPr marL="228600" indent="-228600">
+            <a:pPr marL="342900" indent="-342900">
               <a:spcAft>
-                <a:spcPts val="800"/>
+                <a:spcPts val="1000"/>
               </a:spcAft>
               <a:buSzPct val="100000"/>
-              <a:buChar char="●"/>
-            </a:pPr>
-            <a:r>
-              <a:rPr lang="en-US" sz="1300" dirty="0">
+              <a:buChar char="•"/>
+            </a:pPr>
+            <a:r>
+              <a:rPr lang="en-US" sz="1350" dirty="0">
                 <a:solidFill>
                   <a:srgbClr val="24304A"/>
                 </a:solidFill>
@@ -10347,18 +11002,18 @@
               </a:rPr>
               <a:t>Multi-AZ replica, automatic failover</a:t>
             </a:r>
-            <a:endParaRPr lang="en-US" sz="1300" dirty="0"/>
-          </a:p>
-          <a:p>
-            <a:pPr marL="228600" indent="-228600">
+            <a:endParaRPr lang="en-US" sz="1350" dirty="0"/>
+          </a:p>
+          <a:p>
+            <a:pPr marL="342900" indent="-342900">
               <a:spcAft>
-                <a:spcPts val="800"/>
+                <a:spcPts val="1000"/>
               </a:spcAft>
               <a:buSzPct val="100000"/>
-              <a:buChar char="●"/>
-            </a:pPr>
-            <a:r>
-              <a:rPr lang="en-US" sz="1300" dirty="0">
+              <a:buChar char="•"/>
+            </a:pPr>
+            <a:r>
+              <a:rPr lang="en-US" sz="1350" dirty="0">
                 <a:solidFill>
                   <a:srgbClr val="24304A"/>
                 </a:solidFill>
@@ -10368,18 +11023,18 @@
               </a:rPr>
               <a:t>Cluster-mode disabled — required for 2 DBs (queue + cache)</a:t>
             </a:r>
-            <a:endParaRPr lang="en-US" sz="1300" dirty="0"/>
-          </a:p>
-          <a:p>
-            <a:pPr marL="228600" indent="-228600">
+            <a:endParaRPr lang="en-US" sz="1350" dirty="0"/>
+          </a:p>
+          <a:p>
+            <a:pPr marL="342900" indent="-342900">
               <a:spcAft>
-                <a:spcPts val="800"/>
+                <a:spcPts val="1000"/>
               </a:spcAft>
               <a:buSzPct val="100000"/>
-              <a:buChar char="●"/>
-            </a:pPr>
-            <a:r>
-              <a:rPr lang="en-US" sz="1300" dirty="0">
+              <a:buChar char="•"/>
+            </a:pPr>
+            <a:r>
+              <a:rPr lang="en-US" sz="1350" dirty="0">
                 <a:solidFill>
                   <a:srgbClr val="24304A"/>
                 </a:solidFill>
@@ -10389,7 +11044,7 @@
               </a:rPr>
               <a:t>Queue jobs survive a primary-node failure</a:t>
             </a:r>
-            <a:endParaRPr lang="en-US" sz="1300" dirty="0"/>
+            <a:endParaRPr lang="en-US" sz="1350" dirty="0"/>
           </a:p>
         </p:txBody>
       </p:sp>
@@ -10401,7 +11056,46 @@
         </p:nvSpPr>
         <p:spPr>
           <a:xfrm>
-            <a:off x="11365992" y="6400800"/>
+            <a:off x="548640" y="5349240"/>
+            <a:ext cx="10149840" cy="411480"/>
+          </a:xfrm>
+          <a:prstGeom prst="rect">
+            <a:avLst/>
+          </a:prstGeom>
+          <a:noFill/>
+          <a:ln/>
+        </p:spPr>
+        <p:txBody>
+          <a:bodyPr wrap="square" lIns="0" tIns="0" rIns="0" bIns="0" rtlCol="0" anchor="ctr"/>
+          <a:lstStyle/>
+          <a:p>
+            <a:pPr algn="ctr" indent="0" marL="0">
+              <a:buNone/>
+            </a:pPr>
+            <a:r>
+              <a:rPr lang="en-US" sz="1350" i="1" dirty="0">
+                <a:solidFill>
+                  <a:srgbClr val="5B6B8C"/>
+                </a:solidFill>
+                <a:latin typeface="Calibri" pitchFamily="34" charset="0"/>
+                <a:ea typeface="Calibri" pitchFamily="34" charset="-122"/>
+                <a:cs typeface="Calibri" pitchFamily="34" charset="-120"/>
+              </a:rPr>
+              <a:t>State lives in managed services, never inside a pod — so the pods stay disposable.</a:t>
+            </a:r>
+            <a:endParaRPr lang="en-US" sz="1350" dirty="0"/>
+          </a:p>
+        </p:txBody>
+      </p:sp>
+      <p:sp>
+        <p:nvSpPr>
+          <p:cNvPr id="11" name="Text 9"/>
+          <p:cNvSpPr txBox="1"/>
+          <p:nvPr/>
+        </p:nvSpPr>
+        <p:spPr>
+          <a:xfrm>
+            <a:off x="11365992" y="6510528"/>
             <a:ext cx="457200" cy="274320"/>
           </a:xfrm>
           <a:prstGeom prst="rect">
@@ -10414,7 +11108,7 @@
           <a:bodyPr wrap="square" lIns="0" tIns="0" rIns="0" bIns="0" rtlCol="0" anchor="ctr"/>
           <a:lstStyle/>
           <a:p>
-            <a:pPr algn="r" indent="0" marL="0">
+            <a:pPr indent="0" marL="0">
               <a:buNone/>
             </a:pPr>
             <a:r>
@@ -10443,13 +11137,6 @@
 <file path=ppt/slides/slide9.xml><?xml version="1.0" encoding="utf-8"?>
 <p:sld xmlns:a="http://schemas.openxmlformats.org/drawingml/2006/main" xmlns:r="http://schemas.openxmlformats.org/officeDocument/2006/relationships" xmlns:p="http://schemas.openxmlformats.org/presentationml/2006/main">
   <p:cSld name="Slide 9">
-    <p:bg>
-      <p:bgPr>
-        <a:solidFill>
-          <a:srgbClr val="FFFFFF"/>
-        </a:solidFill>
-      </p:bgPr>
-    </p:bg>
     <p:spTree>
       <p:nvGrpSpPr>
         <p:cNvPr id="1" name=""/>
@@ -10550,12 +11237,12 @@
         </p:nvSpPr>
         <p:spPr>
           <a:xfrm>
-            <a:off x="2286000" y="2011680"/>
-            <a:ext cx="7589520" cy="1097280"/>
+            <a:off x="2286000" y="1920240"/>
+            <a:ext cx="7589520" cy="1143000"/>
           </a:xfrm>
           <a:prstGeom prst="roundRect">
             <a:avLst>
-              <a:gd name="adj" fmla="val 6667"/>
+              <a:gd name="adj" fmla="val 6400"/>
             </a:avLst>
           </a:prstGeom>
           <a:solidFill>
@@ -10567,13 +11254,6 @@
             </a:solidFill>
             <a:prstDash val="solid"/>
           </a:ln>
-          <a:effectLst>
-            <a:outerShdw sx="100000" sy="100000" kx="0" ky="0" algn="bl" rotWithShape="0" blurRad="101600" dist="38100" dir="5400000">
-              <a:srgbClr val="1E2761">
-                <a:alpha val="15000"/>
-              </a:srgbClr>
-            </a:outerShdw>
-          </a:effectLst>
         </p:spPr>
       </p:sp>
       <p:sp>
@@ -10584,7 +11264,7 @@
         </p:nvSpPr>
         <p:spPr>
           <a:xfrm>
-            <a:off x="2560320" y="2148840"/>
+            <a:off x="2560320" y="2029968"/>
             <a:ext cx="7040880" cy="457200"/>
           </a:xfrm>
           <a:prstGeom prst="rect">
@@ -10623,7 +11303,7 @@
         </p:nvSpPr>
         <p:spPr>
           <a:xfrm>
-            <a:off x="2560320" y="2670048"/>
+            <a:off x="2560320" y="2542032"/>
             <a:ext cx="7040880" cy="411480"/>
           </a:xfrm>
           <a:prstGeom prst="rect">
@@ -10662,14 +11342,14 @@
         </p:nvSpPr>
         <p:spPr>
           <a:xfrm>
-            <a:off x="6080760" y="3108960"/>
-            <a:ext cx="9144" cy="548640"/>
+            <a:off x="6080760" y="3063240"/>
+            <a:ext cx="0" cy="320040"/>
           </a:xfrm>
           <a:prstGeom prst="line">
             <a:avLst/>
           </a:prstGeom>
           <a:noFill/>
-          <a:ln w="31750">
+          <a:ln w="19050">
             <a:solidFill>
               <a:srgbClr val="5B6B8C"/>
             </a:solidFill>
@@ -10686,12 +11366,12 @@
         </p:nvSpPr>
         <p:spPr>
           <a:xfrm>
-            <a:off x="2286000" y="3657600"/>
-            <a:ext cx="7589520" cy="1097280"/>
+            <a:off x="2286000" y="3383280"/>
+            <a:ext cx="7589520" cy="1143000"/>
           </a:xfrm>
           <a:prstGeom prst="roundRect">
             <a:avLst>
-              <a:gd name="adj" fmla="val 6667"/>
+              <a:gd name="adj" fmla="val 6400"/>
             </a:avLst>
           </a:prstGeom>
           <a:solidFill>
@@ -10703,13 +11383,6 @@
             </a:solidFill>
             <a:prstDash val="solid"/>
           </a:ln>
-          <a:effectLst>
-            <a:outerShdw sx="100000" sy="100000" kx="0" ky="0" algn="bl" rotWithShape="0" blurRad="101600" dist="38100" dir="5400000">
-              <a:srgbClr val="1E2761">
-                <a:alpha val="15000"/>
-              </a:srgbClr>
-            </a:outerShdw>
-          </a:effectLst>
         </p:spPr>
       </p:sp>
       <p:sp>
@@ -10720,7 +11393,7 @@
         </p:nvSpPr>
         <p:spPr>
           <a:xfrm>
-            <a:off x="2560320" y="3794760"/>
+            <a:off x="2560320" y="3493008"/>
             <a:ext cx="7040880" cy="457200"/>
           </a:xfrm>
           <a:prstGeom prst="rect">
@@ -10759,7 +11432,7 @@
         </p:nvSpPr>
         <p:spPr>
           <a:xfrm>
-            <a:off x="2560320" y="4315968"/>
+            <a:off x="2560320" y="4005072"/>
             <a:ext cx="7040880" cy="411480"/>
           </a:xfrm>
           <a:prstGeom prst="rect">
@@ -10798,14 +11471,14 @@
         </p:nvSpPr>
         <p:spPr>
           <a:xfrm>
-            <a:off x="6080760" y="4754880"/>
-            <a:ext cx="9144" cy="548640"/>
+            <a:off x="6080760" y="4526280"/>
+            <a:ext cx="0" cy="320040"/>
           </a:xfrm>
           <a:prstGeom prst="line">
             <a:avLst/>
           </a:prstGeom>
           <a:noFill/>
-          <a:ln w="31750">
+          <a:ln w="19050">
             <a:solidFill>
               <a:srgbClr val="5B6B8C"/>
             </a:solidFill>
@@ -10822,12 +11495,12 @@
         </p:nvSpPr>
         <p:spPr>
           <a:xfrm>
-            <a:off x="2286000" y="5303520"/>
-            <a:ext cx="7589520" cy="1097280"/>
+            <a:off x="2286000" y="4846320"/>
+            <a:ext cx="7589520" cy="1143000"/>
           </a:xfrm>
           <a:prstGeom prst="roundRect">
             <a:avLst>
-              <a:gd name="adj" fmla="val 6667"/>
+              <a:gd name="adj" fmla="val 6400"/>
             </a:avLst>
           </a:prstGeom>
           <a:solidFill>
@@ -10839,13 +11512,6 @@
             </a:solidFill>
             <a:prstDash val="solid"/>
           </a:ln>
-          <a:effectLst>
-            <a:outerShdw sx="100000" sy="100000" kx="0" ky="0" algn="bl" rotWithShape="0" blurRad="101600" dist="38100" dir="5400000">
-              <a:srgbClr val="1E2761">
-                <a:alpha val="15000"/>
-              </a:srgbClr>
-            </a:outerShdw>
-          </a:effectLst>
         </p:spPr>
       </p:sp>
       <p:sp>
@@ -10856,7 +11522,7 @@
         </p:nvSpPr>
         <p:spPr>
           <a:xfrm>
-            <a:off x="2560320" y="5440680"/>
+            <a:off x="2560320" y="4956048"/>
             <a:ext cx="7040880" cy="457200"/>
           </a:xfrm>
           <a:prstGeom prst="rect">
@@ -10895,7 +11561,7 @@
         </p:nvSpPr>
         <p:spPr>
           <a:xfrm>
-            <a:off x="2560320" y="5961888"/>
+            <a:off x="2560320" y="5468112"/>
             <a:ext cx="7040880" cy="411480"/>
           </a:xfrm>
           <a:prstGeom prst="rect">
@@ -10934,7 +11600,7 @@
         </p:nvSpPr>
         <p:spPr>
           <a:xfrm>
-            <a:off x="11365992" y="6400800"/>
+            <a:off x="11365992" y="6510528"/>
             <a:ext cx="457200" cy="274320"/>
           </a:xfrm>
           <a:prstGeom prst="rect">
@@ -10947,7 +11613,7 @@
           <a:bodyPr wrap="square" lIns="0" tIns="0" rIns="0" bIns="0" rtlCol="0" anchor="ctr"/>
           <a:lstStyle/>
           <a:p>
-            <a:pPr algn="r" indent="0" marL="0">
+            <a:pPr indent="0" marL="0">
               <a:buNone/>
             </a:pPr>
             <a:r>
